--- a/答辩PPT/医护洞察与温度指引引擎答辩.pptx
+++ b/答辩PPT/医护洞察与温度指引引擎答辩.pptx
@@ -5,7 +5,7 @@
     <p:sldMasterId id="2147483648" r:id="rId0"/>
   </p:sldMasterIdLst>
   <p:notesMasterIdLst>
-    <p:notesMasterId r:id="rId13"/>
+    <p:notesMasterId r:id="rId14"/>
   </p:notesMasterIdLst>
   <p:sldIdLst>
     <p:sldId id="256" r:id="rId1"/>
@@ -20,6 +20,7 @@
     <p:sldId id="265" r:id="rId10"/>
     <p:sldId id="266" r:id="rId11"/>
     <p:sldId id="267" r:id="rId12"/>
+    <p:sldId id="268" r:id="rId13"/>
   </p:sldIdLst>
   <p:sldSz cx="12192000" cy="6858000"/>
   <p:notesSz cx="6858000" cy="12192000"/>
@@ -555,7 +556,7 @@
   <p:cSld>
     <p:spTree>
       <p:nvGrpSpPr>
-        <p:cNvPr id="1" name="" descr="&lt;Slide&gt;&#10;  &lt;Box style={{ width: '1280px', height: '720px', position: 'relative', background: 'linear-gradient(135deg, #1A365D 0%, #2B6CB0 55%, #38B2AC 100%)', overflow: 'hidden' }}&gt;&#10;    {/* 背景抽象数据流装饰 */}&#10;    &lt;Box style={{ position: 'absolute', top: 40, right: 40, width: 460, height: 460, borderRadius: '50%', background: 'rgba(56,178,172,0.25)', opacity: 0.5 }} /&gt;&#10;    &lt;Box style={{ position: 'absolute', bottom: 40, left: 40, width: 520, height: 520, borderRadius: '50%', background: 'rgba(43,108,176,0.3)', opacity: 0.5 }} /&gt;&#10;    &lt;Box style={{ position: 'absolute', top: 180, right: 120, width: 280, height: 2, background: 'rgba(255,255,255,0.25)' }} /&gt;&#10;    &lt;Box style={{ position: 'absolute', top: 320, right: 60, width: 380, height: 2, background: 'rgba(255,255,255,0.18)' }} /&gt;&#10;    &lt;Box style={{ position: 'absolute', top: 260, right: 200, width: 10, height: 10, borderRadius: '50%', background: '#38B2AC' }} /&gt;&#10;    &lt;Box style={{ position: 'absolute', top: 200, right: 340, width: 6, height: 6, borderRadius: '50%', background: '#FFFFFF', opacity: 0.6 }} /&gt;&#10;&#10;    {/* 主内容 */}&#10;    &lt;Box style={{ position: 'relative', zIndex: 1, flexDirection: 'column', justifyContent: 'center', height: '100%', padding: '0 80px' }}&gt;&#10;      &lt;Text style={{ fontSize: 20, color: '#7FD1CD', letterSpacing: 4, marginBottom: 24 }}&gt;AI 编程赛 · 赛道四 课题 2&lt;/Text&gt;&#10;      &lt;Text style={{ fontSize: 64, fontWeight: 'bold', color: '#FFFFFF', lineHeight: 1.25, marginBottom: 28 }}&gt;&#10;        医护洞察与温度指引引擎&#10;      &lt;/Text&gt;&#10;      &lt;Text style={{ fontSize: 26, color: 'rgba(255,255,255,0.92)', lineHeight: 1.6, maxWidth: 720 }}&gt;&#10;        把冷冰冰的理赔病历，转译成患者&lt;Text style={{ color: '#7FD1CD', fontWeight: 'bold' }}&gt;看得懂、用得上的温度指引&lt;/Text&gt;&#10;      &lt;/Text&gt;&#10;      &lt;Box style={{ flexDirection: 'row', gap: 16, marginTop: 48 }}&gt;&#10;        &lt;Box style={{ padding: '12px 24px', borderRadius: 8, background: 'rgba(255,255,255,0.12)', border: '1px solid rgba(255,255,255,0.25)' }}&gt;&#10;          &lt;Text style={{ fontSize: 18, color: '#FFFFFF' }}&gt;结构化 · 痛点 · 指引 · 画像&lt;/Text&gt;&#10;        &lt;/Box&gt;&#10;        &lt;Box style={{ padding: '12px 24px', borderRadius: 8, background: 'rgba(255,255,255,0.12)', border: '1px solid rgba(255,255,255,0.25)' }}&gt;&#10;          &lt;Text style={{ fontSize: 18, color: '#FFFFFF' }}&gt;四模块全链路 · 数据可溯源&lt;/Text&gt;&#10;        &lt;/Box&gt;&#10;      &lt;/Box&gt;&#10;    &lt;/Box&gt;&#10;  &lt;/Box&gt;&#10;&lt;/Slide&gt;&#10;"/>
+        <p:cNvPr id="1" name=""/>
         <p:cNvGrpSpPr/>
         <p:nvPr/>
       </p:nvGrpSpPr>
@@ -599,7 +600,10 @@
         </p:spPr>
         <p:txBody>
           <a:bodyPr/>
-          <a:p/>
+          <a:p>
+            <a:pPr/>
+            <a:endParaRPr/>
+          </a:p>
         </p:txBody>
       </p:sp>
       <p:sp>
@@ -664,7 +668,10 @@
         </p:spPr>
         <p:txBody>
           <a:bodyPr/>
-          <a:p/>
+          <a:p>
+            <a:pPr/>
+            <a:endParaRPr/>
+          </a:p>
         </p:txBody>
       </p:sp>
       <p:sp>
@@ -729,7 +736,10 @@
         </p:spPr>
         <p:txBody>
           <a:bodyPr/>
-          <a:p/>
+          <a:p>
+            <a:pPr/>
+            <a:endParaRPr/>
+          </a:p>
         </p:txBody>
       </p:sp>
       <p:sp>
@@ -755,7 +765,10 @@
         </p:spPr>
         <p:txBody>
           <a:bodyPr/>
-          <a:p/>
+          <a:p>
+            <a:pPr/>
+            <a:endParaRPr/>
+          </a:p>
         </p:txBody>
       </p:sp>
       <p:sp>
@@ -781,7 +794,10 @@
         </p:spPr>
         <p:txBody>
           <a:bodyPr/>
-          <a:p/>
+          <a:p>
+            <a:pPr/>
+            <a:endParaRPr/>
+          </a:p>
         </p:txBody>
       </p:sp>
       <p:sp>
@@ -844,7 +860,10 @@
         </p:spPr>
         <p:txBody>
           <a:bodyPr/>
-          <a:p/>
+          <a:p>
+            <a:pPr/>
+            <a:endParaRPr/>
+          </a:p>
         </p:txBody>
       </p:sp>
       <p:sp>
@@ -909,7 +928,10 @@
         </p:spPr>
         <p:txBody>
           <a:bodyPr/>
-          <a:p/>
+          <a:p>
+            <a:pPr/>
+            <a:endParaRPr/>
+          </a:p>
         </p:txBody>
       </p:sp>
       <p:sp>
@@ -1123,7 +1145,10 @@
         </p:spPr>
         <p:txBody>
           <a:bodyPr/>
-          <a:p/>
+          <a:p>
+            <a:pPr/>
+            <a:endParaRPr/>
+          </a:p>
         </p:txBody>
       </p:sp>
       <p:sp>
@@ -1253,7 +1278,10 @@
         </p:spPr>
         <p:txBody>
           <a:bodyPr/>
-          <a:p/>
+          <a:p>
+            <a:pPr/>
+            <a:endParaRPr/>
+          </a:p>
         </p:txBody>
       </p:sp>
       <p:sp>
@@ -1321,7 +1349,7 @@
   <p:cSld>
     <p:spTree>
       <p:nvGrpSpPr>
-        <p:cNvPr id="16" name="" descr="&lt;Slide&gt;&#10;  &lt;Box style={{ width: '1280px', height: '720px', position: 'relative', background: 'linear-gradient(135deg, #2B6CB0 0%, #38B2AC 100%)', flexDirection: 'column', justifyContent: 'center', alignItems: 'center' }}&gt;&#10;    &lt;Box style={{ position: 'absolute', top: 80, right: 100, width: 320, height: 320, borderRadius: '50%', background: 'rgba(255,255,255,0.1)' }} /&gt;&#10;    &lt;Box style={{ position: 'absolute', bottom: 60, left: 80, width: 260, height: 260, borderRadius: '50%', background: 'rgba(255,255,255,0.08)' }} /&gt;&#10;    &lt;Text style={{ fontSize: 24, color: 'rgba(255,255,255,0.85)', letterSpacing: 6, marginBottom: 24 }}&gt;CHAPTER 03&lt;/Text&gt;&#10;    &lt;Text style={{ fontSize: 60, fontWeight: 'bold', color: '#FFFFFF', marginBottom: 20 }}&gt;落地与合规&lt;/Text&gt;&#10;    &lt;Text style={{ fontSize: 22, color: 'rgba(255,255,255,0.9)' }}&gt;温度指引如何触达患者 · 如何安全落地&lt;/Text&gt;&#10;  &lt;/Box&gt;&#10;&lt;/Slide&gt;&#10;"/>
+        <p:cNvPr id="16" name=""/>
         <p:cNvGrpSpPr/>
         <p:nvPr/>
       </p:nvGrpSpPr>
@@ -1362,7 +1390,10 @@
         </p:spPr>
         <p:txBody>
           <a:bodyPr/>
-          <a:p/>
+          <a:p>
+            <a:pPr/>
+            <a:endParaRPr/>
+          </a:p>
         </p:txBody>
       </p:sp>
       <p:sp>
@@ -1560,7 +1591,10 @@
         </p:spPr>
         <p:txBody>
           <a:bodyPr/>
-          <a:p/>
+          <a:p>
+            <a:pPr/>
+            <a:endParaRPr/>
+          </a:p>
         </p:txBody>
       </p:sp>
       <p:sp>
@@ -1625,7 +1659,10 @@
         </p:spPr>
         <p:txBody>
           <a:bodyPr/>
-          <a:p/>
+          <a:p>
+            <a:pPr/>
+            <a:endParaRPr/>
+          </a:p>
         </p:txBody>
       </p:sp>
     </p:spTree>
@@ -1638,7 +1675,7 @@
   <p:cSld>
     <p:spTree>
       <p:nvGrpSpPr>
-        <p:cNvPr id="23" name="" descr="&lt;Slide&gt;&#10;  &lt;Box style={{ width: '1280px', height: '720px', background: '#FFFFFF', flexDirection: 'column', padding: '40px 70px' }}&gt;&#10;    &lt;Box style={{ flexDirection: 'row', alignItems: 'baseline', marginBottom: 32 }}&gt;&#10;      &lt;Text style={{ fontSize: 34, fontWeight: 'bold', color: '#1A365D' }}&gt;触达闭环与合规&lt;/Text&gt;&#10;      &lt;Text style={{ fontSize: 18, color: '#718096', marginLeft: 14 }}&gt;从技术能力到实际价值&lt;/Text&gt;&#10;    &lt;/Box&gt;&#10;&#10;    &lt;Box style={{ flexDirection: 'row', gap: 28, flex: 1 }}&gt;&#10;      {/* 左：触达 + 闭环 */}&#10;      &lt;Box style={{ flex: 1.1, flexDirection: 'column', gap: 16, justifyContent: 'center' }}&gt;&#10;        &lt;Text style={{ fontSize: 20, fontWeight: 'bold', color: '#1A365D', marginBottom: 4 }}&gt;三条触达路径&lt;/Text&gt;&#10;        {[&#10;          { t: '结案即时触达', d: '理赔结案通知里附带&quot;就医复盘指引&quot;' },&#10;          { t: '主动关怀外呼/企微', d: '针对高风险痛点患者主动回访' },&#10;          { t: 'App/小程序自助查看', d: '长期健康档案沉淀' },&#10;        ].map((item, idx) =&gt; (&#10;          &lt;Box key={idx} style={{ flexDirection: 'row', alignItems: 'center', padding: '14px 20px', borderRadius: 10, background: '#F7FAFC', border: '1px solid #E2E8F0' }}&gt;&#10;            &lt;Box style={{ width: 28, height: 28, borderRadius: '50%', background: '#2B6CB0', alignItems: 'center', justifyContent: 'center', marginRight: 14 }}&gt;&#10;              &lt;Text style={{ fontSize: 14, fontWeight: 'bold', color: '#FFFFFF' }}&gt;{idx + 1}&lt;/Text&gt;&#10;            &lt;/Box&gt;&#10;            &lt;Box&gt;&#10;              &lt;Text style={{ fontSize: 18, fontWeight: 'bold', color: '#1A365D' }}&gt;{item.t}&lt;/Text&gt;&#10;              &lt;Text style={{ fontSize: 16, color: '#718096' }}&gt;{item.d}&lt;/Text&gt;&#10;            &lt;/Box&gt;&#10;          &lt;/Box&gt;&#10;        ))}&#10;        &lt;Text style={{ fontSize: 16, color: '#2C7A7B', marginTop: 4, fontStyle: 'italic' }}&gt;&#10;          反馈闭环：采纳率 → 标注 → prompt/规则迭代 → 再输出&#10;        &lt;/Text&gt;&#10;      &lt;/Box&gt;&#10;&#10;      {/* 右：合规 */}&#10;      &lt;Box style={{ flex: 0.9, borderRadius: 16, background: 'linear-gradient(135deg, #1A365D 0%, #2B6CB0 100%)', padding: 32, flexDirection: 'column', justifyContent: 'center' }}&gt;&#10;        &lt;Text style={{ fontSize: 20, fontWeight: 'bold', color: '#7FD1CD', marginBottom: 20 }}&gt;5 项合规设计&lt;/Text&gt;&#10;        {['数据最小化', '展示前二次脱敏', '免责声明', '本地推理优先', '可审计（置信度+证据）'].map((c, idx) =&gt; (&#10;          &lt;Box key={idx} style={{ flexDirection: 'row', alignItems: 'center', marginBottom: 14 }}&gt;&#10;            &lt;Text style={{ fontSize: 16, color: '#38B2AC', marginRight: 12 }}&gt;✓&lt;/Text&gt;&#10;            &lt;Text style={{ fontSize: 18, color: '#FFFFFF' }}&gt;{c}&lt;/Text&gt;&#10;          &lt;/Box&gt;&#10;        ))}&#10;      &lt;/Box&gt;&#10;    &lt;/Box&gt;&#10;&#10;    &lt;Box style={{ flexDirection: 'row', alignItems: 'center', marginTop: 24 }}&gt;&#10;      &lt;Text style={{ fontSize: 14, color: '#718096' }}&gt;医护洞察与温度指引引擎&lt;/Text&gt;&#10;      &lt;Text style={{ fontSize: 14, color: '#718096', marginLeft: 'auto' }}&gt;11 / 12&lt;/Text&gt;&#10;    &lt;/Box&gt;&#10;  &lt;/Box&gt;&#10;&lt;/Slide&gt;&#10;"/>
+        <p:cNvPr id="23" name=""/>
         <p:cNvGrpSpPr/>
         <p:nvPr/>
       </p:nvGrpSpPr>
@@ -1671,7 +1708,10 @@
         </p:spPr>
         <p:txBody>
           <a:bodyPr/>
-          <a:p/>
+          <a:p>
+            <a:pPr/>
+            <a:endParaRPr/>
+          </a:p>
         </p:txBody>
       </p:sp>
       <p:sp>
@@ -1807,7 +1847,10 @@
         </p:spPr>
         <p:txBody>
           <a:bodyPr/>
-          <a:p/>
+          <a:p>
+            <a:pPr/>
+            <a:endParaRPr/>
+          </a:p>
         </p:txBody>
       </p:sp>
       <p:sp>
@@ -1870,7 +1913,10 @@
         </p:spPr>
         <p:txBody>
           <a:bodyPr/>
-          <a:p/>
+          <a:p>
+            <a:pPr/>
+            <a:endParaRPr/>
+          </a:p>
         </p:txBody>
       </p:sp>
       <p:sp>
@@ -2036,7 +2082,10 @@
         </p:spPr>
         <p:txBody>
           <a:bodyPr/>
-          <a:p/>
+          <a:p>
+            <a:pPr/>
+            <a:endParaRPr/>
+          </a:p>
         </p:txBody>
       </p:sp>
       <p:sp>
@@ -2099,7 +2148,10 @@
         </p:spPr>
         <p:txBody>
           <a:bodyPr/>
-          <a:p/>
+          <a:p>
+            <a:pPr/>
+            <a:endParaRPr/>
+          </a:p>
         </p:txBody>
       </p:sp>
       <p:sp>
@@ -2255,7 +2307,10 @@
         </p:spPr>
         <p:txBody>
           <a:bodyPr/>
-          <a:p/>
+          <a:p>
+            <a:pPr/>
+            <a:endParaRPr/>
+          </a:p>
         </p:txBody>
       </p:sp>
       <p:sp>
@@ -2318,7 +2373,10 @@
         </p:spPr>
         <p:txBody>
           <a:bodyPr/>
-          <a:p/>
+          <a:p>
+            <a:pPr/>
+            <a:endParaRPr/>
+          </a:p>
         </p:txBody>
       </p:sp>
       <p:sp>
@@ -2562,7 +2620,10 @@
         </p:spPr>
         <p:txBody>
           <a:bodyPr/>
-          <a:p/>
+          <a:p>
+            <a:pPr/>
+            <a:endParaRPr/>
+          </a:p>
         </p:txBody>
       </p:sp>
       <p:sp>
@@ -3037,16 +3098,22 @@
               </a:lnSpc>
             </a:pPr>
             <a:r>
-              <a:rPr lang="en-US" sz="1050">
+              <a:rPr lang="zh-CN" sz="1050">
                 <a:solidFill>
                   <a:srgbClr val="718096"/>
                 </a:solidFill>
                 <a:latin typeface="Microsoft YaHei"/>
                 <a:ea typeface="Microsoft YaHei"/>
               </a:rPr>
-              <a:t>11 / 12</a:t>
-            </a:r>
-            <a:endParaRPr/>
+              <a:t>11 / 13</a:t>
+            </a:r>
+            <a:endParaRPr lang="en-US" sz="1050">
+              <a:solidFill>
+                <a:srgbClr val="718096"/>
+              </a:solidFill>
+              <a:latin typeface="Microsoft YaHei"/>
+              <a:ea typeface="Microsoft YaHei"/>
+            </a:endParaRPr>
           </a:p>
         </p:txBody>
       </p:sp>
@@ -3060,7 +3127,7 @@
   <p:cSld>
     <p:spTree>
       <p:nvGrpSpPr>
-        <p:cNvPr id="58" name="" descr="&lt;Slide&gt;&#10;  &lt;Box style={{ width: '1280px', height: '720px', position: 'relative', background: 'linear-gradient(135deg, #1A365D 0%, #2B6CB0 55%, #38B2AC 100%)', flexDirection: 'column', justifyContent: 'center', alignItems: 'center' }}&gt;&#10;    &lt;Box style={{ position: 'absolute', top: 60, right: 80, width: 300, height: 300, borderRadius: '50%', background: 'rgba(255,255,255,0.08)' }} /&gt;&#10;    &lt;Box style={{ position: 'absolute', bottom: 60, left: 80, width: 240, height: 240, borderRadius: '50%', background: 'rgba(255,255,255,0.06)' }} /&gt;&#10;    &lt;Text style={{ fontSize: 48, fontWeight: 'bold', color: '#FFFFFF', textAlign: 'center', lineHeight: 1.4, marginBottom: 32, maxWidth: 900 }}&gt;&#10;      让每一份理赔病历，&lt;br /&gt;都多一份有温度的答案&#10;    &lt;/Text&gt;&#10;    &lt;Text style={{ fontSize: 22, color: 'rgba(255,255,255,0.85)', marginBottom: 48 }}&gt;结构化 · 洞察 · 指引 · 画像 —— 数据可溯源，温度有依据&lt;/Text&gt;&#10;    &lt;Text style={{ fontSize: 16, color: 'rgba(255,255,255,0.6)' }}&gt;谢谢观看 · 医护洞察与温度指引引擎&lt;/Text&gt;&#10;  &lt;/Box&gt;&#10;&lt;/Slide&gt;&#10;"/>
+        <p:cNvPr id="58" name=""/>
         <p:cNvGrpSpPr/>
         <p:nvPr/>
       </p:nvGrpSpPr>
@@ -3075,6 +3142,2497 @@
       <p:sp>
         <p:nvSpPr>
           <p:cNvPr id="59" name=""/>
+          <p:cNvSpPr/>
+          <p:nvPr/>
+        </p:nvSpPr>
+        <p:spPr>
+          <a:xfrm rot="0" flipH="0" flipV="0">
+            <a:off x="0" y="0"/>
+            <a:ext cx="12192000" cy="6858000"/>
+          </a:xfrm>
+          <a:prstGeom prst="rect">
+            <a:avLst/>
+          </a:prstGeom>
+          <a:solidFill>
+            <a:srgbClr val="FFFFFF"/>
+          </a:solidFill>
+          <a:ln/>
+        </p:spPr>
+        <p:txBody>
+          <a:bodyPr/>
+          <a:p>
+            <a:pPr/>
+            <a:endParaRPr/>
+          </a:p>
+        </p:txBody>
+      </p:sp>
+      <p:sp>
+        <p:nvSpPr>
+          <p:cNvPr id="60" name="" descr="{&quot;isTemplate&quot;:true,&quot;type&quot;:&quot;text&quot;}"/>
+          <p:cNvSpPr txBox="1"/>
+          <p:nvPr/>
+        </p:nvSpPr>
+        <p:spPr>
+          <a:xfrm rot="0" flipH="0" flipV="0">
+            <a:off x="666750" y="381000"/>
+            <a:ext cx="1943100" cy="390525"/>
+          </a:xfrm>
+          <a:prstGeom prst="rect"/>
+        </p:spPr>
+        <p:txBody>
+          <a:bodyPr wrap="none" lIns="0" tIns="0" rIns="0" bIns="0"/>
+          <a:p>
+            <a:pPr>
+              <a:lnSpc>
+                <a:spcPct val="100000"/>
+              </a:lnSpc>
+            </a:pPr>
+            <a:r>
+              <a:rPr lang="zh-CN" sz="2550" b="1">
+                <a:solidFill>
+                  <a:srgbClr val="1A365D"/>
+                </a:solidFill>
+                <a:latin typeface="Microsoft YaHei"/>
+                <a:ea typeface="Microsoft YaHei"/>
+              </a:rPr>
+              <a:t>理赔关怀增强</a:t>
+            </a:r>
+            <a:endParaRPr/>
+          </a:p>
+        </p:txBody>
+      </p:sp>
+      <p:sp>
+        <p:nvSpPr>
+          <p:cNvPr id="61" name="" descr="{&quot;isTemplate&quot;:true,&quot;type&quot;:&quot;text&quot;}"/>
+          <p:cNvSpPr txBox="1"/>
+          <p:nvPr/>
+        </p:nvSpPr>
+        <p:spPr>
+          <a:xfrm rot="0" flipH="0" flipV="0">
+            <a:off x="2743200" y="381000"/>
+            <a:ext cx="3781425" cy="390525"/>
+          </a:xfrm>
+          <a:prstGeom prst="rect"/>
+        </p:spPr>
+        <p:txBody>
+          <a:bodyPr wrap="none" lIns="0" tIns="0" rIns="0" bIns="0"/>
+          <a:p>
+            <a:pPr>
+              <a:lnSpc>
+                <a:spcPct val="100000"/>
+              </a:lnSpc>
+            </a:pPr>
+            <a:r>
+              <a:rPr lang="zh-CN" sz="1350">
+                <a:solidFill>
+                  <a:srgbClr val="718096"/>
+                </a:solidFill>
+                <a:latin typeface="Microsoft YaHei"/>
+                <a:ea typeface="Microsoft YaHei"/>
+              </a:rPr>
+              <a:t>把</a:t>
+            </a:r>
+            <a:r>
+              <a:rPr lang="en-US" sz="1350">
+                <a:solidFill>
+                  <a:srgbClr val="718096"/>
+                </a:solidFill>
+                <a:latin typeface="Microsoft YaHei"/>
+                <a:ea typeface="Microsoft YaHei"/>
+              </a:rPr>
+              <a:t> 1.2 </a:t>
+            </a:r>
+            <a:r>
+              <a:rPr lang="zh-CN" sz="1350">
+                <a:solidFill>
+                  <a:srgbClr val="718096"/>
+                </a:solidFill>
+                <a:latin typeface="Microsoft YaHei"/>
+                <a:ea typeface="Microsoft YaHei"/>
+              </a:rPr>
+              <a:t>万条真实客服对话，变成懂理赔的关怀底座</a:t>
+            </a:r>
+            <a:endParaRPr/>
+          </a:p>
+        </p:txBody>
+      </p:sp>
+      <p:sp>
+        <p:nvSpPr>
+          <p:cNvPr id="62" name=""/>
+          <p:cNvSpPr/>
+          <p:nvPr/>
+        </p:nvSpPr>
+        <p:spPr>
+          <a:xfrm rot="0" flipH="0" flipV="0">
+            <a:off x="666750" y="1657350"/>
+            <a:ext cx="6086475" cy="676275"/>
+          </a:xfrm>
+          <a:prstGeom prst="roundRect">
+            <a:avLst>
+              <a:gd name="adj" fmla="val 14085"/>
+            </a:avLst>
+          </a:prstGeom>
+          <a:solidFill>
+            <a:srgbClr val="F7FAFC"/>
+          </a:solidFill>
+          <a:ln w="12700">
+            <a:solidFill>
+              <a:srgbClr val="E2E8F0"/>
+            </a:solidFill>
+            <a:prstDash val="solid"/>
+          </a:ln>
+        </p:spPr>
+        <p:txBody>
+          <a:bodyPr/>
+          <a:p>
+            <a:pPr/>
+            <a:endParaRPr/>
+          </a:p>
+        </p:txBody>
+      </p:sp>
+      <p:sp>
+        <p:nvSpPr>
+          <p:cNvPr id="63" name=""/>
+          <p:cNvSpPr/>
+          <p:nvPr/>
+        </p:nvSpPr>
+        <p:spPr>
+          <a:xfrm rot="0" flipH="0" flipV="0">
+            <a:off x="838200" y="1876425"/>
+            <a:ext cx="247650" cy="247650"/>
+          </a:xfrm>
+          <a:custGeom>
+            <a:pathLst>
+              <a:path w="26" h="26">
+                <a:moveTo>
+                  <a:pt x="13" y="0"/>
+                </a:moveTo>
+                <a:lnTo>
+                  <a:pt x="13" y="0"/>
+                </a:lnTo>
+                <a:cubicBezTo>
+                  <a:pt x="20" y="0"/>
+                  <a:pt x="26" y="6"/>
+                  <a:pt x="26" y="13"/>
+                </a:cubicBezTo>
+                <a:lnTo>
+                  <a:pt x="26" y="13"/>
+                </a:lnTo>
+                <a:cubicBezTo>
+                  <a:pt x="26" y="20"/>
+                  <a:pt x="20" y="26"/>
+                  <a:pt x="13" y="26"/>
+                </a:cubicBezTo>
+                <a:lnTo>
+                  <a:pt x="13" y="26"/>
+                </a:lnTo>
+                <a:cubicBezTo>
+                  <a:pt x="6" y="26"/>
+                  <a:pt x="0" y="20"/>
+                  <a:pt x="0" y="13"/>
+                </a:cubicBezTo>
+                <a:lnTo>
+                  <a:pt x="0" y="13"/>
+                </a:lnTo>
+                <a:cubicBezTo>
+                  <a:pt x="0" y="6"/>
+                  <a:pt x="6" y="0"/>
+                  <a:pt x="13" y="0"/>
+                </a:cubicBezTo>
+                <a:close/>
+              </a:path>
+            </a:pathLst>
+          </a:custGeom>
+          <a:solidFill>
+            <a:srgbClr val="2B6CB0"/>
+          </a:solidFill>
+          <a:ln/>
+        </p:spPr>
+        <p:txBody>
+          <a:bodyPr/>
+          <a:p>
+            <a:pPr/>
+            <a:endParaRPr/>
+          </a:p>
+        </p:txBody>
+      </p:sp>
+      <p:sp>
+        <p:nvSpPr>
+          <p:cNvPr id="64" name="" descr="{&quot;isTemplate&quot;:true,&quot;type&quot;:&quot;text&quot;}"/>
+          <p:cNvSpPr txBox="1"/>
+          <p:nvPr/>
+        </p:nvSpPr>
+        <p:spPr>
+          <a:xfrm rot="0" flipH="0" flipV="0">
+            <a:off x="923925" y="1924050"/>
+            <a:ext cx="85725" cy="152400"/>
+          </a:xfrm>
+          <a:prstGeom prst="rect"/>
+        </p:spPr>
+        <p:txBody>
+          <a:bodyPr wrap="none" lIns="0" tIns="0" rIns="0" bIns="0"/>
+          <a:p>
+            <a:pPr>
+              <a:lnSpc>
+                <a:spcPct val="100000"/>
+              </a:lnSpc>
+            </a:pPr>
+            <a:r>
+              <a:rPr lang="en-US" sz="975" b="1">
+                <a:solidFill>
+                  <a:srgbClr val="FFFFFF"/>
+                </a:solidFill>
+                <a:latin typeface="Microsoft YaHei"/>
+                <a:ea typeface="Microsoft YaHei"/>
+              </a:rPr>
+              <a:t>1</a:t>
+            </a:r>
+            <a:endParaRPr/>
+          </a:p>
+        </p:txBody>
+      </p:sp>
+      <p:sp>
+        <p:nvSpPr>
+          <p:cNvPr id="65" name="" descr="{&quot;isTemplate&quot;:true,&quot;type&quot;:&quot;text&quot;}"/>
+          <p:cNvSpPr txBox="1"/>
+          <p:nvPr/>
+        </p:nvSpPr>
+        <p:spPr>
+          <a:xfrm rot="0" flipH="0" flipV="0">
+            <a:off x="1219200" y="1771650"/>
+            <a:ext cx="5362575" cy="200025"/>
+          </a:xfrm>
+          <a:prstGeom prst="rect"/>
+        </p:spPr>
+        <p:txBody>
+          <a:bodyPr wrap="none" lIns="0" tIns="0" rIns="0" bIns="0"/>
+          <a:p>
+            <a:pPr>
+              <a:lnSpc>
+                <a:spcPct val="100000"/>
+              </a:lnSpc>
+            </a:pPr>
+            <a:r>
+              <a:rPr lang="zh-CN" sz="1275" b="1">
+                <a:solidFill>
+                  <a:srgbClr val="1A365D"/>
+                </a:solidFill>
+                <a:latin typeface="Microsoft YaHei"/>
+                <a:ea typeface="Microsoft YaHei"/>
+              </a:rPr>
+              <a:t>真实问答库（</a:t>
+            </a:r>
+            <a:r>
+              <a:rPr lang="en-US" sz="1275" b="1">
+                <a:solidFill>
+                  <a:srgbClr val="1A365D"/>
+                </a:solidFill>
+                <a:latin typeface="Microsoft YaHei"/>
+                <a:ea typeface="Microsoft YaHei"/>
+              </a:rPr>
+              <a:t>RAG </a:t>
+            </a:r>
+            <a:r>
+              <a:rPr lang="zh-CN" sz="1275" b="1">
+                <a:solidFill>
+                  <a:srgbClr val="1A365D"/>
+                </a:solidFill>
+                <a:latin typeface="Microsoft YaHei"/>
+                <a:ea typeface="Microsoft YaHei"/>
+              </a:rPr>
+              <a:t>底座）</a:t>
+            </a:r>
+            <a:endParaRPr/>
+          </a:p>
+        </p:txBody>
+      </p:sp>
+      <p:sp>
+        <p:nvSpPr>
+          <p:cNvPr id="66" name="" descr="{&quot;isTemplate&quot;:true,&quot;type&quot;:&quot;text&quot;}"/>
+          <p:cNvSpPr txBox="1"/>
+          <p:nvPr/>
+        </p:nvSpPr>
+        <p:spPr>
+          <a:xfrm rot="0" flipH="0" flipV="0">
+            <a:off x="1219200" y="1971675"/>
+            <a:ext cx="5362575" cy="247650"/>
+          </a:xfrm>
+          <a:prstGeom prst="rect"/>
+        </p:spPr>
+        <p:txBody>
+          <a:bodyPr wrap="none" lIns="0" tIns="0" rIns="0" bIns="0"/>
+          <a:p>
+            <a:pPr>
+              <a:lnSpc>
+                <a:spcPct val="150000"/>
+              </a:lnSpc>
+            </a:pPr>
+            <a:r>
+              <a:rPr lang="en-US" sz="1050">
+                <a:solidFill>
+                  <a:srgbClr val="718096"/>
+                </a:solidFill>
+                <a:latin typeface="Microsoft YaHei"/>
+                <a:ea typeface="Microsoft YaHei"/>
+              </a:rPr>
+              <a:t>12594 </a:t>
+            </a:r>
+            <a:r>
+              <a:rPr lang="zh-CN" sz="1050">
+                <a:solidFill>
+                  <a:srgbClr val="718096"/>
+                </a:solidFill>
+                <a:latin typeface="Microsoft YaHei"/>
+                <a:ea typeface="Microsoft YaHei"/>
+              </a:rPr>
+              <a:t>条客服会话</a:t>
+            </a:r>
+            <a:r>
+              <a:rPr lang="en-US" sz="1050">
+                <a:solidFill>
+                  <a:srgbClr val="718096"/>
+                </a:solidFill>
+                <a:latin typeface="Microsoft YaHei"/>
+                <a:ea typeface="Microsoft YaHei"/>
+              </a:rPr>
+              <a:t> → 38846 </a:t>
+            </a:r>
+            <a:r>
+              <a:rPr lang="zh-CN" sz="1050">
+                <a:solidFill>
+                  <a:srgbClr val="718096"/>
+                </a:solidFill>
+                <a:latin typeface="Microsoft YaHei"/>
+                <a:ea typeface="Microsoft YaHei"/>
+              </a:rPr>
+              <a:t>个问答对，</a:t>
+            </a:r>
+            <a:r>
+              <a:rPr lang="en-US" sz="1050">
+                <a:solidFill>
+                  <a:srgbClr val="718096"/>
+                </a:solidFill>
+                <a:latin typeface="Microsoft YaHei"/>
+                <a:ea typeface="Microsoft YaHei"/>
+              </a:rPr>
+              <a:t>10 </a:t>
+            </a:r>
+            <a:r>
+              <a:rPr lang="zh-CN" sz="1050">
+                <a:solidFill>
+                  <a:srgbClr val="718096"/>
+                </a:solidFill>
+                <a:latin typeface="Microsoft YaHei"/>
+                <a:ea typeface="Microsoft YaHei"/>
+              </a:rPr>
+              <a:t>主题倒排索引</a:t>
+            </a:r>
+            <a:endParaRPr/>
+          </a:p>
+        </p:txBody>
+      </p:sp>
+      <p:sp>
+        <p:nvSpPr>
+          <p:cNvPr id="67" name=""/>
+          <p:cNvSpPr/>
+          <p:nvPr/>
+        </p:nvSpPr>
+        <p:spPr>
+          <a:xfrm rot="0" flipH="0" flipV="0">
+            <a:off x="666750" y="2447925"/>
+            <a:ext cx="6086475" cy="676275"/>
+          </a:xfrm>
+          <a:prstGeom prst="roundRect">
+            <a:avLst>
+              <a:gd name="adj" fmla="val 14085"/>
+            </a:avLst>
+          </a:prstGeom>
+          <a:solidFill>
+            <a:srgbClr val="F7FAFC"/>
+          </a:solidFill>
+          <a:ln w="12700">
+            <a:solidFill>
+              <a:srgbClr val="E2E8F0"/>
+            </a:solidFill>
+            <a:prstDash val="solid"/>
+          </a:ln>
+        </p:spPr>
+        <p:txBody>
+          <a:bodyPr/>
+          <a:p>
+            <a:pPr/>
+            <a:endParaRPr/>
+          </a:p>
+        </p:txBody>
+      </p:sp>
+      <p:sp>
+        <p:nvSpPr>
+          <p:cNvPr id="68" name=""/>
+          <p:cNvSpPr/>
+          <p:nvPr/>
+        </p:nvSpPr>
+        <p:spPr>
+          <a:xfrm rot="0" flipH="0" flipV="0">
+            <a:off x="838200" y="2667000"/>
+            <a:ext cx="247650" cy="247650"/>
+          </a:xfrm>
+          <a:custGeom>
+            <a:pathLst>
+              <a:path w="26" h="26">
+                <a:moveTo>
+                  <a:pt x="13" y="0"/>
+                </a:moveTo>
+                <a:lnTo>
+                  <a:pt x="13" y="0"/>
+                </a:lnTo>
+                <a:cubicBezTo>
+                  <a:pt x="20" y="0"/>
+                  <a:pt x="26" y="6"/>
+                  <a:pt x="26" y="13"/>
+                </a:cubicBezTo>
+                <a:lnTo>
+                  <a:pt x="26" y="13"/>
+                </a:lnTo>
+                <a:cubicBezTo>
+                  <a:pt x="26" y="20"/>
+                  <a:pt x="20" y="26"/>
+                  <a:pt x="13" y="26"/>
+                </a:cubicBezTo>
+                <a:lnTo>
+                  <a:pt x="13" y="26"/>
+                </a:lnTo>
+                <a:cubicBezTo>
+                  <a:pt x="6" y="26"/>
+                  <a:pt x="0" y="20"/>
+                  <a:pt x="0" y="13"/>
+                </a:cubicBezTo>
+                <a:lnTo>
+                  <a:pt x="0" y="13"/>
+                </a:lnTo>
+                <a:cubicBezTo>
+                  <a:pt x="0" y="6"/>
+                  <a:pt x="6" y="0"/>
+                  <a:pt x="13" y="0"/>
+                </a:cubicBezTo>
+                <a:close/>
+              </a:path>
+            </a:pathLst>
+          </a:custGeom>
+          <a:solidFill>
+            <a:srgbClr val="2B6CB0"/>
+          </a:solidFill>
+          <a:ln/>
+        </p:spPr>
+        <p:txBody>
+          <a:bodyPr/>
+          <a:p>
+            <a:pPr/>
+            <a:endParaRPr/>
+          </a:p>
+        </p:txBody>
+      </p:sp>
+      <p:sp>
+        <p:nvSpPr>
+          <p:cNvPr id="69" name="" descr="{&quot;isTemplate&quot;:true,&quot;type&quot;:&quot;text&quot;}"/>
+          <p:cNvSpPr txBox="1"/>
+          <p:nvPr/>
+        </p:nvSpPr>
+        <p:spPr>
+          <a:xfrm rot="0" flipH="0" flipV="0">
+            <a:off x="923925" y="2714625"/>
+            <a:ext cx="85725" cy="152400"/>
+          </a:xfrm>
+          <a:prstGeom prst="rect"/>
+        </p:spPr>
+        <p:txBody>
+          <a:bodyPr wrap="none" lIns="0" tIns="0" rIns="0" bIns="0"/>
+          <a:p>
+            <a:pPr>
+              <a:lnSpc>
+                <a:spcPct val="100000"/>
+              </a:lnSpc>
+            </a:pPr>
+            <a:r>
+              <a:rPr lang="en-US" sz="975" b="1">
+                <a:solidFill>
+                  <a:srgbClr val="FFFFFF"/>
+                </a:solidFill>
+                <a:latin typeface="Microsoft YaHei"/>
+                <a:ea typeface="Microsoft YaHei"/>
+              </a:rPr>
+              <a:t>2</a:t>
+            </a:r>
+            <a:endParaRPr/>
+          </a:p>
+        </p:txBody>
+      </p:sp>
+      <p:sp>
+        <p:nvSpPr>
+          <p:cNvPr id="70" name="" descr="{&quot;isTemplate&quot;:true,&quot;type&quot;:&quot;text&quot;}"/>
+          <p:cNvSpPr txBox="1"/>
+          <p:nvPr/>
+        </p:nvSpPr>
+        <p:spPr>
+          <a:xfrm rot="0" flipH="0" flipV="0">
+            <a:off x="1219200" y="2562225"/>
+            <a:ext cx="5362575" cy="200025"/>
+          </a:xfrm>
+          <a:prstGeom prst="rect"/>
+        </p:spPr>
+        <p:txBody>
+          <a:bodyPr wrap="none" lIns="0" tIns="0" rIns="0" bIns="0"/>
+          <a:p>
+            <a:pPr>
+              <a:lnSpc>
+                <a:spcPct val="100000"/>
+              </a:lnSpc>
+            </a:pPr>
+            <a:r>
+              <a:rPr lang="zh-CN" sz="1275" b="1">
+                <a:solidFill>
+                  <a:srgbClr val="1A365D"/>
+                </a:solidFill>
+                <a:latin typeface="Microsoft YaHei"/>
+                <a:ea typeface="Microsoft YaHei"/>
+              </a:rPr>
+              <a:t>预判式</a:t>
+            </a:r>
+            <a:r>
+              <a:rPr lang="en-US" sz="1275" b="1">
+                <a:solidFill>
+                  <a:srgbClr val="1A365D"/>
+                </a:solidFill>
+                <a:latin typeface="Microsoft YaHei"/>
+                <a:ea typeface="Microsoft YaHei"/>
+              </a:rPr>
+              <a:t> FAQ</a:t>
+            </a:r>
+            <a:endParaRPr/>
+          </a:p>
+        </p:txBody>
+      </p:sp>
+      <p:sp>
+        <p:nvSpPr>
+          <p:cNvPr id="71" name="" descr="{&quot;isTemplate&quot;:true,&quot;type&quot;:&quot;text&quot;}"/>
+          <p:cNvSpPr txBox="1"/>
+          <p:nvPr/>
+        </p:nvSpPr>
+        <p:spPr>
+          <a:xfrm rot="0" flipH="0" flipV="0">
+            <a:off x="1219200" y="2762250"/>
+            <a:ext cx="5362575" cy="247650"/>
+          </a:xfrm>
+          <a:prstGeom prst="rect"/>
+        </p:spPr>
+        <p:txBody>
+          <a:bodyPr wrap="none" lIns="0" tIns="0" rIns="0" bIns="0"/>
+          <a:p>
+            <a:pPr>
+              <a:lnSpc>
+                <a:spcPct val="150000"/>
+              </a:lnSpc>
+            </a:pPr>
+            <a:r>
+              <a:rPr lang="zh-CN" sz="1050">
+                <a:solidFill>
+                  <a:srgbClr val="718096"/>
+                </a:solidFill>
+                <a:latin typeface="Microsoft YaHei"/>
+                <a:ea typeface="Microsoft YaHei"/>
+              </a:rPr>
+              <a:t>病历特征</a:t>
+            </a:r>
+            <a:r>
+              <a:rPr lang="en-US" sz="1050">
+                <a:solidFill>
+                  <a:srgbClr val="718096"/>
+                </a:solidFill>
+                <a:latin typeface="Microsoft YaHei"/>
+                <a:ea typeface="Microsoft YaHei"/>
+              </a:rPr>
+              <a:t> → </a:t>
+            </a:r>
+            <a:r>
+              <a:rPr lang="zh-CN" sz="1050">
+                <a:solidFill>
+                  <a:srgbClr val="718096"/>
+                </a:solidFill>
+                <a:latin typeface="Microsoft YaHei"/>
+                <a:ea typeface="Microsoft YaHei"/>
+              </a:rPr>
+              <a:t>预判最可能问的</a:t>
+            </a:r>
+            <a:r>
+              <a:rPr lang="en-US" sz="1050">
+                <a:solidFill>
+                  <a:srgbClr val="718096"/>
+                </a:solidFill>
+                <a:latin typeface="Microsoft YaHei"/>
+                <a:ea typeface="Microsoft YaHei"/>
+              </a:rPr>
+              <a:t> 3 </a:t>
+            </a:r>
+            <a:r>
+              <a:rPr lang="zh-CN" sz="1050">
+                <a:solidFill>
+                  <a:srgbClr val="718096"/>
+                </a:solidFill>
+                <a:latin typeface="Microsoft YaHei"/>
+                <a:ea typeface="Microsoft YaHei"/>
+              </a:rPr>
+              <a:t>题，答案从真实会话检索</a:t>
+            </a:r>
+            <a:endParaRPr/>
+          </a:p>
+        </p:txBody>
+      </p:sp>
+      <p:sp>
+        <p:nvSpPr>
+          <p:cNvPr id="72" name=""/>
+          <p:cNvSpPr/>
+          <p:nvPr/>
+        </p:nvSpPr>
+        <p:spPr>
+          <a:xfrm rot="0" flipH="0" flipV="0">
+            <a:off x="666750" y="3238500"/>
+            <a:ext cx="6086475" cy="676275"/>
+          </a:xfrm>
+          <a:prstGeom prst="roundRect">
+            <a:avLst>
+              <a:gd name="adj" fmla="val 14085"/>
+            </a:avLst>
+          </a:prstGeom>
+          <a:solidFill>
+            <a:srgbClr val="F7FAFC"/>
+          </a:solidFill>
+          <a:ln w="12700">
+            <a:solidFill>
+              <a:srgbClr val="E2E8F0"/>
+            </a:solidFill>
+            <a:prstDash val="solid"/>
+          </a:ln>
+        </p:spPr>
+        <p:txBody>
+          <a:bodyPr/>
+          <a:p>
+            <a:pPr/>
+            <a:endParaRPr/>
+          </a:p>
+        </p:txBody>
+      </p:sp>
+      <p:sp>
+        <p:nvSpPr>
+          <p:cNvPr id="73" name=""/>
+          <p:cNvSpPr/>
+          <p:nvPr/>
+        </p:nvSpPr>
+        <p:spPr>
+          <a:xfrm rot="0" flipH="0" flipV="0">
+            <a:off x="838200" y="3457575"/>
+            <a:ext cx="247650" cy="247650"/>
+          </a:xfrm>
+          <a:custGeom>
+            <a:pathLst>
+              <a:path w="26" h="26">
+                <a:moveTo>
+                  <a:pt x="13" y="0"/>
+                </a:moveTo>
+                <a:lnTo>
+                  <a:pt x="13" y="0"/>
+                </a:lnTo>
+                <a:cubicBezTo>
+                  <a:pt x="20" y="0"/>
+                  <a:pt x="26" y="6"/>
+                  <a:pt x="26" y="13"/>
+                </a:cubicBezTo>
+                <a:lnTo>
+                  <a:pt x="26" y="13"/>
+                </a:lnTo>
+                <a:cubicBezTo>
+                  <a:pt x="26" y="20"/>
+                  <a:pt x="20" y="26"/>
+                  <a:pt x="13" y="26"/>
+                </a:cubicBezTo>
+                <a:lnTo>
+                  <a:pt x="13" y="26"/>
+                </a:lnTo>
+                <a:cubicBezTo>
+                  <a:pt x="6" y="26"/>
+                  <a:pt x="0" y="20"/>
+                  <a:pt x="0" y="13"/>
+                </a:cubicBezTo>
+                <a:lnTo>
+                  <a:pt x="0" y="13"/>
+                </a:lnTo>
+                <a:cubicBezTo>
+                  <a:pt x="0" y="6"/>
+                  <a:pt x="6" y="0"/>
+                  <a:pt x="13" y="0"/>
+                </a:cubicBezTo>
+                <a:close/>
+              </a:path>
+            </a:pathLst>
+          </a:custGeom>
+          <a:solidFill>
+            <a:srgbClr val="2B6CB0"/>
+          </a:solidFill>
+          <a:ln/>
+        </p:spPr>
+        <p:txBody>
+          <a:bodyPr/>
+          <a:p>
+            <a:pPr/>
+            <a:endParaRPr/>
+          </a:p>
+        </p:txBody>
+      </p:sp>
+      <p:sp>
+        <p:nvSpPr>
+          <p:cNvPr id="74" name="" descr="{&quot;isTemplate&quot;:true,&quot;type&quot;:&quot;text&quot;}"/>
+          <p:cNvSpPr txBox="1"/>
+          <p:nvPr/>
+        </p:nvSpPr>
+        <p:spPr>
+          <a:xfrm rot="0" flipH="0" flipV="0">
+            <a:off x="923925" y="3505200"/>
+            <a:ext cx="85725" cy="152400"/>
+          </a:xfrm>
+          <a:prstGeom prst="rect"/>
+        </p:spPr>
+        <p:txBody>
+          <a:bodyPr wrap="none" lIns="0" tIns="0" rIns="0" bIns="0"/>
+          <a:p>
+            <a:pPr>
+              <a:lnSpc>
+                <a:spcPct val="100000"/>
+              </a:lnSpc>
+            </a:pPr>
+            <a:r>
+              <a:rPr lang="en-US" sz="975" b="1">
+                <a:solidFill>
+                  <a:srgbClr val="FFFFFF"/>
+                </a:solidFill>
+                <a:latin typeface="Microsoft YaHei"/>
+                <a:ea typeface="Microsoft YaHei"/>
+              </a:rPr>
+              <a:t>3</a:t>
+            </a:r>
+            <a:endParaRPr/>
+          </a:p>
+        </p:txBody>
+      </p:sp>
+      <p:sp>
+        <p:nvSpPr>
+          <p:cNvPr id="75" name="" descr="{&quot;isTemplate&quot;:true,&quot;type&quot;:&quot;text&quot;}"/>
+          <p:cNvSpPr txBox="1"/>
+          <p:nvPr/>
+        </p:nvSpPr>
+        <p:spPr>
+          <a:xfrm rot="0" flipH="0" flipV="0">
+            <a:off x="1219200" y="3352800"/>
+            <a:ext cx="5362575" cy="200025"/>
+          </a:xfrm>
+          <a:prstGeom prst="rect"/>
+        </p:spPr>
+        <p:txBody>
+          <a:bodyPr wrap="none" lIns="0" tIns="0" rIns="0" bIns="0"/>
+          <a:p>
+            <a:pPr>
+              <a:lnSpc>
+                <a:spcPct val="100000"/>
+              </a:lnSpc>
+            </a:pPr>
+            <a:r>
+              <a:rPr lang="zh-CN" sz="1275" b="1">
+                <a:solidFill>
+                  <a:srgbClr val="1A365D"/>
+                </a:solidFill>
+                <a:latin typeface="Microsoft YaHei"/>
+                <a:ea typeface="Microsoft YaHei"/>
+              </a:rPr>
+              <a:t>理赔体验痛点</a:t>
+            </a:r>
+            <a:endParaRPr/>
+          </a:p>
+        </p:txBody>
+      </p:sp>
+      <p:sp>
+        <p:nvSpPr>
+          <p:cNvPr id="76" name="" descr="{&quot;isTemplate&quot;:true,&quot;type&quot;:&quot;text&quot;}"/>
+          <p:cNvSpPr txBox="1"/>
+          <p:nvPr/>
+        </p:nvSpPr>
+        <p:spPr>
+          <a:xfrm rot="0" flipH="0" flipV="0">
+            <a:off x="1219200" y="3552825"/>
+            <a:ext cx="5362575" cy="247650"/>
+          </a:xfrm>
+          <a:prstGeom prst="rect"/>
+        </p:spPr>
+        <p:txBody>
+          <a:bodyPr wrap="none" lIns="0" tIns="0" rIns="0" bIns="0"/>
+          <a:p>
+            <a:pPr>
+              <a:lnSpc>
+                <a:spcPct val="150000"/>
+              </a:lnSpc>
+            </a:pPr>
+            <a:r>
+              <a:rPr lang="zh-CN" sz="1050">
+                <a:solidFill>
+                  <a:srgbClr val="718096"/>
+                </a:solidFill>
+                <a:latin typeface="Microsoft YaHei"/>
+                <a:ea typeface="Microsoft YaHei"/>
+              </a:rPr>
+              <a:t>痛点分类</a:t>
+            </a:r>
+            <a:r>
+              <a:rPr lang="en-US" sz="1050">
+                <a:solidFill>
+                  <a:srgbClr val="718096"/>
+                </a:solidFill>
+                <a:latin typeface="Microsoft YaHei"/>
+                <a:ea typeface="Microsoft YaHei"/>
+              </a:rPr>
+              <a:t> 9 → 13 </a:t>
+            </a:r>
+            <a:r>
+              <a:rPr lang="zh-CN" sz="1050">
+                <a:solidFill>
+                  <a:srgbClr val="718096"/>
+                </a:solidFill>
+                <a:latin typeface="Microsoft YaHei"/>
+                <a:ea typeface="Microsoft YaHei"/>
+              </a:rPr>
+              <a:t>类，新增垫付</a:t>
+            </a:r>
+            <a:r>
+              <a:rPr lang="en-US" sz="1050">
+                <a:solidFill>
+                  <a:srgbClr val="718096"/>
+                </a:solidFill>
+                <a:latin typeface="Microsoft YaHei"/>
+                <a:ea typeface="Microsoft YaHei"/>
+              </a:rPr>
+              <a:t>/</a:t>
+            </a:r>
+            <a:r>
+              <a:rPr lang="zh-CN" sz="1050">
+                <a:solidFill>
+                  <a:srgbClr val="718096"/>
+                </a:solidFill>
+                <a:latin typeface="Microsoft YaHei"/>
+                <a:ea typeface="Microsoft YaHei"/>
+              </a:rPr>
+              <a:t>免赔额</a:t>
+            </a:r>
+            <a:r>
+              <a:rPr lang="en-US" sz="1050">
+                <a:solidFill>
+                  <a:srgbClr val="718096"/>
+                </a:solidFill>
+                <a:latin typeface="Microsoft YaHei"/>
+                <a:ea typeface="Microsoft YaHei"/>
+              </a:rPr>
+              <a:t>/</a:t>
+            </a:r>
+            <a:r>
+              <a:rPr lang="zh-CN" sz="1050">
+                <a:solidFill>
+                  <a:srgbClr val="718096"/>
+                </a:solidFill>
+                <a:latin typeface="Microsoft YaHei"/>
+                <a:ea typeface="Microsoft YaHei"/>
+              </a:rPr>
+              <a:t>进度焦虑</a:t>
+            </a:r>
+            <a:r>
+              <a:rPr lang="en-US" sz="1050">
+                <a:solidFill>
+                  <a:srgbClr val="718096"/>
+                </a:solidFill>
+                <a:latin typeface="Microsoft YaHei"/>
+                <a:ea typeface="Microsoft YaHei"/>
+              </a:rPr>
+              <a:t>/</a:t>
+            </a:r>
+            <a:r>
+              <a:rPr lang="zh-CN" sz="1050">
+                <a:solidFill>
+                  <a:srgbClr val="718096"/>
+                </a:solidFill>
+                <a:latin typeface="Microsoft YaHei"/>
+                <a:ea typeface="Microsoft YaHei"/>
+              </a:rPr>
+              <a:t>材料补件</a:t>
+            </a:r>
+            <a:endParaRPr/>
+          </a:p>
+        </p:txBody>
+      </p:sp>
+      <p:sp>
+        <p:nvSpPr>
+          <p:cNvPr id="77" name=""/>
+          <p:cNvSpPr/>
+          <p:nvPr/>
+        </p:nvSpPr>
+        <p:spPr>
+          <a:xfrm rot="0" flipH="0" flipV="0">
+            <a:off x="666750" y="4029075"/>
+            <a:ext cx="6086475" cy="676275"/>
+          </a:xfrm>
+          <a:prstGeom prst="roundRect">
+            <a:avLst>
+              <a:gd name="adj" fmla="val 14085"/>
+            </a:avLst>
+          </a:prstGeom>
+          <a:solidFill>
+            <a:srgbClr val="F7FAFC"/>
+          </a:solidFill>
+          <a:ln w="12700">
+            <a:solidFill>
+              <a:srgbClr val="E2E8F0"/>
+            </a:solidFill>
+            <a:prstDash val="solid"/>
+          </a:ln>
+        </p:spPr>
+        <p:txBody>
+          <a:bodyPr/>
+          <a:p>
+            <a:pPr/>
+            <a:endParaRPr/>
+          </a:p>
+        </p:txBody>
+      </p:sp>
+      <p:sp>
+        <p:nvSpPr>
+          <p:cNvPr id="78" name=""/>
+          <p:cNvSpPr/>
+          <p:nvPr/>
+        </p:nvSpPr>
+        <p:spPr>
+          <a:xfrm rot="0" flipH="0" flipV="0">
+            <a:off x="838200" y="4248150"/>
+            <a:ext cx="247650" cy="247650"/>
+          </a:xfrm>
+          <a:custGeom>
+            <a:pathLst>
+              <a:path w="26" h="26">
+                <a:moveTo>
+                  <a:pt x="13" y="0"/>
+                </a:moveTo>
+                <a:lnTo>
+                  <a:pt x="13" y="0"/>
+                </a:lnTo>
+                <a:cubicBezTo>
+                  <a:pt x="20" y="0"/>
+                  <a:pt x="26" y="6"/>
+                  <a:pt x="26" y="13"/>
+                </a:cubicBezTo>
+                <a:lnTo>
+                  <a:pt x="26" y="13"/>
+                </a:lnTo>
+                <a:cubicBezTo>
+                  <a:pt x="26" y="20"/>
+                  <a:pt x="20" y="26"/>
+                  <a:pt x="13" y="26"/>
+                </a:cubicBezTo>
+                <a:lnTo>
+                  <a:pt x="13" y="26"/>
+                </a:lnTo>
+                <a:cubicBezTo>
+                  <a:pt x="6" y="26"/>
+                  <a:pt x="0" y="20"/>
+                  <a:pt x="0" y="13"/>
+                </a:cubicBezTo>
+                <a:lnTo>
+                  <a:pt x="0" y="13"/>
+                </a:lnTo>
+                <a:cubicBezTo>
+                  <a:pt x="0" y="6"/>
+                  <a:pt x="6" y="0"/>
+                  <a:pt x="13" y="0"/>
+                </a:cubicBezTo>
+                <a:close/>
+              </a:path>
+            </a:pathLst>
+          </a:custGeom>
+          <a:solidFill>
+            <a:srgbClr val="2B6CB0"/>
+          </a:solidFill>
+          <a:ln/>
+        </p:spPr>
+        <p:txBody>
+          <a:bodyPr/>
+          <a:p>
+            <a:pPr/>
+            <a:endParaRPr/>
+          </a:p>
+        </p:txBody>
+      </p:sp>
+      <p:sp>
+        <p:nvSpPr>
+          <p:cNvPr id="79" name="" descr="{&quot;isTemplate&quot;:true,&quot;type&quot;:&quot;text&quot;}"/>
+          <p:cNvSpPr txBox="1"/>
+          <p:nvPr/>
+        </p:nvSpPr>
+        <p:spPr>
+          <a:xfrm rot="0" flipH="0" flipV="0">
+            <a:off x="923925" y="4295775"/>
+            <a:ext cx="85725" cy="152400"/>
+          </a:xfrm>
+          <a:prstGeom prst="rect"/>
+        </p:spPr>
+        <p:txBody>
+          <a:bodyPr wrap="none" lIns="0" tIns="0" rIns="0" bIns="0"/>
+          <a:p>
+            <a:pPr>
+              <a:lnSpc>
+                <a:spcPct val="100000"/>
+              </a:lnSpc>
+            </a:pPr>
+            <a:r>
+              <a:rPr lang="en-US" sz="975" b="1">
+                <a:solidFill>
+                  <a:srgbClr val="FFFFFF"/>
+                </a:solidFill>
+                <a:latin typeface="Microsoft YaHei"/>
+                <a:ea typeface="Microsoft YaHei"/>
+              </a:rPr>
+              <a:t>4</a:t>
+            </a:r>
+            <a:endParaRPr/>
+          </a:p>
+        </p:txBody>
+      </p:sp>
+      <p:sp>
+        <p:nvSpPr>
+          <p:cNvPr id="80" name="" descr="{&quot;isTemplate&quot;:true,&quot;type&quot;:&quot;text&quot;}"/>
+          <p:cNvSpPr txBox="1"/>
+          <p:nvPr/>
+        </p:nvSpPr>
+        <p:spPr>
+          <a:xfrm rot="0" flipH="0" flipV="0">
+            <a:off x="1219200" y="4143375"/>
+            <a:ext cx="5362575" cy="200025"/>
+          </a:xfrm>
+          <a:prstGeom prst="rect"/>
+        </p:spPr>
+        <p:txBody>
+          <a:bodyPr wrap="none" lIns="0" tIns="0" rIns="0" bIns="0"/>
+          <a:p>
+            <a:pPr>
+              <a:lnSpc>
+                <a:spcPct val="100000"/>
+              </a:lnSpc>
+            </a:pPr>
+            <a:r>
+              <a:rPr lang="zh-CN" sz="1275" b="1">
+                <a:solidFill>
+                  <a:srgbClr val="1A365D"/>
+                </a:solidFill>
+                <a:latin typeface="Microsoft YaHei"/>
+                <a:ea typeface="Microsoft YaHei"/>
+              </a:rPr>
+              <a:t>触达</a:t>
+            </a:r>
+            <a:r>
+              <a:rPr lang="en-US" sz="1275" b="1">
+                <a:solidFill>
+                  <a:srgbClr val="1A365D"/>
+                </a:solidFill>
+                <a:latin typeface="Microsoft YaHei"/>
+                <a:ea typeface="Microsoft YaHei"/>
+              </a:rPr>
+              <a:t> + </a:t>
+            </a:r>
+            <a:r>
+              <a:rPr lang="zh-CN" sz="1275" b="1">
+                <a:solidFill>
+                  <a:srgbClr val="1A365D"/>
+                </a:solidFill>
+                <a:latin typeface="Microsoft YaHei"/>
+                <a:ea typeface="Microsoft YaHei"/>
+              </a:rPr>
+              <a:t>增值服务</a:t>
+            </a:r>
+            <a:endParaRPr/>
+          </a:p>
+        </p:txBody>
+      </p:sp>
+      <p:sp>
+        <p:nvSpPr>
+          <p:cNvPr id="81" name="" descr="{&quot;isTemplate&quot;:true,&quot;type&quot;:&quot;text&quot;}"/>
+          <p:cNvSpPr txBox="1"/>
+          <p:nvPr/>
+        </p:nvSpPr>
+        <p:spPr>
+          <a:xfrm rot="0" flipH="0" flipV="0">
+            <a:off x="1219200" y="4343400"/>
+            <a:ext cx="5362575" cy="247650"/>
+          </a:xfrm>
+          <a:prstGeom prst="rect"/>
+        </p:spPr>
+        <p:txBody>
+          <a:bodyPr wrap="none" lIns="0" tIns="0" rIns="0" bIns="0"/>
+          <a:p>
+            <a:pPr>
+              <a:lnSpc>
+                <a:spcPct val="150000"/>
+              </a:lnSpc>
+            </a:pPr>
+            <a:r>
+              <a:rPr lang="zh-CN" sz="1050">
+                <a:solidFill>
+                  <a:srgbClr val="718096"/>
+                </a:solidFill>
+                <a:latin typeface="Microsoft YaHei"/>
+                <a:ea typeface="Microsoft YaHei"/>
+              </a:rPr>
+              <a:t>企微</a:t>
+            </a:r>
+            <a:r>
+              <a:rPr lang="en-US" sz="1050">
+                <a:solidFill>
+                  <a:srgbClr val="718096"/>
+                </a:solidFill>
+                <a:latin typeface="Microsoft YaHei"/>
+                <a:ea typeface="Microsoft YaHei"/>
+              </a:rPr>
+              <a:t>/</a:t>
+            </a:r>
+            <a:r>
+              <a:rPr lang="zh-CN" sz="1050">
+                <a:solidFill>
+                  <a:srgbClr val="718096"/>
+                </a:solidFill>
+                <a:latin typeface="Microsoft YaHei"/>
+                <a:ea typeface="Microsoft YaHei"/>
+              </a:rPr>
+              <a:t>呼内渠道优选，病种</a:t>
+            </a:r>
+            <a:r>
+              <a:rPr lang="en-US" sz="1050">
+                <a:solidFill>
+                  <a:srgbClr val="718096"/>
+                </a:solidFill>
+                <a:latin typeface="Microsoft YaHei"/>
+                <a:ea typeface="Microsoft YaHei"/>
+              </a:rPr>
+              <a:t> → </a:t>
+            </a:r>
+            <a:r>
+              <a:rPr lang="zh-CN" sz="1050">
+                <a:solidFill>
+                  <a:srgbClr val="718096"/>
+                </a:solidFill>
+                <a:latin typeface="Microsoft YaHei"/>
+                <a:ea typeface="Microsoft YaHei"/>
+              </a:rPr>
+              <a:t>特药</a:t>
+            </a:r>
+            <a:r>
+              <a:rPr lang="en-US" sz="1050">
+                <a:solidFill>
+                  <a:srgbClr val="718096"/>
+                </a:solidFill>
+                <a:latin typeface="Microsoft YaHei"/>
+                <a:ea typeface="Microsoft YaHei"/>
+              </a:rPr>
+              <a:t>/</a:t>
+            </a:r>
+            <a:r>
+              <a:rPr lang="zh-CN" sz="1050">
+                <a:solidFill>
+                  <a:srgbClr val="718096"/>
+                </a:solidFill>
+                <a:latin typeface="Microsoft YaHei"/>
+                <a:ea typeface="Microsoft YaHei"/>
+              </a:rPr>
+              <a:t>质子</a:t>
+            </a:r>
+            <a:r>
+              <a:rPr lang="en-US" sz="1050">
+                <a:solidFill>
+                  <a:srgbClr val="718096"/>
+                </a:solidFill>
+                <a:latin typeface="Microsoft YaHei"/>
+                <a:ea typeface="Microsoft YaHei"/>
+              </a:rPr>
+              <a:t>/</a:t>
+            </a:r>
+            <a:r>
+              <a:rPr lang="zh-CN" sz="1050">
+                <a:solidFill>
+                  <a:srgbClr val="718096"/>
+                </a:solidFill>
+                <a:latin typeface="Microsoft YaHei"/>
+                <a:ea typeface="Microsoft YaHei"/>
+              </a:rPr>
+              <a:t>绿通</a:t>
+            </a:r>
+            <a:r>
+              <a:rPr lang="en-US" sz="1050">
+                <a:solidFill>
+                  <a:srgbClr val="718096"/>
+                </a:solidFill>
+                <a:latin typeface="Microsoft YaHei"/>
+                <a:ea typeface="Microsoft YaHei"/>
+              </a:rPr>
+              <a:t>/</a:t>
+            </a:r>
+            <a:r>
+              <a:rPr lang="zh-CN" sz="1050">
+                <a:solidFill>
+                  <a:srgbClr val="718096"/>
+                </a:solidFill>
+                <a:latin typeface="Microsoft YaHei"/>
+                <a:ea typeface="Microsoft YaHei"/>
+              </a:rPr>
+              <a:t>护工</a:t>
+            </a:r>
+            <a:r>
+              <a:rPr lang="en-US" sz="1050">
+                <a:solidFill>
+                  <a:srgbClr val="718096"/>
+                </a:solidFill>
+                <a:latin typeface="Microsoft YaHei"/>
+                <a:ea typeface="Microsoft YaHei"/>
+              </a:rPr>
+              <a:t>/</a:t>
+            </a:r>
+            <a:r>
+              <a:rPr lang="zh-CN" sz="1050">
+                <a:solidFill>
+                  <a:srgbClr val="718096"/>
+                </a:solidFill>
+                <a:latin typeface="Microsoft YaHei"/>
+                <a:ea typeface="Microsoft YaHei"/>
+              </a:rPr>
+              <a:t>陪诊</a:t>
+            </a:r>
+            <a:endParaRPr/>
+          </a:p>
+        </p:txBody>
+      </p:sp>
+      <p:sp>
+        <p:nvSpPr>
+          <p:cNvPr id="82" name=""/>
+          <p:cNvSpPr/>
+          <p:nvPr/>
+        </p:nvSpPr>
+        <p:spPr>
+          <a:xfrm rot="0" flipH="0" flipV="0">
+            <a:off x="666750" y="4819650"/>
+            <a:ext cx="6086475" cy="676275"/>
+          </a:xfrm>
+          <a:prstGeom prst="roundRect">
+            <a:avLst>
+              <a:gd name="adj" fmla="val 14085"/>
+            </a:avLst>
+          </a:prstGeom>
+          <a:solidFill>
+            <a:srgbClr val="F7FAFC"/>
+          </a:solidFill>
+          <a:ln w="12700">
+            <a:solidFill>
+              <a:srgbClr val="E2E8F0"/>
+            </a:solidFill>
+            <a:prstDash val="solid"/>
+          </a:ln>
+        </p:spPr>
+        <p:txBody>
+          <a:bodyPr/>
+          <a:p>
+            <a:pPr/>
+            <a:endParaRPr/>
+          </a:p>
+        </p:txBody>
+      </p:sp>
+      <p:sp>
+        <p:nvSpPr>
+          <p:cNvPr id="83" name=""/>
+          <p:cNvSpPr/>
+          <p:nvPr/>
+        </p:nvSpPr>
+        <p:spPr>
+          <a:xfrm rot="0" flipH="0" flipV="0">
+            <a:off x="838200" y="5038725"/>
+            <a:ext cx="247650" cy="247650"/>
+          </a:xfrm>
+          <a:custGeom>
+            <a:pathLst>
+              <a:path w="26" h="26">
+                <a:moveTo>
+                  <a:pt x="13" y="0"/>
+                </a:moveTo>
+                <a:lnTo>
+                  <a:pt x="13" y="0"/>
+                </a:lnTo>
+                <a:cubicBezTo>
+                  <a:pt x="20" y="0"/>
+                  <a:pt x="26" y="6"/>
+                  <a:pt x="26" y="13"/>
+                </a:cubicBezTo>
+                <a:lnTo>
+                  <a:pt x="26" y="13"/>
+                </a:lnTo>
+                <a:cubicBezTo>
+                  <a:pt x="26" y="20"/>
+                  <a:pt x="20" y="26"/>
+                  <a:pt x="13" y="26"/>
+                </a:cubicBezTo>
+                <a:lnTo>
+                  <a:pt x="13" y="26"/>
+                </a:lnTo>
+                <a:cubicBezTo>
+                  <a:pt x="6" y="26"/>
+                  <a:pt x="0" y="20"/>
+                  <a:pt x="0" y="13"/>
+                </a:cubicBezTo>
+                <a:lnTo>
+                  <a:pt x="0" y="13"/>
+                </a:lnTo>
+                <a:cubicBezTo>
+                  <a:pt x="0" y="6"/>
+                  <a:pt x="6" y="0"/>
+                  <a:pt x="13" y="0"/>
+                </a:cubicBezTo>
+                <a:close/>
+              </a:path>
+            </a:pathLst>
+          </a:custGeom>
+          <a:solidFill>
+            <a:srgbClr val="2B6CB0"/>
+          </a:solidFill>
+          <a:ln/>
+        </p:spPr>
+        <p:txBody>
+          <a:bodyPr/>
+          <a:p>
+            <a:pPr/>
+            <a:endParaRPr/>
+          </a:p>
+        </p:txBody>
+      </p:sp>
+      <p:sp>
+        <p:nvSpPr>
+          <p:cNvPr id="84" name="" descr="{&quot;isTemplate&quot;:true,&quot;type&quot;:&quot;text&quot;}"/>
+          <p:cNvSpPr txBox="1"/>
+          <p:nvPr/>
+        </p:nvSpPr>
+        <p:spPr>
+          <a:xfrm rot="0" flipH="0" flipV="0">
+            <a:off x="923925" y="5086350"/>
+            <a:ext cx="85725" cy="152400"/>
+          </a:xfrm>
+          <a:prstGeom prst="rect"/>
+        </p:spPr>
+        <p:txBody>
+          <a:bodyPr wrap="none" lIns="0" tIns="0" rIns="0" bIns="0"/>
+          <a:p>
+            <a:pPr>
+              <a:lnSpc>
+                <a:spcPct val="100000"/>
+              </a:lnSpc>
+            </a:pPr>
+            <a:r>
+              <a:rPr lang="en-US" sz="975" b="1">
+                <a:solidFill>
+                  <a:srgbClr val="FFFFFF"/>
+                </a:solidFill>
+                <a:latin typeface="Microsoft YaHei"/>
+                <a:ea typeface="Microsoft YaHei"/>
+              </a:rPr>
+              <a:t>5</a:t>
+            </a:r>
+            <a:endParaRPr/>
+          </a:p>
+        </p:txBody>
+      </p:sp>
+      <p:sp>
+        <p:nvSpPr>
+          <p:cNvPr id="85" name="" descr="{&quot;isTemplate&quot;:true,&quot;type&quot;:&quot;text&quot;}"/>
+          <p:cNvSpPr txBox="1"/>
+          <p:nvPr/>
+        </p:nvSpPr>
+        <p:spPr>
+          <a:xfrm rot="0" flipH="0" flipV="0">
+            <a:off x="1219200" y="4933950"/>
+            <a:ext cx="5362575" cy="200025"/>
+          </a:xfrm>
+          <a:prstGeom prst="rect"/>
+        </p:spPr>
+        <p:txBody>
+          <a:bodyPr wrap="none" lIns="0" tIns="0" rIns="0" bIns="0"/>
+          <a:p>
+            <a:pPr>
+              <a:lnSpc>
+                <a:spcPct val="100000"/>
+              </a:lnSpc>
+            </a:pPr>
+            <a:r>
+              <a:rPr lang="zh-CN" sz="1275" b="1">
+                <a:solidFill>
+                  <a:srgbClr val="1A365D"/>
+                </a:solidFill>
+                <a:latin typeface="Microsoft YaHei"/>
+                <a:ea typeface="Microsoft YaHei"/>
+              </a:rPr>
+              <a:t>闭环</a:t>
+            </a:r>
+            <a:r>
+              <a:rPr lang="en-US" sz="1275" b="1">
+                <a:solidFill>
+                  <a:srgbClr val="1A365D"/>
+                </a:solidFill>
+                <a:latin typeface="Microsoft YaHei"/>
+                <a:ea typeface="Microsoft YaHei"/>
+              </a:rPr>
+              <a:t> KPI + </a:t>
+            </a:r>
+            <a:r>
+              <a:rPr lang="zh-CN" sz="1275" b="1">
+                <a:solidFill>
+                  <a:srgbClr val="1A365D"/>
+                </a:solidFill>
+                <a:latin typeface="Microsoft YaHei"/>
+                <a:ea typeface="Microsoft YaHei"/>
+              </a:rPr>
+              <a:t>异常监控</a:t>
+            </a:r>
+            <a:endParaRPr/>
+          </a:p>
+        </p:txBody>
+      </p:sp>
+      <p:sp>
+        <p:nvSpPr>
+          <p:cNvPr id="86" name="" descr="{&quot;isTemplate&quot;:true,&quot;type&quot;:&quot;text&quot;}"/>
+          <p:cNvSpPr txBox="1"/>
+          <p:nvPr/>
+        </p:nvSpPr>
+        <p:spPr>
+          <a:xfrm rot="0" flipH="0" flipV="0">
+            <a:off x="1219200" y="5133975"/>
+            <a:ext cx="5362575" cy="247650"/>
+          </a:xfrm>
+          <a:prstGeom prst="rect"/>
+        </p:spPr>
+        <p:txBody>
+          <a:bodyPr wrap="none" lIns="0" tIns="0" rIns="0" bIns="0"/>
+          <a:p>
+            <a:pPr>
+              <a:lnSpc>
+                <a:spcPct val="150000"/>
+              </a:lnSpc>
+            </a:pPr>
+            <a:r>
+              <a:rPr lang="zh-CN" sz="1050">
+                <a:solidFill>
+                  <a:srgbClr val="718096"/>
+                </a:solidFill>
+                <a:latin typeface="Microsoft YaHei"/>
+                <a:ea typeface="Microsoft YaHei"/>
+              </a:rPr>
+              <a:t>咨询量变化率</a:t>
+            </a:r>
+            <a:r>
+              <a:rPr lang="en-US" sz="1050">
+                <a:solidFill>
+                  <a:srgbClr val="718096"/>
+                </a:solidFill>
+                <a:latin typeface="Microsoft YaHei"/>
+                <a:ea typeface="Microsoft YaHei"/>
+              </a:rPr>
+              <a:t> + </a:t>
+            </a:r>
+            <a:r>
+              <a:rPr lang="zh-CN" sz="1050">
+                <a:solidFill>
+                  <a:srgbClr val="718096"/>
+                </a:solidFill>
+                <a:latin typeface="Microsoft YaHei"/>
+                <a:ea typeface="Microsoft YaHei"/>
+              </a:rPr>
+              <a:t>需求漂移预警，关怀效果可度量</a:t>
+            </a:r>
+            <a:endParaRPr/>
+          </a:p>
+        </p:txBody>
+      </p:sp>
+      <p:sp>
+        <p:nvSpPr>
+          <p:cNvPr id="87" name=""/>
+          <p:cNvSpPr/>
+          <p:nvPr/>
+        </p:nvSpPr>
+        <p:spPr>
+          <a:xfrm rot="0" flipH="0" flipV="0">
+            <a:off x="7019925" y="1038225"/>
+            <a:ext cx="4505325" cy="5067300"/>
+          </a:xfrm>
+          <a:prstGeom prst="roundRect">
+            <a:avLst>
+              <a:gd name="adj" fmla="val 3383"/>
+            </a:avLst>
+          </a:prstGeom>
+          <a:gradFill>
+            <a:gsLst>
+              <a:gs pos="0">
+                <a:srgbClr val="1A365D"/>
+              </a:gs>
+              <a:gs pos="100000">
+                <a:srgbClr val="2B6CB0"/>
+              </a:gs>
+            </a:gsLst>
+            <a:lin ang="2700000" scaled="1"/>
+          </a:gradFill>
+          <a:ln/>
+        </p:spPr>
+        <p:txBody>
+          <a:bodyPr/>
+          <a:p>
+            <a:pPr/>
+            <a:endParaRPr/>
+          </a:p>
+        </p:txBody>
+      </p:sp>
+      <p:sp>
+        <p:nvSpPr>
+          <p:cNvPr id="88" name="" descr="{&quot;isTemplate&quot;:true,&quot;type&quot;:&quot;text&quot;}"/>
+          <p:cNvSpPr txBox="1"/>
+          <p:nvPr/>
+        </p:nvSpPr>
+        <p:spPr>
+          <a:xfrm rot="0" flipH="0" flipV="0">
+            <a:off x="7286625" y="2190750"/>
+            <a:ext cx="3971925" cy="209550"/>
+          </a:xfrm>
+          <a:prstGeom prst="rect"/>
+        </p:spPr>
+        <p:txBody>
+          <a:bodyPr wrap="none" lIns="0" tIns="0" rIns="0" bIns="0"/>
+          <a:p>
+            <a:pPr>
+              <a:lnSpc>
+                <a:spcPct val="100000"/>
+              </a:lnSpc>
+            </a:pPr>
+            <a:r>
+              <a:rPr lang="zh-CN" sz="1350" b="1">
+                <a:solidFill>
+                  <a:srgbClr val="7FD1CD"/>
+                </a:solidFill>
+                <a:latin typeface="Microsoft YaHei"/>
+                <a:ea typeface="Microsoft YaHei"/>
+              </a:rPr>
+              <a:t>真实病例验证（肺癌</a:t>
+            </a:r>
+            <a:r>
+              <a:rPr lang="en-US" sz="1350" b="1">
+                <a:solidFill>
+                  <a:srgbClr val="7FD1CD"/>
+                </a:solidFill>
+                <a:latin typeface="Microsoft YaHei"/>
+                <a:ea typeface="Microsoft YaHei"/>
+              </a:rPr>
+              <a:t> · </a:t>
+            </a:r>
+            <a:r>
+              <a:rPr lang="zh-CN" sz="1350" b="1">
+                <a:solidFill>
+                  <a:srgbClr val="7FD1CD"/>
+                </a:solidFill>
+                <a:latin typeface="Microsoft YaHei"/>
+                <a:ea typeface="Microsoft YaHei"/>
+              </a:rPr>
+              <a:t>自费</a:t>
+            </a:r>
+            <a:r>
+              <a:rPr lang="en-US" sz="1350" b="1">
+                <a:solidFill>
+                  <a:srgbClr val="7FD1CD"/>
+                </a:solidFill>
+                <a:latin typeface="Microsoft YaHei"/>
+                <a:ea typeface="Microsoft YaHei"/>
+              </a:rPr>
+              <a:t> 33%</a:t>
+            </a:r>
+            <a:r>
+              <a:rPr lang="zh-CN" sz="1350" b="1">
+                <a:solidFill>
+                  <a:srgbClr val="7FD1CD"/>
+                </a:solidFill>
+                <a:latin typeface="Microsoft YaHei"/>
+                <a:ea typeface="Microsoft YaHei"/>
+              </a:rPr>
+              <a:t>）</a:t>
+            </a:r>
+            <a:endParaRPr/>
+          </a:p>
+        </p:txBody>
+      </p:sp>
+      <p:sp>
+        <p:nvSpPr>
+          <p:cNvPr id="89" name="" descr="{&quot;isTemplate&quot;:true,&quot;type&quot;:&quot;text&quot;}"/>
+          <p:cNvSpPr txBox="1"/>
+          <p:nvPr/>
+        </p:nvSpPr>
+        <p:spPr>
+          <a:xfrm rot="0" flipH="0" flipV="0">
+            <a:off x="7286625" y="2600325"/>
+            <a:ext cx="666750" cy="323850"/>
+          </a:xfrm>
+          <a:prstGeom prst="rect"/>
+        </p:spPr>
+        <p:txBody>
+          <a:bodyPr wrap="none" lIns="0" tIns="0" rIns="0" bIns="0"/>
+          <a:p>
+            <a:pPr>
+              <a:lnSpc>
+                <a:spcPct val="100000"/>
+              </a:lnSpc>
+            </a:pPr>
+            <a:r>
+              <a:rPr lang="en-US" sz="2100" b="1">
+                <a:solidFill>
+                  <a:srgbClr val="38B2AC"/>
+                </a:solidFill>
+                <a:latin typeface="Microsoft YaHei"/>
+                <a:ea typeface="Microsoft YaHei"/>
+              </a:rPr>
+              <a:t>4</a:t>
+            </a:r>
+            <a:endParaRPr/>
+          </a:p>
+        </p:txBody>
+      </p:sp>
+      <p:sp>
+        <p:nvSpPr>
+          <p:cNvPr id="90" name="" descr="{&quot;isTemplate&quot;:true,&quot;type&quot;:&quot;text&quot;}"/>
+          <p:cNvSpPr txBox="1"/>
+          <p:nvPr/>
+        </p:nvSpPr>
+        <p:spPr>
+          <a:xfrm rot="0" flipH="0" flipV="0">
+            <a:off x="7953375" y="2590800"/>
+            <a:ext cx="3305175" cy="190500"/>
+          </a:xfrm>
+          <a:prstGeom prst="rect"/>
+        </p:spPr>
+        <p:txBody>
+          <a:bodyPr wrap="none" lIns="0" tIns="0" rIns="0" bIns="0"/>
+          <a:p>
+            <a:pPr>
+              <a:lnSpc>
+                <a:spcPct val="100000"/>
+              </a:lnSpc>
+            </a:pPr>
+            <a:r>
+              <a:rPr lang="zh-CN" sz="1200" b="1">
+                <a:solidFill>
+                  <a:srgbClr val="FFFFFF"/>
+                </a:solidFill>
+                <a:latin typeface="Microsoft YaHei"/>
+                <a:ea typeface="Microsoft YaHei"/>
+              </a:rPr>
+              <a:t>类理赔体验痛点</a:t>
+            </a:r>
+            <a:endParaRPr/>
+          </a:p>
+        </p:txBody>
+      </p:sp>
+      <p:sp>
+        <p:nvSpPr>
+          <p:cNvPr id="91" name="" descr="{&quot;isTemplate&quot;:true,&quot;type&quot;:&quot;text&quot;}"/>
+          <p:cNvSpPr txBox="1"/>
+          <p:nvPr/>
+        </p:nvSpPr>
+        <p:spPr>
+          <a:xfrm rot="0" flipH="0" flipV="0">
+            <a:off x="7953375" y="2781300"/>
+            <a:ext cx="3305175" cy="152400"/>
+          </a:xfrm>
+          <a:prstGeom prst="rect"/>
+        </p:spPr>
+        <p:txBody>
+          <a:bodyPr wrap="none" lIns="0" tIns="0" rIns="0" bIns="0"/>
+          <a:p>
+            <a:pPr>
+              <a:lnSpc>
+                <a:spcPct val="100000"/>
+              </a:lnSpc>
+            </a:pPr>
+            <a:r>
+              <a:rPr lang="zh-CN" sz="975">
+                <a:solidFill>
+                  <a:srgbClr val="FFFFFF">
+                    <a:alpha val="75000"/>
+                  </a:srgbClr>
+                </a:solidFill>
+                <a:latin typeface="Microsoft YaHei"/>
+                <a:ea typeface="Microsoft YaHei"/>
+              </a:rPr>
+              <a:t>垫付</a:t>
+            </a:r>
+            <a:r>
+              <a:rPr lang="en-US" sz="975">
+                <a:solidFill>
+                  <a:srgbClr val="FFFFFF">
+                    <a:alpha val="75000"/>
+                  </a:srgbClr>
+                </a:solidFill>
+                <a:latin typeface="Microsoft YaHei"/>
+                <a:ea typeface="Microsoft YaHei"/>
+              </a:rPr>
+              <a:t> / </a:t>
+            </a:r>
+            <a:r>
+              <a:rPr lang="zh-CN" sz="975">
+                <a:solidFill>
+                  <a:srgbClr val="FFFFFF">
+                    <a:alpha val="75000"/>
+                  </a:srgbClr>
+                </a:solidFill>
+                <a:latin typeface="Microsoft YaHei"/>
+                <a:ea typeface="Microsoft YaHei"/>
+              </a:rPr>
+              <a:t>免赔额</a:t>
+            </a:r>
+            <a:r>
+              <a:rPr lang="en-US" sz="975">
+                <a:solidFill>
+                  <a:srgbClr val="FFFFFF">
+                    <a:alpha val="75000"/>
+                  </a:srgbClr>
+                </a:solidFill>
+                <a:latin typeface="Microsoft YaHei"/>
+                <a:ea typeface="Microsoft YaHei"/>
+              </a:rPr>
+              <a:t> / </a:t>
+            </a:r>
+            <a:r>
+              <a:rPr lang="zh-CN" sz="975">
+                <a:solidFill>
+                  <a:srgbClr val="FFFFFF">
+                    <a:alpha val="75000"/>
+                  </a:srgbClr>
+                </a:solidFill>
+                <a:latin typeface="Microsoft YaHei"/>
+                <a:ea typeface="Microsoft YaHei"/>
+              </a:rPr>
+              <a:t>进度焦虑</a:t>
+            </a:r>
+            <a:r>
+              <a:rPr lang="en-US" sz="975">
+                <a:solidFill>
+                  <a:srgbClr val="FFFFFF">
+                    <a:alpha val="75000"/>
+                  </a:srgbClr>
+                </a:solidFill>
+                <a:latin typeface="Microsoft YaHei"/>
+                <a:ea typeface="Microsoft YaHei"/>
+              </a:rPr>
+              <a:t> / </a:t>
+            </a:r>
+            <a:r>
+              <a:rPr lang="zh-CN" sz="975">
+                <a:solidFill>
+                  <a:srgbClr val="FFFFFF">
+                    <a:alpha val="75000"/>
+                  </a:srgbClr>
+                </a:solidFill>
+                <a:latin typeface="Microsoft YaHei"/>
+                <a:ea typeface="Microsoft YaHei"/>
+              </a:rPr>
+              <a:t>材料补件</a:t>
+            </a:r>
+            <a:endParaRPr/>
+          </a:p>
+        </p:txBody>
+      </p:sp>
+      <p:sp>
+        <p:nvSpPr>
+          <p:cNvPr id="92" name="" descr="{&quot;isTemplate&quot;:true,&quot;type&quot;:&quot;text&quot;}"/>
+          <p:cNvSpPr txBox="1"/>
+          <p:nvPr/>
+        </p:nvSpPr>
+        <p:spPr>
+          <a:xfrm rot="0" flipH="0" flipV="0">
+            <a:off x="7286625" y="3095625"/>
+            <a:ext cx="666750" cy="323850"/>
+          </a:xfrm>
+          <a:prstGeom prst="rect"/>
+        </p:spPr>
+        <p:txBody>
+          <a:bodyPr wrap="none" lIns="0" tIns="0" rIns="0" bIns="0"/>
+          <a:p>
+            <a:pPr>
+              <a:lnSpc>
+                <a:spcPct val="100000"/>
+              </a:lnSpc>
+            </a:pPr>
+            <a:r>
+              <a:rPr lang="en-US" sz="2100" b="1">
+                <a:solidFill>
+                  <a:srgbClr val="38B2AC"/>
+                </a:solidFill>
+                <a:latin typeface="Microsoft YaHei"/>
+                <a:ea typeface="Microsoft YaHei"/>
+              </a:rPr>
+              <a:t>3</a:t>
+            </a:r>
+            <a:endParaRPr/>
+          </a:p>
+        </p:txBody>
+      </p:sp>
+      <p:sp>
+        <p:nvSpPr>
+          <p:cNvPr id="93" name="" descr="{&quot;isTemplate&quot;:true,&quot;type&quot;:&quot;text&quot;}"/>
+          <p:cNvSpPr txBox="1"/>
+          <p:nvPr/>
+        </p:nvSpPr>
+        <p:spPr>
+          <a:xfrm rot="0" flipH="0" flipV="0">
+            <a:off x="7953375" y="3086100"/>
+            <a:ext cx="3305175" cy="190500"/>
+          </a:xfrm>
+          <a:prstGeom prst="rect"/>
+        </p:spPr>
+        <p:txBody>
+          <a:bodyPr wrap="none" lIns="0" tIns="0" rIns="0" bIns="0"/>
+          <a:p>
+            <a:pPr>
+              <a:lnSpc>
+                <a:spcPct val="100000"/>
+              </a:lnSpc>
+            </a:pPr>
+            <a:r>
+              <a:rPr lang="zh-CN" sz="1200" b="1">
+                <a:solidFill>
+                  <a:srgbClr val="FFFFFF"/>
+                </a:solidFill>
+                <a:latin typeface="Microsoft YaHei"/>
+                <a:ea typeface="Microsoft YaHei"/>
+              </a:rPr>
+              <a:t>条预判</a:t>
+            </a:r>
+            <a:r>
+              <a:rPr lang="en-US" sz="1200" b="1">
+                <a:solidFill>
+                  <a:srgbClr val="FFFFFF"/>
+                </a:solidFill>
+                <a:latin typeface="Microsoft YaHei"/>
+                <a:ea typeface="Microsoft YaHei"/>
+              </a:rPr>
+              <a:t> FAQ</a:t>
+            </a:r>
+            <a:endParaRPr/>
+          </a:p>
+        </p:txBody>
+      </p:sp>
+      <p:sp>
+        <p:nvSpPr>
+          <p:cNvPr id="94" name="" descr="{&quot;isTemplate&quot;:true,&quot;type&quot;:&quot;text&quot;}"/>
+          <p:cNvSpPr txBox="1"/>
+          <p:nvPr/>
+        </p:nvSpPr>
+        <p:spPr>
+          <a:xfrm rot="0" flipH="0" flipV="0">
+            <a:off x="7953375" y="3276600"/>
+            <a:ext cx="3305175" cy="152400"/>
+          </a:xfrm>
+          <a:prstGeom prst="rect"/>
+        </p:spPr>
+        <p:txBody>
+          <a:bodyPr wrap="none" lIns="0" tIns="0" rIns="0" bIns="0"/>
+          <a:p>
+            <a:pPr>
+              <a:lnSpc>
+                <a:spcPct val="100000"/>
+              </a:lnSpc>
+            </a:pPr>
+            <a:r>
+              <a:rPr lang="zh-CN" sz="975">
+                <a:solidFill>
+                  <a:srgbClr val="FFFFFF">
+                    <a:alpha val="75000"/>
+                  </a:srgbClr>
+                </a:solidFill>
+                <a:latin typeface="Microsoft YaHei"/>
+                <a:ea typeface="Microsoft YaHei"/>
+              </a:rPr>
+              <a:t>均带真实客服问答依据</a:t>
+            </a:r>
+            <a:endParaRPr/>
+          </a:p>
+        </p:txBody>
+      </p:sp>
+      <p:sp>
+        <p:nvSpPr>
+          <p:cNvPr id="95" name="" descr="{&quot;isTemplate&quot;:true,&quot;type&quot;:&quot;text&quot;}"/>
+          <p:cNvSpPr txBox="1"/>
+          <p:nvPr/>
+        </p:nvSpPr>
+        <p:spPr>
+          <a:xfrm rot="0" flipH="0" flipV="0">
+            <a:off x="7286625" y="3590925"/>
+            <a:ext cx="666750" cy="323850"/>
+          </a:xfrm>
+          <a:prstGeom prst="rect"/>
+        </p:spPr>
+        <p:txBody>
+          <a:bodyPr wrap="none" lIns="0" tIns="0" rIns="0" bIns="0"/>
+          <a:p>
+            <a:pPr>
+              <a:lnSpc>
+                <a:spcPct val="100000"/>
+              </a:lnSpc>
+            </a:pPr>
+            <a:r>
+              <a:rPr lang="zh-CN" sz="2100" b="1">
+                <a:solidFill>
+                  <a:srgbClr val="38B2AC"/>
+                </a:solidFill>
+                <a:latin typeface="Microsoft YaHei"/>
+                <a:ea typeface="Microsoft YaHei"/>
+              </a:rPr>
+              <a:t>呼入</a:t>
+            </a:r>
+            <a:endParaRPr/>
+          </a:p>
+        </p:txBody>
+      </p:sp>
+      <p:sp>
+        <p:nvSpPr>
+          <p:cNvPr id="96" name="" descr="{&quot;isTemplate&quot;:true,&quot;type&quot;:&quot;text&quot;}"/>
+          <p:cNvSpPr txBox="1"/>
+          <p:nvPr/>
+        </p:nvSpPr>
+        <p:spPr>
+          <a:xfrm rot="0" flipH="0" flipV="0">
+            <a:off x="7953375" y="3581400"/>
+            <a:ext cx="3305175" cy="190500"/>
+          </a:xfrm>
+          <a:prstGeom prst="rect"/>
+        </p:spPr>
+        <p:txBody>
+          <a:bodyPr wrap="none" lIns="0" tIns="0" rIns="0" bIns="0"/>
+          <a:p>
+            <a:pPr>
+              <a:lnSpc>
+                <a:spcPct val="100000"/>
+              </a:lnSpc>
+            </a:pPr>
+            <a:r>
+              <a:rPr lang="zh-CN" sz="1200" b="1">
+                <a:solidFill>
+                  <a:srgbClr val="FFFFFF"/>
+                </a:solidFill>
+                <a:latin typeface="Microsoft YaHei"/>
+                <a:ea typeface="Microsoft YaHei"/>
+              </a:rPr>
+              <a:t>触达优先</a:t>
+            </a:r>
+            <a:endParaRPr/>
+          </a:p>
+        </p:txBody>
+      </p:sp>
+      <p:sp>
+        <p:nvSpPr>
+          <p:cNvPr id="97" name="" descr="{&quot;isTemplate&quot;:true,&quot;type&quot;:&quot;text&quot;}"/>
+          <p:cNvSpPr txBox="1"/>
+          <p:nvPr/>
+        </p:nvSpPr>
+        <p:spPr>
+          <a:xfrm rot="0" flipH="0" flipV="0">
+            <a:off x="7953375" y="3771900"/>
+            <a:ext cx="3305175" cy="152400"/>
+          </a:xfrm>
+          <a:prstGeom prst="rect"/>
+        </p:spPr>
+        <p:txBody>
+          <a:bodyPr wrap="none" lIns="0" tIns="0" rIns="0" bIns="0"/>
+          <a:p>
+            <a:pPr>
+              <a:lnSpc>
+                <a:spcPct val="100000"/>
+              </a:lnSpc>
+            </a:pPr>
+            <a:r>
+              <a:rPr lang="zh-CN" sz="975">
+                <a:solidFill>
+                  <a:srgbClr val="FFFFFF">
+                    <a:alpha val="75000"/>
+                  </a:srgbClr>
+                </a:solidFill>
+                <a:latin typeface="Microsoft YaHei"/>
+                <a:ea typeface="Microsoft YaHei"/>
+              </a:rPr>
+              <a:t>高自费走电话，普通走企微</a:t>
+            </a:r>
+            <a:endParaRPr/>
+          </a:p>
+        </p:txBody>
+      </p:sp>
+      <p:sp>
+        <p:nvSpPr>
+          <p:cNvPr id="98" name="" descr="{&quot;isTemplate&quot;:true,&quot;type&quot;:&quot;text&quot;}"/>
+          <p:cNvSpPr txBox="1"/>
+          <p:nvPr/>
+        </p:nvSpPr>
+        <p:spPr>
+          <a:xfrm rot="0" flipH="0" flipV="0">
+            <a:off x="7286625" y="4086225"/>
+            <a:ext cx="666750" cy="323850"/>
+          </a:xfrm>
+          <a:prstGeom prst="rect"/>
+        </p:spPr>
+        <p:txBody>
+          <a:bodyPr wrap="none" lIns="0" tIns="0" rIns="0" bIns="0"/>
+          <a:p>
+            <a:pPr>
+              <a:lnSpc>
+                <a:spcPct val="100000"/>
+              </a:lnSpc>
+            </a:pPr>
+            <a:r>
+              <a:rPr lang="en-US" sz="2100" b="1">
+                <a:solidFill>
+                  <a:srgbClr val="38B2AC"/>
+                </a:solidFill>
+                <a:latin typeface="Microsoft YaHei"/>
+                <a:ea typeface="Microsoft YaHei"/>
+              </a:rPr>
+              <a:t>2</a:t>
+            </a:r>
+            <a:endParaRPr/>
+          </a:p>
+        </p:txBody>
+      </p:sp>
+      <p:sp>
+        <p:nvSpPr>
+          <p:cNvPr id="99" name="" descr="{&quot;isTemplate&quot;:true,&quot;type&quot;:&quot;text&quot;}"/>
+          <p:cNvSpPr txBox="1"/>
+          <p:nvPr/>
+        </p:nvSpPr>
+        <p:spPr>
+          <a:xfrm rot="0" flipH="0" flipV="0">
+            <a:off x="7953375" y="4076700"/>
+            <a:ext cx="3305175" cy="190500"/>
+          </a:xfrm>
+          <a:prstGeom prst="rect"/>
+        </p:spPr>
+        <p:txBody>
+          <a:bodyPr wrap="none" lIns="0" tIns="0" rIns="0" bIns="0"/>
+          <a:p>
+            <a:pPr>
+              <a:lnSpc>
+                <a:spcPct val="100000"/>
+              </a:lnSpc>
+            </a:pPr>
+            <a:r>
+              <a:rPr lang="zh-CN" sz="1200" b="1">
+                <a:solidFill>
+                  <a:srgbClr val="FFFFFF"/>
+                </a:solidFill>
+                <a:latin typeface="Microsoft YaHei"/>
+                <a:ea typeface="Microsoft YaHei"/>
+              </a:rPr>
+              <a:t>组增值服务</a:t>
+            </a:r>
+            <a:endParaRPr/>
+          </a:p>
+        </p:txBody>
+      </p:sp>
+      <p:sp>
+        <p:nvSpPr>
+          <p:cNvPr id="100" name="" descr="{&quot;isTemplate&quot;:true,&quot;type&quot;:&quot;text&quot;}"/>
+          <p:cNvSpPr txBox="1"/>
+          <p:nvPr/>
+        </p:nvSpPr>
+        <p:spPr>
+          <a:xfrm rot="0" flipH="0" flipV="0">
+            <a:off x="7953375" y="4267200"/>
+            <a:ext cx="3305175" cy="152400"/>
+          </a:xfrm>
+          <a:prstGeom prst="rect"/>
+        </p:spPr>
+        <p:txBody>
+          <a:bodyPr wrap="none" lIns="0" tIns="0" rIns="0" bIns="0"/>
+          <a:p>
+            <a:pPr>
+              <a:lnSpc>
+                <a:spcPct val="100000"/>
+              </a:lnSpc>
+            </a:pPr>
+            <a:r>
+              <a:rPr lang="zh-CN" sz="975">
+                <a:solidFill>
+                  <a:srgbClr val="FFFFFF">
+                    <a:alpha val="75000"/>
+                  </a:srgbClr>
+                </a:solidFill>
+                <a:latin typeface="Microsoft YaHei"/>
+                <a:ea typeface="Microsoft YaHei"/>
+              </a:rPr>
+              <a:t>特药</a:t>
+            </a:r>
+            <a:r>
+              <a:rPr lang="en-US" sz="975">
+                <a:solidFill>
+                  <a:srgbClr val="FFFFFF">
+                    <a:alpha val="75000"/>
+                  </a:srgbClr>
+                </a:solidFill>
+                <a:latin typeface="Microsoft YaHei"/>
+                <a:ea typeface="Microsoft YaHei"/>
+              </a:rPr>
+              <a:t>/</a:t>
+            </a:r>
+            <a:r>
+              <a:rPr lang="zh-CN" sz="975">
+                <a:solidFill>
+                  <a:srgbClr val="FFFFFF">
+                    <a:alpha val="75000"/>
+                  </a:srgbClr>
+                </a:solidFill>
+                <a:latin typeface="Microsoft YaHei"/>
+                <a:ea typeface="Microsoft YaHei"/>
+              </a:rPr>
+              <a:t>质子</a:t>
+            </a:r>
+            <a:r>
+              <a:rPr lang="en-US" sz="975">
+                <a:solidFill>
+                  <a:srgbClr val="FFFFFF">
+                    <a:alpha val="75000"/>
+                  </a:srgbClr>
+                </a:solidFill>
+                <a:latin typeface="Microsoft YaHei"/>
+                <a:ea typeface="Microsoft YaHei"/>
+              </a:rPr>
+              <a:t>/</a:t>
+            </a:r>
+            <a:r>
+              <a:rPr lang="zh-CN" sz="975">
+                <a:solidFill>
+                  <a:srgbClr val="FFFFFF">
+                    <a:alpha val="75000"/>
+                  </a:srgbClr>
+                </a:solidFill>
+                <a:latin typeface="Microsoft YaHei"/>
+                <a:ea typeface="Microsoft YaHei"/>
+              </a:rPr>
+              <a:t>绿通</a:t>
+            </a:r>
+            <a:r>
+              <a:rPr lang="en-US" sz="975">
+                <a:solidFill>
+                  <a:srgbClr val="FFFFFF">
+                    <a:alpha val="75000"/>
+                  </a:srgbClr>
+                </a:solidFill>
+                <a:latin typeface="Microsoft YaHei"/>
+                <a:ea typeface="Microsoft YaHei"/>
+              </a:rPr>
+              <a:t> + </a:t>
+            </a:r>
+            <a:r>
+              <a:rPr lang="zh-CN" sz="975">
+                <a:solidFill>
+                  <a:srgbClr val="FFFFFF">
+                    <a:alpha val="75000"/>
+                  </a:srgbClr>
+                </a:solidFill>
+                <a:latin typeface="Microsoft YaHei"/>
+                <a:ea typeface="Microsoft YaHei"/>
+              </a:rPr>
+              <a:t>护工</a:t>
+            </a:r>
+            <a:r>
+              <a:rPr lang="en-US" sz="975">
+                <a:solidFill>
+                  <a:srgbClr val="FFFFFF">
+                    <a:alpha val="75000"/>
+                  </a:srgbClr>
+                </a:solidFill>
+                <a:latin typeface="Microsoft YaHei"/>
+                <a:ea typeface="Microsoft YaHei"/>
+              </a:rPr>
+              <a:t>/</a:t>
+            </a:r>
+            <a:r>
+              <a:rPr lang="zh-CN" sz="975">
+                <a:solidFill>
+                  <a:srgbClr val="FFFFFF">
+                    <a:alpha val="75000"/>
+                  </a:srgbClr>
+                </a:solidFill>
+                <a:latin typeface="Microsoft YaHei"/>
+                <a:ea typeface="Microsoft YaHei"/>
+              </a:rPr>
+              <a:t>陪诊</a:t>
+            </a:r>
+            <a:endParaRPr/>
+          </a:p>
+        </p:txBody>
+      </p:sp>
+      <p:sp>
+        <p:nvSpPr>
+          <p:cNvPr id="101" name="" descr="{&quot;isTemplate&quot;:true,&quot;type&quot;:&quot;text&quot;}"/>
+          <p:cNvSpPr txBox="1"/>
+          <p:nvPr/>
+        </p:nvSpPr>
+        <p:spPr>
+          <a:xfrm rot="0" flipH="0" flipV="0">
+            <a:off x="7286625" y="4648200"/>
+            <a:ext cx="3971925" cy="304800"/>
+          </a:xfrm>
+          <a:prstGeom prst="rect"/>
+        </p:spPr>
+        <p:txBody>
+          <a:bodyPr wrap="square" lIns="0" tIns="0" rIns="0" bIns="0">
+            <a:normAutofit/>
+          </a:bodyPr>
+          <a:p>
+            <a:pPr>
+              <a:lnSpc>
+                <a:spcPct val="100000"/>
+              </a:lnSpc>
+            </a:pPr>
+            <a:r>
+              <a:rPr lang="zh-CN" sz="975" i="1">
+                <a:solidFill>
+                  <a:srgbClr val="FFFFFF">
+                    <a:alpha val="60000"/>
+                  </a:srgbClr>
+                </a:solidFill>
+                <a:latin typeface="Microsoft YaHei"/>
+                <a:ea typeface="Microsoft YaHei"/>
+              </a:rPr>
+              <a:t>端到端跑通：触发</a:t>
+            </a:r>
+            <a:r>
+              <a:rPr lang="en-US" sz="975" i="1">
+                <a:solidFill>
+                  <a:srgbClr val="FFFFFF">
+                    <a:alpha val="60000"/>
+                  </a:srgbClr>
+                </a:solidFill>
+                <a:latin typeface="Microsoft YaHei"/>
+                <a:ea typeface="Microsoft YaHei"/>
+              </a:rPr>
+              <a:t> → a </a:t>
+            </a:r>
+            <a:r>
+              <a:rPr lang="zh-CN" sz="975" i="1">
+                <a:solidFill>
+                  <a:srgbClr val="FFFFFF">
+                    <a:alpha val="60000"/>
+                  </a:srgbClr>
+                </a:solidFill>
+                <a:latin typeface="Microsoft YaHei"/>
+                <a:ea typeface="Microsoft YaHei"/>
+              </a:rPr>
+              <a:t>结构化</a:t>
+            </a:r>
+            <a:r>
+              <a:rPr lang="en-US" sz="975" i="1">
+                <a:solidFill>
+                  <a:srgbClr val="FFFFFF">
+                    <a:alpha val="60000"/>
+                  </a:srgbClr>
+                </a:solidFill>
+                <a:latin typeface="Microsoft YaHei"/>
+                <a:ea typeface="Microsoft YaHei"/>
+              </a:rPr>
+              <a:t> → b </a:t>
+            </a:r>
+            <a:r>
+              <a:rPr lang="zh-CN" sz="975" i="1">
+                <a:solidFill>
+                  <a:srgbClr val="FFFFFF">
+                    <a:alpha val="60000"/>
+                  </a:srgbClr>
+                </a:solidFill>
+                <a:latin typeface="Microsoft YaHei"/>
+                <a:ea typeface="Microsoft YaHei"/>
+              </a:rPr>
+              <a:t>痛点</a:t>
+            </a:r>
+            <a:r>
+              <a:rPr lang="en-US" sz="975" i="1">
+                <a:solidFill>
+                  <a:srgbClr val="FFFFFF">
+                    <a:alpha val="60000"/>
+                  </a:srgbClr>
+                </a:solidFill>
+                <a:latin typeface="Microsoft YaHei"/>
+                <a:ea typeface="Microsoft YaHei"/>
+              </a:rPr>
+              <a:t> → c </a:t>
+            </a:r>
+            <a:r>
+              <a:rPr lang="zh-CN" sz="975" i="1">
+                <a:solidFill>
+                  <a:srgbClr val="FFFFFF">
+                    <a:alpha val="60000"/>
+                  </a:srgbClr>
+                </a:solidFill>
+                <a:latin typeface="Microsoft YaHei"/>
+                <a:ea typeface="Microsoft YaHei"/>
+              </a:rPr>
+              <a:t>指引</a:t>
+            </a:r>
+            <a:r>
+              <a:rPr lang="en-US" sz="975" i="1">
+                <a:solidFill>
+                  <a:srgbClr val="FFFFFF">
+                    <a:alpha val="60000"/>
+                  </a:srgbClr>
+                </a:solidFill>
+                <a:latin typeface="Microsoft YaHei"/>
+                <a:ea typeface="Microsoft YaHei"/>
+              </a:rPr>
+              <a:t> → d </a:t>
+            </a:r>
+            <a:r>
+              <a:rPr lang="zh-CN" sz="975" i="1">
+                <a:solidFill>
+                  <a:srgbClr val="FFFFFF">
+                    <a:alpha val="60000"/>
+                  </a:srgbClr>
+                </a:solidFill>
+                <a:latin typeface="Microsoft YaHei"/>
+                <a:ea typeface="Microsoft YaHei"/>
+              </a:rPr>
+              <a:t>画像</a:t>
+            </a:r>
+            <a:r>
+              <a:rPr lang="en-US" sz="975" i="1">
+                <a:solidFill>
+                  <a:srgbClr val="FFFFFF">
+                    <a:alpha val="60000"/>
+                  </a:srgbClr>
+                </a:solidFill>
+                <a:latin typeface="Microsoft YaHei"/>
+                <a:ea typeface="Microsoft YaHei"/>
+              </a:rPr>
+              <a:t> → e </a:t>
+            </a:r>
+            <a:r>
+              <a:rPr lang="zh-CN" sz="975" i="1">
+                <a:solidFill>
+                  <a:srgbClr val="FFFFFF">
+                    <a:alpha val="60000"/>
+                  </a:srgbClr>
+                </a:solidFill>
+                <a:latin typeface="Microsoft YaHei"/>
+                <a:ea typeface="Microsoft YaHei"/>
+              </a:rPr>
+              <a:t>关怀增强</a:t>
+            </a:r>
+            <a:endParaRPr/>
+          </a:p>
+        </p:txBody>
+      </p:sp>
+      <p:sp>
+        <p:nvSpPr>
+          <p:cNvPr id="102" name="" descr="{&quot;isTemplate&quot;:true,&quot;type&quot;:&quot;text&quot;}"/>
+          <p:cNvSpPr txBox="1"/>
+          <p:nvPr/>
+        </p:nvSpPr>
+        <p:spPr>
+          <a:xfrm rot="0" flipH="0" flipV="0">
+            <a:off x="666750" y="6315075"/>
+            <a:ext cx="1466850" cy="161925"/>
+          </a:xfrm>
+          <a:prstGeom prst="rect"/>
+        </p:spPr>
+        <p:txBody>
+          <a:bodyPr wrap="none" lIns="0" tIns="0" rIns="0" bIns="0"/>
+          <a:p>
+            <a:pPr>
+              <a:lnSpc>
+                <a:spcPct val="100000"/>
+              </a:lnSpc>
+            </a:pPr>
+            <a:r>
+              <a:rPr lang="zh-CN" sz="1050">
+                <a:solidFill>
+                  <a:srgbClr val="718096"/>
+                </a:solidFill>
+                <a:latin typeface="Microsoft YaHei"/>
+                <a:ea typeface="Microsoft YaHei"/>
+              </a:rPr>
+              <a:t>医护洞察与温度指引引擎</a:t>
+            </a:r>
+            <a:endParaRPr/>
+          </a:p>
+        </p:txBody>
+      </p:sp>
+      <p:sp>
+        <p:nvSpPr>
+          <p:cNvPr id="103" name="" descr="{&quot;isTemplate&quot;:true,&quot;type&quot;:&quot;text&quot;}"/>
+          <p:cNvSpPr txBox="1"/>
+          <p:nvPr/>
+        </p:nvSpPr>
+        <p:spPr>
+          <a:xfrm rot="0" flipH="0" flipV="0">
+            <a:off x="11068050" y="6315075"/>
+            <a:ext cx="457200" cy="161925"/>
+          </a:xfrm>
+          <a:prstGeom prst="rect"/>
+        </p:spPr>
+        <p:txBody>
+          <a:bodyPr wrap="none" lIns="0" tIns="0" rIns="0" bIns="0"/>
+          <a:p>
+            <a:pPr>
+              <a:lnSpc>
+                <a:spcPct val="100000"/>
+              </a:lnSpc>
+            </a:pPr>
+            <a:r>
+              <a:rPr lang="en-US" sz="1050">
+                <a:solidFill>
+                  <a:srgbClr val="718096"/>
+                </a:solidFill>
+                <a:latin typeface="Microsoft YaHei"/>
+                <a:ea typeface="Microsoft YaHei"/>
+              </a:rPr>
+              <a:t>12 / 13</a:t>
+            </a:r>
+            <a:endParaRPr/>
+          </a:p>
+        </p:txBody>
+      </p:sp>
+    </p:spTree>
+  </p:cSld>
+</p:sld>
+</file>
+
+<file path=ppt/slides/slide13.xml><?xml version="1.0" encoding="utf-8"?>
+<p:sld xmlns:p="http://schemas.openxmlformats.org/presentationml/2006/main" xmlns:a="http://schemas.openxmlformats.org/drawingml/2006/main">
+  <p:cSld>
+    <p:spTree>
+      <p:nvGrpSpPr>
+        <p:cNvPr id="104" name=""/>
+        <p:cNvGrpSpPr/>
+        <p:nvPr/>
+      </p:nvGrpSpPr>
+      <p:grpSpPr>
+        <a:xfrm>
+          <a:off x="0" y="0"/>
+          <a:ext cx="0" cy="0"/>
+          <a:chOff x="0" y="0"/>
+          <a:chExt cx="0" cy="0"/>
+        </a:xfrm>
+      </p:grpSpPr>
+      <p:sp>
+        <p:nvSpPr>
+          <p:cNvPr id="105" name=""/>
           <p:cNvSpPr/>
           <p:nvPr/>
         </p:nvSpPr>
@@ -3104,12 +5662,15 @@
         </p:spPr>
         <p:txBody>
           <a:bodyPr/>
-          <a:p/>
-        </p:txBody>
-      </p:sp>
-      <p:sp>
-        <p:nvSpPr>
-          <p:cNvPr id="60" name="" descr="{&quot;isTemplate&quot;:true,&quot;type&quot;:&quot;text&quot;}"/>
+          <a:p>
+            <a:pPr/>
+            <a:endParaRPr/>
+          </a:p>
+        </p:txBody>
+      </p:sp>
+      <p:sp>
+        <p:nvSpPr>
+          <p:cNvPr id="106" name="" descr="{&quot;isTemplate&quot;:true,&quot;type&quot;:&quot;text&quot;}"/>
           <p:cNvSpPr txBox="1"/>
           <p:nvPr/>
         </p:nvSpPr>
@@ -3162,7 +5723,7 @@
       </p:sp>
       <p:sp>
         <p:nvSpPr>
-          <p:cNvPr id="61" name="" descr="{&quot;isTemplate&quot;:true,&quot;type&quot;:&quot;text&quot;}"/>
+          <p:cNvPr id="107" name="" descr="{&quot;isTemplate&quot;:true,&quot;type&quot;:&quot;text&quot;}"/>
           <p:cNvSpPr txBox="1"/>
           <p:nvPr/>
         </p:nvSpPr>
@@ -3295,7 +5856,7 @@
       </p:sp>
       <p:sp>
         <p:nvSpPr>
-          <p:cNvPr id="62" name="" descr="{&quot;isTemplate&quot;:true,&quot;type&quot;:&quot;text&quot;}"/>
+          <p:cNvPr id="108" name="" descr="{&quot;isTemplate&quot;:true,&quot;type&quot;:&quot;text&quot;}"/>
           <p:cNvSpPr txBox="1"/>
           <p:nvPr/>
         </p:nvSpPr>
@@ -3356,7 +5917,7 @@
       </p:sp>
       <p:sp>
         <p:nvSpPr>
-          <p:cNvPr id="63" name=""/>
+          <p:cNvPr id="109" name=""/>
           <p:cNvSpPr/>
           <p:nvPr/>
         </p:nvSpPr>
@@ -3416,12 +5977,15 @@
         </p:spPr>
         <p:txBody>
           <a:bodyPr/>
-          <a:p/>
-        </p:txBody>
-      </p:sp>
-      <p:sp>
-        <p:nvSpPr>
-          <p:cNvPr id="64" name=""/>
+          <a:p>
+            <a:pPr/>
+            <a:endParaRPr/>
+          </a:p>
+        </p:txBody>
+      </p:sp>
+      <p:sp>
+        <p:nvSpPr>
+          <p:cNvPr id="110" name=""/>
           <p:cNvSpPr/>
           <p:nvPr/>
         </p:nvSpPr>
@@ -3481,7 +6045,10 @@
         </p:spPr>
         <p:txBody>
           <a:bodyPr/>
-          <a:p/>
+          <a:p>
+            <a:pPr/>
+            <a:endParaRPr/>
+          </a:p>
         </p:txBody>
       </p:sp>
     </p:spTree>
@@ -3494,7 +6061,7 @@
   <p:cSld>
     <p:spTree>
       <p:nvGrpSpPr>
-        <p:cNvPr id="65" name="" descr="&lt;Slide&gt;&#10;  &lt;Box style={{ width: '1280px', height: '720px', background: '#F7FAFC', flexDirection: 'column', padding: '60px 80px' }}&gt;&#10;    &lt;Box style={{ flexDirection: 'row', alignItems: 'baseline', marginBottom: 48 }}&gt;&#10;      &lt;Text style={{ fontSize: 36, fontWeight: 'bold', color: '#1A365D' }}&gt;目录&lt;/Text&gt;&#10;      &lt;Text style={{ fontSize: 18, color: '#718096', marginLeft: 16 }}&gt;CONTENTS&lt;/Text&gt;&#10;    &lt;/Box&gt;&#10;&#10;    &lt;Box style={{ flexDirection: 'row', gap: 32, flex: 1 }}&gt;&#10;      {[&#10;        { no: '01', title: '定位与架构', desc: '一句话定位与四模块全链路架构，以及 OCR + LLM + 规则的三层技术路线' },&#10;        { no: '02', title: '效果验证', desc: 'KR1 结构化硬指标、温度指引盲评、品质画像维度，全部用官方 70 案实测数字说话' },&#10;        { no: '03', title: '落地与合规', desc: '三条触达路径、反馈闭环，以及数据合规与 AI 原生度自证' },&#10;      ].map((item, idx) =&gt; (&#10;        &lt;Box key={idx} style={{ flex: 1, borderRadius: 16, background: '#FFFFFF', padding: 40, flexDirection: 'column', boxShadow: '0 4px 20px rgba(0,0,0,0.06)', border: '1px solid #E2E8F0' }}&gt;&#10;          &lt;Text style={{ fontSize: 64, fontWeight: 'bold', color: '#38B2AC', lineHeight: 1 }}&gt;{item.no}&lt;/Text&gt;&#10;          &lt;Text style={{ fontSize: 28, fontWeight: 'bold', color: '#1A365D', marginTop: 20, marginBottom: 16 }}&gt;{item.title}&lt;/Text&gt;&#10;          &lt;Text style={{ fontSize: 20, color: '#4A5568', lineHeight: 1.6 }}&gt;{item.desc}&lt;/Text&gt;&#10;        &lt;/Box&gt;&#10;      ))}&#10;    &lt;/Box&gt;&#10;&#10;    &lt;Box style={{ flexDirection: 'row', alignItems: 'center', marginTop: 28 }}&gt;&#10;      &lt;Text style={{ fontSize: 14, color: '#718096' }}&gt;医护洞察与温度指引引擎&lt;/Text&gt;&#10;      &lt;Text style={{ fontSize: 14, color: '#718096', marginLeft: 'auto' }}&gt;02 / 12&lt;/Text&gt;&#10;    &lt;/Box&gt;&#10;  &lt;/Box&gt;&#10;&lt;/Slide&gt;&#10;"/>
+        <p:cNvPr id="111" name=""/>
         <p:cNvGrpSpPr/>
         <p:nvPr/>
       </p:nvGrpSpPr>
@@ -3508,7 +6075,7 @@
       </p:grpSpPr>
       <p:sp>
         <p:nvSpPr>
-          <p:cNvPr id="66" name=""/>
+          <p:cNvPr id="112" name=""/>
           <p:cNvSpPr/>
           <p:nvPr/>
         </p:nvSpPr>
@@ -3527,12 +6094,15 @@
         </p:spPr>
         <p:txBody>
           <a:bodyPr/>
-          <a:p/>
-        </p:txBody>
-      </p:sp>
-      <p:sp>
-        <p:nvSpPr>
-          <p:cNvPr id="67" name="" descr="{&quot;isTemplate&quot;:true,&quot;type&quot;:&quot;text&quot;}"/>
+          <a:p>
+            <a:pPr/>
+            <a:endParaRPr/>
+          </a:p>
+        </p:txBody>
+      </p:sp>
+      <p:sp>
+        <p:nvSpPr>
+          <p:cNvPr id="113" name="" descr="{&quot;isTemplate&quot;:true,&quot;type&quot;:&quot;text&quot;}"/>
           <p:cNvSpPr txBox="1"/>
           <p:nvPr/>
         </p:nvSpPr>
@@ -3567,7 +6137,7 @@
       </p:sp>
       <p:sp>
         <p:nvSpPr>
-          <p:cNvPr id="68" name="" descr="{&quot;isTemplate&quot;:true,&quot;type&quot;:&quot;text&quot;}"/>
+          <p:cNvPr id="114" name="" descr="{&quot;isTemplate&quot;:true,&quot;type&quot;:&quot;text&quot;}"/>
           <p:cNvSpPr txBox="1"/>
           <p:nvPr/>
         </p:nvSpPr>
@@ -3602,7 +6172,7 @@
       </p:sp>
       <p:sp>
         <p:nvSpPr>
-          <p:cNvPr id="69" name=""/>
+          <p:cNvPr id="115" name=""/>
           <p:cNvSpPr/>
           <p:nvPr/>
         </p:nvSpPr>
@@ -3635,12 +6205,15 @@
         </p:spPr>
         <p:txBody>
           <a:bodyPr/>
-          <a:p/>
-        </p:txBody>
-      </p:sp>
-      <p:sp>
-        <p:nvSpPr>
-          <p:cNvPr id="70" name="" descr="{&quot;isTemplate&quot;:true,&quot;type&quot;:&quot;text&quot;}"/>
+          <a:p>
+            <a:pPr/>
+            <a:endParaRPr/>
+          </a:p>
+        </p:txBody>
+      </p:sp>
+      <p:sp>
+        <p:nvSpPr>
+          <p:cNvPr id="116" name="" descr="{&quot;isTemplate&quot;:true,&quot;type&quot;:&quot;text&quot;}"/>
           <p:cNvSpPr txBox="1"/>
           <p:nvPr/>
         </p:nvSpPr>
@@ -3675,7 +6248,7 @@
       </p:sp>
       <p:sp>
         <p:nvSpPr>
-          <p:cNvPr id="71" name="" descr="{&quot;isTemplate&quot;:true,&quot;type&quot;:&quot;text&quot;}"/>
+          <p:cNvPr id="117" name="" descr="{&quot;isTemplate&quot;:true,&quot;type&quot;:&quot;text&quot;}"/>
           <p:cNvSpPr txBox="1"/>
           <p:nvPr/>
         </p:nvSpPr>
@@ -3710,7 +6283,7 @@
       </p:sp>
       <p:sp>
         <p:nvSpPr>
-          <p:cNvPr id="72" name="" descr="{&quot;isTemplate&quot;:true,&quot;type&quot;:&quot;text&quot;}"/>
+          <p:cNvPr id="118" name="" descr="{&quot;isTemplate&quot;:true,&quot;type&quot;:&quot;text&quot;}"/>
           <p:cNvSpPr txBox="1"/>
           <p:nvPr/>
         </p:nvSpPr>
@@ -3767,7 +6340,7 @@
       </p:sp>
       <p:sp>
         <p:nvSpPr>
-          <p:cNvPr id="73" name=""/>
+          <p:cNvPr id="119" name=""/>
           <p:cNvSpPr/>
           <p:nvPr/>
         </p:nvSpPr>
@@ -3800,12 +6373,15 @@
         </p:spPr>
         <p:txBody>
           <a:bodyPr/>
-          <a:p/>
-        </p:txBody>
-      </p:sp>
-      <p:sp>
-        <p:nvSpPr>
-          <p:cNvPr id="74" name="" descr="{&quot;isTemplate&quot;:true,&quot;type&quot;:&quot;text&quot;}"/>
+          <a:p>
+            <a:pPr/>
+            <a:endParaRPr/>
+          </a:p>
+        </p:txBody>
+      </p:sp>
+      <p:sp>
+        <p:nvSpPr>
+          <p:cNvPr id="120" name="" descr="{&quot;isTemplate&quot;:true,&quot;type&quot;:&quot;text&quot;}"/>
           <p:cNvSpPr txBox="1"/>
           <p:nvPr/>
         </p:nvSpPr>
@@ -3840,7 +6416,7 @@
       </p:sp>
       <p:sp>
         <p:nvSpPr>
-          <p:cNvPr id="75" name="" descr="{&quot;isTemplate&quot;:true,&quot;type&quot;:&quot;text&quot;}"/>
+          <p:cNvPr id="121" name="" descr="{&quot;isTemplate&quot;:true,&quot;type&quot;:&quot;text&quot;}"/>
           <p:cNvSpPr txBox="1"/>
           <p:nvPr/>
         </p:nvSpPr>
@@ -3875,7 +6451,7 @@
       </p:sp>
       <p:sp>
         <p:nvSpPr>
-          <p:cNvPr id="76" name="" descr="{&quot;isTemplate&quot;:true,&quot;type&quot;:&quot;text&quot;}"/>
+          <p:cNvPr id="122" name="" descr="{&quot;isTemplate&quot;:true,&quot;type&quot;:&quot;text&quot;}"/>
           <p:cNvSpPr txBox="1"/>
           <p:nvPr/>
         </p:nvSpPr>
@@ -3942,7 +6518,7 @@
       </p:sp>
       <p:sp>
         <p:nvSpPr>
-          <p:cNvPr id="77" name=""/>
+          <p:cNvPr id="123" name=""/>
           <p:cNvSpPr/>
           <p:nvPr/>
         </p:nvSpPr>
@@ -3975,12 +6551,15 @@
         </p:spPr>
         <p:txBody>
           <a:bodyPr/>
-          <a:p/>
-        </p:txBody>
-      </p:sp>
-      <p:sp>
-        <p:nvSpPr>
-          <p:cNvPr id="78" name="" descr="{&quot;isTemplate&quot;:true,&quot;type&quot;:&quot;text&quot;}"/>
+          <a:p>
+            <a:pPr/>
+            <a:endParaRPr/>
+          </a:p>
+        </p:txBody>
+      </p:sp>
+      <p:sp>
+        <p:nvSpPr>
+          <p:cNvPr id="124" name="" descr="{&quot;isTemplate&quot;:true,&quot;type&quot;:&quot;text&quot;}"/>
           <p:cNvSpPr txBox="1"/>
           <p:nvPr/>
         </p:nvSpPr>
@@ -4015,7 +6594,7 @@
       </p:sp>
       <p:sp>
         <p:nvSpPr>
-          <p:cNvPr id="79" name="" descr="{&quot;isTemplate&quot;:true,&quot;type&quot;:&quot;text&quot;}"/>
+          <p:cNvPr id="125" name="" descr="{&quot;isTemplate&quot;:true,&quot;type&quot;:&quot;text&quot;}"/>
           <p:cNvSpPr txBox="1"/>
           <p:nvPr/>
         </p:nvSpPr>
@@ -4050,7 +6629,7 @@
       </p:sp>
       <p:sp>
         <p:nvSpPr>
-          <p:cNvPr id="80" name="" descr="{&quot;isTemplate&quot;:true,&quot;type&quot;:&quot;text&quot;}"/>
+          <p:cNvPr id="126" name="" descr="{&quot;isTemplate&quot;:true,&quot;type&quot;:&quot;text&quot;}"/>
           <p:cNvSpPr txBox="1"/>
           <p:nvPr/>
         </p:nvSpPr>
@@ -4107,7 +6686,7 @@
       </p:sp>
       <p:sp>
         <p:nvSpPr>
-          <p:cNvPr id="81" name="" descr="{&quot;isTemplate&quot;:true,&quot;type&quot;:&quot;text&quot;}"/>
+          <p:cNvPr id="127" name="" descr="{&quot;isTemplate&quot;:true,&quot;type&quot;:&quot;text&quot;}"/>
           <p:cNvSpPr txBox="1"/>
           <p:nvPr/>
         </p:nvSpPr>
@@ -4142,7 +6721,7 @@
       </p:sp>
       <p:sp>
         <p:nvSpPr>
-          <p:cNvPr id="82" name="" descr="{&quot;isTemplate&quot;:true,&quot;type&quot;:&quot;text&quot;}"/>
+          <p:cNvPr id="128" name="" descr="{&quot;isTemplate&quot;:true,&quot;type&quot;:&quot;text&quot;}"/>
           <p:cNvSpPr txBox="1"/>
           <p:nvPr/>
         </p:nvSpPr>
@@ -4162,16 +6741,22 @@
               </a:lnSpc>
             </a:pPr>
             <a:r>
-              <a:rPr lang="en-US" sz="1050">
+              <a:rPr lang="zh-CN" sz="1050">
                 <a:solidFill>
                   <a:srgbClr val="718096"/>
                 </a:solidFill>
                 <a:latin typeface="Microsoft YaHei"/>
                 <a:ea typeface="Microsoft YaHei"/>
               </a:rPr>
-              <a:t>02 / 12</a:t>
-            </a:r>
-            <a:endParaRPr/>
+              <a:t>02 / 13</a:t>
+            </a:r>
+            <a:endParaRPr lang="en-US" sz="1050">
+              <a:solidFill>
+                <a:srgbClr val="718096"/>
+              </a:solidFill>
+              <a:latin typeface="Microsoft YaHei"/>
+              <a:ea typeface="Microsoft YaHei"/>
+            </a:endParaRPr>
           </a:p>
         </p:txBody>
       </p:sp>
@@ -4185,7 +6770,7 @@
   <p:cSld>
     <p:spTree>
       <p:nvGrpSpPr>
-        <p:cNvPr id="83" name="" descr="&lt;Slide&gt;&#10;  &lt;Box style={{ width: '1280px', height: '720px', position: 'relative', background: 'linear-gradient(135deg, #2B6CB0 0%, #38B2AC 100%)', flexDirection: 'column', justifyContent: 'center', alignItems: 'center' }}&gt;&#10;    &lt;Box style={{ position: 'absolute', top: 80, right: 100, width: 320, height: 320, borderRadius: '50%', background: 'rgba(255,255,255,0.1)' }} /&gt;&#10;    &lt;Box style={{ position: 'absolute', bottom: 60, left: 80, width: 260, height: 260, borderRadius: '50%', background: 'rgba(255,255,255,0.08)' }} /&gt;&#10;    &lt;Text style={{ fontSize: 24, color: 'rgba(255,255,255,0.85)', letterSpacing: 6, marginBottom: 24 }}&gt;CHAPTER 01&lt;/Text&gt;&#10;    &lt;Text style={{ fontSize: 60, fontWeight: 'bold', color: '#FFFFFF', marginBottom: 20 }}&gt;定位与架构&lt;/Text&gt;&#10;    &lt;Text style={{ fontSize: 22, color: 'rgba(255,255,255,0.9)' }}&gt;为什么做 · 怎么做 · 用什么技术&lt;/Text&gt;&#10;  &lt;/Box&gt;&#10;&lt;/Slide&gt;&#10;"/>
+        <p:cNvPr id="129" name=""/>
         <p:cNvGrpSpPr/>
         <p:nvPr/>
       </p:nvGrpSpPr>
@@ -4199,7 +6784,7 @@
       </p:grpSpPr>
       <p:sp>
         <p:nvSpPr>
-          <p:cNvPr id="84" name=""/>
+          <p:cNvPr id="130" name=""/>
           <p:cNvSpPr/>
           <p:nvPr/>
         </p:nvSpPr>
@@ -4226,12 +6811,15 @@
         </p:spPr>
         <p:txBody>
           <a:bodyPr/>
-          <a:p/>
-        </p:txBody>
-      </p:sp>
-      <p:sp>
-        <p:nvSpPr>
-          <p:cNvPr id="85" name="" descr="{&quot;isTemplate&quot;:true,&quot;type&quot;:&quot;text&quot;}"/>
+          <a:p>
+            <a:pPr/>
+            <a:endParaRPr/>
+          </a:p>
+        </p:txBody>
+      </p:sp>
+      <p:sp>
+        <p:nvSpPr>
+          <p:cNvPr id="131" name="" descr="{&quot;isTemplate&quot;:true,&quot;type&quot;:&quot;text&quot;}"/>
           <p:cNvSpPr txBox="1"/>
           <p:nvPr/>
         </p:nvSpPr>
@@ -4268,7 +6856,7 @@
       </p:sp>
       <p:sp>
         <p:nvSpPr>
-          <p:cNvPr id="86" name="" descr="{&quot;isTemplate&quot;:true,&quot;type&quot;:&quot;text&quot;}"/>
+          <p:cNvPr id="132" name="" descr="{&quot;isTemplate&quot;:true,&quot;type&quot;:&quot;text&quot;}"/>
           <p:cNvSpPr txBox="1"/>
           <p:nvPr/>
         </p:nvSpPr>
@@ -4303,7 +6891,7 @@
       </p:sp>
       <p:sp>
         <p:nvSpPr>
-          <p:cNvPr id="87" name="" descr="{&quot;isTemplate&quot;:true,&quot;type&quot;:&quot;text&quot;}"/>
+          <p:cNvPr id="133" name="" descr="{&quot;isTemplate&quot;:true,&quot;type&quot;:&quot;text&quot;}"/>
           <p:cNvSpPr txBox="1"/>
           <p:nvPr/>
         </p:nvSpPr>
@@ -4388,7 +6976,7 @@
       </p:sp>
       <p:sp>
         <p:nvSpPr>
-          <p:cNvPr id="88" name=""/>
+          <p:cNvPr id="134" name=""/>
           <p:cNvSpPr/>
           <p:nvPr/>
         </p:nvSpPr>
@@ -4448,12 +7036,15 @@
         </p:spPr>
         <p:txBody>
           <a:bodyPr/>
-          <a:p/>
-        </p:txBody>
-      </p:sp>
-      <p:sp>
-        <p:nvSpPr>
-          <p:cNvPr id="89" name=""/>
+          <a:p>
+            <a:pPr/>
+            <a:endParaRPr/>
+          </a:p>
+        </p:txBody>
+      </p:sp>
+      <p:sp>
+        <p:nvSpPr>
+          <p:cNvPr id="135" name=""/>
           <p:cNvSpPr/>
           <p:nvPr/>
         </p:nvSpPr>
@@ -4513,7 +7104,10 @@
         </p:spPr>
         <p:txBody>
           <a:bodyPr/>
-          <a:p/>
+          <a:p>
+            <a:pPr/>
+            <a:endParaRPr/>
+          </a:p>
         </p:txBody>
       </p:sp>
     </p:spTree>
@@ -4526,7 +7120,7 @@
   <p:cSld>
     <p:spTree>
       <p:nvGrpSpPr>
-        <p:cNvPr id="90" name="" descr="&lt;Slide&gt;&#10;  &lt;Box style={{ width: '1280px', height: '720px', background: '#FFFFFF', flexDirection: 'column', padding: '40px 70px' }}&gt;&#10;    &lt;Box style={{ flexDirection: 'row', alignItems: 'baseline', marginBottom: 32 }}&gt;&#10;      &lt;Text style={{ fontSize: 34, fontWeight: 'bold', color: '#1A365D' }}&gt;四模块全链路&lt;/Text&gt;&#10;      &lt;Text style={{ fontSize: 18, color: '#718096', marginLeft: 14 }}&gt;不止结构化，是理赔后的全流程增值&lt;/Text&gt;&#10;    &lt;/Box&gt;&#10;&#10;    &lt;Box style={{ flexDirection: 'row', gap: 28, flex: 1 }}&gt;&#10;      {/* 左侧流程主视觉 */}&#10;      &lt;Box style={{ flex: 1.1, borderRadius: 16, background: '#F7FAFC', padding: 32, flexDirection: 'column', justifyContent: 'center', border: '1px solid #E2E8F0' }}&gt;&#10;        &lt;Text style={{ fontSize: 18, color: '#718096', marginBottom: 20 }}&gt;数据流&lt;/Text&gt;&#10;        {[&#10;          { no: 'a', name: '病历结构化', en: 'OCR + LLM + 规则', color: '#2B6CB0' },&#10;          { no: 'b', name: '就医痛点', en: '规则 + LLM 语义', color: '#2B6CB0' },&#10;          { no: 'c', name: '温度指引', en: '个性化信笺', color: '#38B2AC' },&#10;          { no: 'd', name: '品质画像', en: '聚合 + 推荐', color: '#38B2AC' },&#10;        ].map((m, idx) =&gt; (&#10;          &lt;Box key={idx} style={{ flexDirection: 'row', alignItems: 'center', marginBottom: idx === 3 ? 0 : 20 }}&gt;&#10;            &lt;Box style={{ width: 44, height: 44, borderRadius: '50%', background: m.color, alignItems: 'center', justifyContent: 'center', marginRight: 16 }}&gt;&#10;              &lt;Text style={{ fontSize: 20, fontWeight: 'bold', color: '#FFFFFF' }}&gt;{m.no}&lt;/Text&gt;&#10;            &lt;/Box&gt;&#10;            &lt;Box style={{ flex: 1 }}&gt;&#10;              &lt;Text style={{ fontSize: 22, fontWeight: 'bold', color: '#1A365D' }}&gt;{m.name}&lt;/Text&gt;&#10;              &lt;Text style={{ fontSize: 16, color: '#718096' }}&gt;{m.en}&lt;/Text&gt;&#10;            &lt;/Box&gt;&#10;            {idx &lt; 3 &amp;&amp; &lt;Text style={{ fontSize: 24, color: '#CBD5E0', marginLeft: 8 }}&gt;↓&lt;/Text&gt;}&#10;          &lt;/Box&gt;&#10;        ))}&#10;      &lt;/Box&gt;&#10;&#10;      {/* 右侧说明 */}&#10;      &lt;Box style={{ flex: 1, flexDirection: 'column', justifyContent: 'center', gap: 20 }}&gt;&#10;        &lt;Box style={{ padding: 24, borderRadius: 12, background: '#EBF8FF', border: '1px solid #BEE3F8' }}&gt;&#10;          &lt;Text style={{ fontSize: 20, fontWeight: 'bold', color: '#2B6CB0', marginBottom: 10 }}&gt;核赔之外的增值&lt;/Text&gt;&#10;          &lt;Text style={{ fontSize: 18, color: '#2C5282', lineHeight: 1.6 }}&gt;传统理赔里，病历只用于核赔，患者拿到的是&quot;已结案&quot;。本引擎在理赔完成后，把病历转成一份&quot;人话版&quot;就医复盘与后续关怀。&lt;/Text&gt;&#10;        &lt;/Box&gt;&#10;        &lt;Box style={{ padding: 24, borderRadius: 12, background: '#E6FFFA', border: '1px solid #B2F5EA' }}&gt;&#10;          &lt;Text style={{ fontSize: 20, fontWeight: 'bold', color: '#2C7A7B', marginBottom: 10 }}&gt;四模块职责清晰&lt;/Text&gt;&#10;          &lt;Text style={{ fontSize: 18, color: '#234E52', lineHeight: 1.6 }}&gt;a 结构化 → b 洞察痛点 → c 生成指引 → d 沉淀画像，层层递进，每个模块的输出都带证据溯源。&lt;/Text&gt;&#10;        &lt;/Box&gt;&#10;      &lt;/Box&gt;&#10;    &lt;/Box&gt;&#10;&#10;    &lt;Box style={{ flexDirection: 'row', alignItems: 'center', marginTop: 24 }}&gt;&#10;      &lt;Text style={{ fontSize: 14, color: '#718096' }}&gt;医护洞察与温度指引引擎&lt;/Text&gt;&#10;      &lt;Text style={{ fontSize: 14, color: '#718096', marginLeft: 'auto' }}&gt;04 / 12&lt;/Text&gt;&#10;    &lt;/Box&gt;&#10;  &lt;/Box&gt;&#10;&lt;/Slide&gt;&#10;"/>
+        <p:cNvPr id="136" name=""/>
         <p:cNvGrpSpPr/>
         <p:nvPr/>
       </p:nvGrpSpPr>
@@ -4540,7 +7134,7 @@
       </p:grpSpPr>
       <p:sp>
         <p:nvSpPr>
-          <p:cNvPr id="91" name=""/>
+          <p:cNvPr id="137" name=""/>
           <p:cNvSpPr/>
           <p:nvPr/>
         </p:nvSpPr>
@@ -4559,12 +7153,15 @@
         </p:spPr>
         <p:txBody>
           <a:bodyPr/>
-          <a:p/>
-        </p:txBody>
-      </p:sp>
-      <p:sp>
-        <p:nvSpPr>
-          <p:cNvPr id="92" name="" descr="{&quot;isTemplate&quot;:true,&quot;type&quot;:&quot;text&quot;}"/>
+          <a:p>
+            <a:pPr/>
+            <a:endParaRPr/>
+          </a:p>
+        </p:txBody>
+      </p:sp>
+      <p:sp>
+        <p:nvSpPr>
+          <p:cNvPr id="138" name="" descr="{&quot;isTemplate&quot;:true,&quot;type&quot;:&quot;text&quot;}"/>
           <p:cNvSpPr txBox="1"/>
           <p:nvPr/>
         </p:nvSpPr>
@@ -4599,7 +7196,7 @@
       </p:sp>
       <p:sp>
         <p:nvSpPr>
-          <p:cNvPr id="93" name="" descr="{&quot;isTemplate&quot;:true,&quot;type&quot;:&quot;text&quot;}"/>
+          <p:cNvPr id="139" name="" descr="{&quot;isTemplate&quot;:true,&quot;type&quot;:&quot;text&quot;}"/>
           <p:cNvSpPr txBox="1"/>
           <p:nvPr/>
         </p:nvSpPr>
@@ -4634,7 +7231,7 @@
       </p:sp>
       <p:sp>
         <p:nvSpPr>
-          <p:cNvPr id="94" name=""/>
+          <p:cNvPr id="140" name=""/>
           <p:cNvSpPr/>
           <p:nvPr/>
         </p:nvSpPr>
@@ -4660,12 +7257,15 @@
         </p:spPr>
         <p:txBody>
           <a:bodyPr/>
-          <a:p/>
-        </p:txBody>
-      </p:sp>
-      <p:sp>
-        <p:nvSpPr>
-          <p:cNvPr id="95" name="" descr="{&quot;isTemplate&quot;:true,&quot;type&quot;:&quot;text&quot;}"/>
+          <a:p>
+            <a:pPr/>
+            <a:endParaRPr/>
+          </a:p>
+        </p:txBody>
+      </p:sp>
+      <p:sp>
+        <p:nvSpPr>
+          <p:cNvPr id="141" name="" descr="{&quot;isTemplate&quot;:true,&quot;type&quot;:&quot;text&quot;}"/>
           <p:cNvSpPr txBox="1"/>
           <p:nvPr/>
         </p:nvSpPr>
@@ -4700,7 +7300,7 @@
       </p:sp>
       <p:sp>
         <p:nvSpPr>
-          <p:cNvPr id="96" name=""/>
+          <p:cNvPr id="142" name=""/>
           <p:cNvSpPr/>
           <p:nvPr/>
         </p:nvSpPr>
@@ -4758,12 +7358,15 @@
         </p:spPr>
         <p:txBody>
           <a:bodyPr/>
-          <a:p/>
-        </p:txBody>
-      </p:sp>
-      <p:sp>
-        <p:nvSpPr>
-          <p:cNvPr id="97" name="" descr="{&quot;isTemplate&quot;:true,&quot;type&quot;:&quot;text&quot;}"/>
+          <a:p>
+            <a:pPr/>
+            <a:endParaRPr/>
+          </a:p>
+        </p:txBody>
+      </p:sp>
+      <p:sp>
+        <p:nvSpPr>
+          <p:cNvPr id="143" name="" descr="{&quot;isTemplate&quot;:true,&quot;type&quot;:&quot;text&quot;}"/>
           <p:cNvSpPr txBox="1"/>
           <p:nvPr/>
         </p:nvSpPr>
@@ -4798,7 +7401,7 @@
       </p:sp>
       <p:sp>
         <p:nvSpPr>
-          <p:cNvPr id="98" name="" descr="{&quot;isTemplate&quot;:true,&quot;type&quot;:&quot;text&quot;}"/>
+          <p:cNvPr id="144" name="" descr="{&quot;isTemplate&quot;:true,&quot;type&quot;:&quot;text&quot;}"/>
           <p:cNvSpPr txBox="1"/>
           <p:nvPr/>
         </p:nvSpPr>
@@ -4833,7 +7436,7 @@
       </p:sp>
       <p:sp>
         <p:nvSpPr>
-          <p:cNvPr id="99" name="" descr="{&quot;isTemplate&quot;:true,&quot;type&quot;:&quot;text&quot;}"/>
+          <p:cNvPr id="145" name="" descr="{&quot;isTemplate&quot;:true,&quot;type&quot;:&quot;text&quot;}"/>
           <p:cNvSpPr txBox="1"/>
           <p:nvPr/>
         </p:nvSpPr>
@@ -4878,7 +7481,7 @@
       </p:sp>
       <p:sp>
         <p:nvSpPr>
-          <p:cNvPr id="100" name="" descr="{&quot;isTemplate&quot;:true,&quot;type&quot;:&quot;text&quot;}"/>
+          <p:cNvPr id="146" name="" descr="{&quot;isTemplate&quot;:true,&quot;type&quot;:&quot;text&quot;}"/>
           <p:cNvSpPr txBox="1"/>
           <p:nvPr/>
         </p:nvSpPr>
@@ -4913,7 +7516,7 @@
       </p:sp>
       <p:sp>
         <p:nvSpPr>
-          <p:cNvPr id="101" name=""/>
+          <p:cNvPr id="147" name=""/>
           <p:cNvSpPr/>
           <p:nvPr/>
         </p:nvSpPr>
@@ -4971,12 +7574,15 @@
         </p:spPr>
         <p:txBody>
           <a:bodyPr/>
-          <a:p/>
-        </p:txBody>
-      </p:sp>
-      <p:sp>
-        <p:nvSpPr>
-          <p:cNvPr id="102" name="" descr="{&quot;isTemplate&quot;:true,&quot;type&quot;:&quot;text&quot;}"/>
+          <a:p>
+            <a:pPr/>
+            <a:endParaRPr/>
+          </a:p>
+        </p:txBody>
+      </p:sp>
+      <p:sp>
+        <p:nvSpPr>
+          <p:cNvPr id="148" name="" descr="{&quot;isTemplate&quot;:true,&quot;type&quot;:&quot;text&quot;}"/>
           <p:cNvSpPr txBox="1"/>
           <p:nvPr/>
         </p:nvSpPr>
@@ -5011,7 +7617,7 @@
       </p:sp>
       <p:sp>
         <p:nvSpPr>
-          <p:cNvPr id="103" name="" descr="{&quot;isTemplate&quot;:true,&quot;type&quot;:&quot;text&quot;}"/>
+          <p:cNvPr id="149" name="" descr="{&quot;isTemplate&quot;:true,&quot;type&quot;:&quot;text&quot;}"/>
           <p:cNvSpPr txBox="1"/>
           <p:nvPr/>
         </p:nvSpPr>
@@ -5046,7 +7652,7 @@
       </p:sp>
       <p:sp>
         <p:nvSpPr>
-          <p:cNvPr id="104" name="" descr="{&quot;isTemplate&quot;:true,&quot;type&quot;:&quot;text&quot;}"/>
+          <p:cNvPr id="150" name="" descr="{&quot;isTemplate&quot;:true,&quot;type&quot;:&quot;text&quot;}"/>
           <p:cNvSpPr txBox="1"/>
           <p:nvPr/>
         </p:nvSpPr>
@@ -5101,7 +7707,7 @@
       </p:sp>
       <p:sp>
         <p:nvSpPr>
-          <p:cNvPr id="105" name="" descr="{&quot;isTemplate&quot;:true,&quot;type&quot;:&quot;text&quot;}"/>
+          <p:cNvPr id="151" name="" descr="{&quot;isTemplate&quot;:true,&quot;type&quot;:&quot;text&quot;}"/>
           <p:cNvSpPr txBox="1"/>
           <p:nvPr/>
         </p:nvSpPr>
@@ -5136,7 +7742,7 @@
       </p:sp>
       <p:sp>
         <p:nvSpPr>
-          <p:cNvPr id="106" name=""/>
+          <p:cNvPr id="152" name=""/>
           <p:cNvSpPr/>
           <p:nvPr/>
         </p:nvSpPr>
@@ -5194,12 +7800,15 @@
         </p:spPr>
         <p:txBody>
           <a:bodyPr/>
-          <a:p/>
-        </p:txBody>
-      </p:sp>
-      <p:sp>
-        <p:nvSpPr>
-          <p:cNvPr id="107" name="" descr="{&quot;isTemplate&quot;:true,&quot;type&quot;:&quot;text&quot;}"/>
+          <a:p>
+            <a:pPr/>
+            <a:endParaRPr/>
+          </a:p>
+        </p:txBody>
+      </p:sp>
+      <p:sp>
+        <p:nvSpPr>
+          <p:cNvPr id="153" name="" descr="{&quot;isTemplate&quot;:true,&quot;type&quot;:&quot;text&quot;}"/>
           <p:cNvSpPr txBox="1"/>
           <p:nvPr/>
         </p:nvSpPr>
@@ -5234,7 +7843,7 @@
       </p:sp>
       <p:sp>
         <p:nvSpPr>
-          <p:cNvPr id="108" name="" descr="{&quot;isTemplate&quot;:true,&quot;type&quot;:&quot;text&quot;}"/>
+          <p:cNvPr id="154" name="" descr="{&quot;isTemplate&quot;:true,&quot;type&quot;:&quot;text&quot;}"/>
           <p:cNvSpPr txBox="1"/>
           <p:nvPr/>
         </p:nvSpPr>
@@ -5269,7 +7878,7 @@
       </p:sp>
       <p:sp>
         <p:nvSpPr>
-          <p:cNvPr id="109" name="" descr="{&quot;isTemplate&quot;:true,&quot;type&quot;:&quot;text&quot;}"/>
+          <p:cNvPr id="155" name="" descr="{&quot;isTemplate&quot;:true,&quot;type&quot;:&quot;text&quot;}"/>
           <p:cNvSpPr txBox="1"/>
           <p:nvPr/>
         </p:nvSpPr>
@@ -5304,7 +7913,7 @@
       </p:sp>
       <p:sp>
         <p:nvSpPr>
-          <p:cNvPr id="110" name="" descr="{&quot;isTemplate&quot;:true,&quot;type&quot;:&quot;text&quot;}"/>
+          <p:cNvPr id="156" name="" descr="{&quot;isTemplate&quot;:true,&quot;type&quot;:&quot;text&quot;}"/>
           <p:cNvSpPr txBox="1"/>
           <p:nvPr/>
         </p:nvSpPr>
@@ -5339,7 +7948,7 @@
       </p:sp>
       <p:sp>
         <p:nvSpPr>
-          <p:cNvPr id="111" name=""/>
+          <p:cNvPr id="157" name=""/>
           <p:cNvSpPr/>
           <p:nvPr/>
         </p:nvSpPr>
@@ -5397,12 +8006,15 @@
         </p:spPr>
         <p:txBody>
           <a:bodyPr/>
-          <a:p/>
-        </p:txBody>
-      </p:sp>
-      <p:sp>
-        <p:nvSpPr>
-          <p:cNvPr id="112" name="" descr="{&quot;isTemplate&quot;:true,&quot;type&quot;:&quot;text&quot;}"/>
+          <a:p>
+            <a:pPr/>
+            <a:endParaRPr/>
+          </a:p>
+        </p:txBody>
+      </p:sp>
+      <p:sp>
+        <p:nvSpPr>
+          <p:cNvPr id="158" name="" descr="{&quot;isTemplate&quot;:true,&quot;type&quot;:&quot;text&quot;}"/>
           <p:cNvSpPr txBox="1"/>
           <p:nvPr/>
         </p:nvSpPr>
@@ -5437,7 +8049,7 @@
       </p:sp>
       <p:sp>
         <p:nvSpPr>
-          <p:cNvPr id="113" name="" descr="{&quot;isTemplate&quot;:true,&quot;type&quot;:&quot;text&quot;}"/>
+          <p:cNvPr id="159" name="" descr="{&quot;isTemplate&quot;:true,&quot;type&quot;:&quot;text&quot;}"/>
           <p:cNvSpPr txBox="1"/>
           <p:nvPr/>
         </p:nvSpPr>
@@ -5472,7 +8084,7 @@
       </p:sp>
       <p:sp>
         <p:nvSpPr>
-          <p:cNvPr id="114" name="" descr="{&quot;isTemplate&quot;:true,&quot;type&quot;:&quot;text&quot;}"/>
+          <p:cNvPr id="160" name="" descr="{&quot;isTemplate&quot;:true,&quot;type&quot;:&quot;text&quot;}"/>
           <p:cNvSpPr txBox="1"/>
           <p:nvPr/>
         </p:nvSpPr>
@@ -5527,7 +8139,7 @@
       </p:sp>
       <p:sp>
         <p:nvSpPr>
-          <p:cNvPr id="115" name=""/>
+          <p:cNvPr id="161" name=""/>
           <p:cNvSpPr/>
           <p:nvPr/>
         </p:nvSpPr>
@@ -5553,12 +8165,15 @@
         </p:spPr>
         <p:txBody>
           <a:bodyPr/>
-          <a:p/>
-        </p:txBody>
-      </p:sp>
-      <p:sp>
-        <p:nvSpPr>
-          <p:cNvPr id="116" name="" descr="{&quot;isTemplate&quot;:true,&quot;type&quot;:&quot;text&quot;}"/>
+          <a:p>
+            <a:pPr/>
+            <a:endParaRPr/>
+          </a:p>
+        </p:txBody>
+      </p:sp>
+      <p:sp>
+        <p:nvSpPr>
+          <p:cNvPr id="162" name="" descr="{&quot;isTemplate&quot;:true,&quot;type&quot;:&quot;text&quot;}"/>
           <p:cNvSpPr txBox="1"/>
           <p:nvPr/>
         </p:nvSpPr>
@@ -5593,7 +8208,7 @@
       </p:sp>
       <p:sp>
         <p:nvSpPr>
-          <p:cNvPr id="117" name="" descr="{&quot;isTemplate&quot;:true,&quot;type&quot;:&quot;text&quot;}"/>
+          <p:cNvPr id="163" name="" descr="{&quot;isTemplate&quot;:true,&quot;type&quot;:&quot;text&quot;}"/>
           <p:cNvSpPr txBox="1"/>
           <p:nvPr/>
         </p:nvSpPr>
@@ -5710,7 +8325,7 @@
       </p:sp>
       <p:sp>
         <p:nvSpPr>
-          <p:cNvPr id="118" name=""/>
+          <p:cNvPr id="164" name=""/>
           <p:cNvSpPr/>
           <p:nvPr/>
         </p:nvSpPr>
@@ -5736,12 +8351,15 @@
         </p:spPr>
         <p:txBody>
           <a:bodyPr/>
-          <a:p/>
-        </p:txBody>
-      </p:sp>
-      <p:sp>
-        <p:nvSpPr>
-          <p:cNvPr id="119" name="" descr="{&quot;isTemplate&quot;:true,&quot;type&quot;:&quot;text&quot;}"/>
+          <a:p>
+            <a:pPr/>
+            <a:endParaRPr/>
+          </a:p>
+        </p:txBody>
+      </p:sp>
+      <p:sp>
+        <p:nvSpPr>
+          <p:cNvPr id="165" name="" descr="{&quot;isTemplate&quot;:true,&quot;type&quot;:&quot;text&quot;}"/>
           <p:cNvSpPr txBox="1"/>
           <p:nvPr/>
         </p:nvSpPr>
@@ -5776,7 +8394,7 @@
       </p:sp>
       <p:sp>
         <p:nvSpPr>
-          <p:cNvPr id="120" name="" descr="{&quot;isTemplate&quot;:true,&quot;type&quot;:&quot;text&quot;}"/>
+          <p:cNvPr id="166" name="" descr="{&quot;isTemplate&quot;:true,&quot;type&quot;:&quot;text&quot;}"/>
           <p:cNvSpPr txBox="1"/>
           <p:nvPr/>
         </p:nvSpPr>
@@ -5883,7 +8501,7 @@
       </p:sp>
       <p:sp>
         <p:nvSpPr>
-          <p:cNvPr id="121" name="" descr="{&quot;isTemplate&quot;:true,&quot;type&quot;:&quot;text&quot;}"/>
+          <p:cNvPr id="167" name="" descr="{&quot;isTemplate&quot;:true,&quot;type&quot;:&quot;text&quot;}"/>
           <p:cNvSpPr txBox="1"/>
           <p:nvPr/>
         </p:nvSpPr>
@@ -5918,7 +8536,7 @@
       </p:sp>
       <p:sp>
         <p:nvSpPr>
-          <p:cNvPr id="122" name="" descr="{&quot;isTemplate&quot;:true,&quot;type&quot;:&quot;text&quot;}"/>
+          <p:cNvPr id="168" name="" descr="{&quot;isTemplate&quot;:true,&quot;type&quot;:&quot;text&quot;}"/>
           <p:cNvSpPr txBox="1"/>
           <p:nvPr/>
         </p:nvSpPr>
@@ -5938,16 +8556,22 @@
               </a:lnSpc>
             </a:pPr>
             <a:r>
-              <a:rPr lang="en-US" sz="1050">
+              <a:rPr lang="zh-CN" sz="1050">
                 <a:solidFill>
                   <a:srgbClr val="718096"/>
                 </a:solidFill>
                 <a:latin typeface="Microsoft YaHei"/>
                 <a:ea typeface="Microsoft YaHei"/>
               </a:rPr>
-              <a:t>04 / 12</a:t>
-            </a:r>
-            <a:endParaRPr/>
+              <a:t>04 / 13</a:t>
+            </a:r>
+            <a:endParaRPr lang="en-US" sz="1050">
+              <a:solidFill>
+                <a:srgbClr val="718096"/>
+              </a:solidFill>
+              <a:latin typeface="Microsoft YaHei"/>
+              <a:ea typeface="Microsoft YaHei"/>
+            </a:endParaRPr>
           </a:p>
         </p:txBody>
       </p:sp>
@@ -5961,7 +8585,7 @@
   <p:cSld>
     <p:spTree>
       <p:nvGrpSpPr>
-        <p:cNvPr id="123" name="" descr="&lt;Slide&gt;&#10;  &lt;Box style={{ width: '1280px', height: '720px', background: '#FFFFFF', flexDirection: 'column', padding: '40px 70px' }}&gt;&#10;    &lt;Box style={{ flexDirection: 'row', alignItems: 'baseline', marginBottom: 32 }}&gt;&#10;      &lt;Text style={{ fontSize: 34, fontWeight: 'bold', color: '#1A365D' }}&gt;三层抽取技术路线&lt;/Text&gt;&#10;      &lt;Text style={{ fontSize: 18, color: '#718096', marginLeft: 14 }}&gt;半结构化字段规则优先，语义字段 LLM&lt;/Text&gt;&#10;    &lt;/Box&gt;&#10;&#10;    &lt;Box style={{ flexDirection: 'row', gap: 28, flex: 1 }}&gt;&#10;      {/* 左：三层说明 */}&#10;      &lt;Box style={{ flex: 0.9, flexDirection: 'column', gap: 20, justifyContent: 'center' }}&gt;&#10;        {[&#10;          { t: 'OCR 层', d: 'RapidOCR 本地推理，病历图片 → 文本，兼容票据/表格/印章版式', c: '#2B6CB0' },&#10;          { t: 'LLM 结构化层', d: 'DeepSeek 抽取 schema 约束 JSON，temperature=0 确定性抽取', c: '#2B6CB0' },&#10;          { t: '规则兜底层', d: '费用求和、日期、医保分类等确定性字段，规则优先、LLM 补缺', c: '#38B2AC' },&#10;        ].map((item, idx) =&gt; (&#10;          &lt;Box key={idx} style={{ flexDirection: 'row', alignItems: 'flex-start' }}&gt;&#10;            &lt;Box style={{ width: 8, height: 8, borderRadius: '50%', background: item.c, marginTop: 10, marginRight: 16 }} /&gt;&#10;            &lt;Box&gt;&#10;              &lt;Text style={{ fontSize: 22, fontWeight: 'bold', color: '#1A365D', marginBottom: 6 }}&gt;{item.t}&lt;/Text&gt;&#10;              &lt;Text style={{ fontSize: 18, color: '#4A5568', lineHeight: 1.6 }}&gt;{item.d}&lt;/Text&gt;&#10;            &lt;/Box&gt;&#10;          &lt;/Box&gt;&#10;        ))}&#10;      &lt;/Box&gt;&#10;&#10;      {/* 右：架构决策 */}&#10;      &lt;Box style={{ flex: 1.1, borderRadius: 16, background: 'linear-gradient(135deg, #1A365D 0%, #2B6CB0 100%)', padding: 36, flexDirection: 'column', justifyContent: 'center' }}&gt;&#10;        &lt;Text style={{ fontSize: 22, fontWeight: 'bold', color: '#7FD1CD', marginBottom: 20 }}&gt;实测驱动的架构决策&lt;/Text&gt;&#10;        &lt;Text style={{ fontSize: 20, color: '#FFFFFF', lineHeight: 1.7, marginBottom: 24 }}&gt;&#10;          费用清单是逐行明细、无总额行，LLM 无法对 262 行明细求和——这是从 70 案实测中得出的结论。&#10;        &lt;/Text&gt;&#10;        &lt;Box style={{ padding: '16px 20px', borderRadius: 10, background: 'rgba(255,255,255,0.1)' }}&gt;&#10;          &lt;Text style={{ fontSize: 20, color: '#FFFFFF', fontWeight: 'bold' }}&gt;→ 半结构化字段用规则，语义字段用 LLM&lt;/Text&gt;&#10;        &lt;/Box&gt;&#10;      &lt;/Box&gt;&#10;    &lt;/Box&gt;&#10;&#10;    &lt;Box style={{ flexDirection: 'row', alignItems: 'center', marginTop: 24 }}&gt;&#10;      &lt;Text style={{ fontSize: 14, color: '#718096' }}&gt;医护洞察与温度指引引擎&lt;/Text&gt;&#10;      &lt;Text style={{ fontSize: 14, color: '#718096', marginLeft: 'auto' }}&gt;05 / 12&lt;/Text&gt;&#10;    &lt;/Box&gt;&#10;  &lt;/Box&gt;&#10;&lt;/Slide&gt;&#10;"/>
+        <p:cNvPr id="169" name=""/>
         <p:cNvGrpSpPr/>
         <p:nvPr/>
       </p:nvGrpSpPr>
@@ -5975,7 +8599,7 @@
       </p:grpSpPr>
       <p:sp>
         <p:nvSpPr>
-          <p:cNvPr id="124" name=""/>
+          <p:cNvPr id="170" name=""/>
           <p:cNvSpPr/>
           <p:nvPr/>
         </p:nvSpPr>
@@ -5994,12 +8618,15 @@
         </p:spPr>
         <p:txBody>
           <a:bodyPr/>
-          <a:p/>
-        </p:txBody>
-      </p:sp>
-      <p:sp>
-        <p:nvSpPr>
-          <p:cNvPr id="125" name="" descr="{&quot;isTemplate&quot;:true,&quot;type&quot;:&quot;text&quot;}"/>
+          <a:p>
+            <a:pPr/>
+            <a:endParaRPr/>
+          </a:p>
+        </p:txBody>
+      </p:sp>
+      <p:sp>
+        <p:nvSpPr>
+          <p:cNvPr id="171" name="" descr="{&quot;isTemplate&quot;:true,&quot;type&quot;:&quot;text&quot;}"/>
           <p:cNvSpPr txBox="1"/>
           <p:nvPr/>
         </p:nvSpPr>
@@ -6034,7 +8661,7 @@
       </p:sp>
       <p:sp>
         <p:nvSpPr>
-          <p:cNvPr id="126" name="" descr="{&quot;isTemplate&quot;:true,&quot;type&quot;:&quot;text&quot;}"/>
+          <p:cNvPr id="172" name="" descr="{&quot;isTemplate&quot;:true,&quot;type&quot;:&quot;text&quot;}"/>
           <p:cNvSpPr txBox="1"/>
           <p:nvPr/>
         </p:nvSpPr>
@@ -6079,7 +8706,7 @@
       </p:sp>
       <p:sp>
         <p:nvSpPr>
-          <p:cNvPr id="127" name=""/>
+          <p:cNvPr id="173" name=""/>
           <p:cNvSpPr/>
           <p:nvPr/>
         </p:nvSpPr>
@@ -6137,12 +8764,15 @@
         </p:spPr>
         <p:txBody>
           <a:bodyPr/>
-          <a:p/>
-        </p:txBody>
-      </p:sp>
-      <p:sp>
-        <p:nvSpPr>
-          <p:cNvPr id="128" name="" descr="{&quot;isTemplate&quot;:true,&quot;type&quot;:&quot;text&quot;}"/>
+          <a:p>
+            <a:pPr/>
+            <a:endParaRPr/>
+          </a:p>
+        </p:txBody>
+      </p:sp>
+      <p:sp>
+        <p:nvSpPr>
+          <p:cNvPr id="174" name="" descr="{&quot;isTemplate&quot;:true,&quot;type&quot;:&quot;text&quot;}"/>
           <p:cNvSpPr txBox="1"/>
           <p:nvPr/>
         </p:nvSpPr>
@@ -6187,7 +8817,7 @@
       </p:sp>
       <p:sp>
         <p:nvSpPr>
-          <p:cNvPr id="129" name="" descr="{&quot;isTemplate&quot;:true,&quot;type&quot;:&quot;text&quot;}"/>
+          <p:cNvPr id="175" name="" descr="{&quot;isTemplate&quot;:true,&quot;type&quot;:&quot;text&quot;}"/>
           <p:cNvSpPr txBox="1"/>
           <p:nvPr/>
         </p:nvSpPr>
@@ -6294,7 +8924,7 @@
       </p:sp>
       <p:sp>
         <p:nvSpPr>
-          <p:cNvPr id="130" name=""/>
+          <p:cNvPr id="176" name=""/>
           <p:cNvSpPr/>
           <p:nvPr/>
         </p:nvSpPr>
@@ -6352,12 +8982,15 @@
         </p:spPr>
         <p:txBody>
           <a:bodyPr/>
-          <a:p/>
-        </p:txBody>
-      </p:sp>
-      <p:sp>
-        <p:nvSpPr>
-          <p:cNvPr id="131" name="" descr="{&quot;isTemplate&quot;:true,&quot;type&quot;:&quot;text&quot;}"/>
+          <a:p>
+            <a:pPr/>
+            <a:endParaRPr/>
+          </a:p>
+        </p:txBody>
+      </p:sp>
+      <p:sp>
+        <p:nvSpPr>
+          <p:cNvPr id="177" name="" descr="{&quot;isTemplate&quot;:true,&quot;type&quot;:&quot;text&quot;}"/>
           <p:cNvSpPr txBox="1"/>
           <p:nvPr/>
         </p:nvSpPr>
@@ -6402,7 +9035,7 @@
       </p:sp>
       <p:sp>
         <p:nvSpPr>
-          <p:cNvPr id="132" name="" descr="{&quot;isTemplate&quot;:true,&quot;type&quot;:&quot;text&quot;}"/>
+          <p:cNvPr id="178" name="" descr="{&quot;isTemplate&quot;:true,&quot;type&quot;:&quot;text&quot;}"/>
           <p:cNvSpPr txBox="1"/>
           <p:nvPr/>
         </p:nvSpPr>
@@ -6509,7 +9142,7 @@
       </p:sp>
       <p:sp>
         <p:nvSpPr>
-          <p:cNvPr id="133" name=""/>
+          <p:cNvPr id="179" name=""/>
           <p:cNvSpPr/>
           <p:nvPr/>
         </p:nvSpPr>
@@ -6567,12 +9200,15 @@
         </p:spPr>
         <p:txBody>
           <a:bodyPr/>
-          <a:p/>
-        </p:txBody>
-      </p:sp>
-      <p:sp>
-        <p:nvSpPr>
-          <p:cNvPr id="134" name="" descr="{&quot;isTemplate&quot;:true,&quot;type&quot;:&quot;text&quot;}"/>
+          <a:p>
+            <a:pPr/>
+            <a:endParaRPr/>
+          </a:p>
+        </p:txBody>
+      </p:sp>
+      <p:sp>
+        <p:nvSpPr>
+          <p:cNvPr id="180" name="" descr="{&quot;isTemplate&quot;:true,&quot;type&quot;:&quot;text&quot;}"/>
           <p:cNvSpPr txBox="1"/>
           <p:nvPr/>
         </p:nvSpPr>
@@ -6607,7 +9243,7 @@
       </p:sp>
       <p:sp>
         <p:nvSpPr>
-          <p:cNvPr id="135" name="" descr="{&quot;isTemplate&quot;:true,&quot;type&quot;:&quot;text&quot;}"/>
+          <p:cNvPr id="181" name="" descr="{&quot;isTemplate&quot;:true,&quot;type&quot;:&quot;text&quot;}"/>
           <p:cNvSpPr txBox="1"/>
           <p:nvPr/>
         </p:nvSpPr>
@@ -6664,7 +9300,7 @@
       </p:sp>
       <p:sp>
         <p:nvSpPr>
-          <p:cNvPr id="136" name=""/>
+          <p:cNvPr id="182" name=""/>
           <p:cNvSpPr/>
           <p:nvPr/>
         </p:nvSpPr>
@@ -6693,12 +9329,15 @@
         </p:spPr>
         <p:txBody>
           <a:bodyPr/>
-          <a:p/>
-        </p:txBody>
-      </p:sp>
-      <p:sp>
-        <p:nvSpPr>
-          <p:cNvPr id="137" name="" descr="{&quot;isTemplate&quot;:true,&quot;type&quot;:&quot;text&quot;}"/>
+          <a:p>
+            <a:pPr/>
+            <a:endParaRPr/>
+          </a:p>
+        </p:txBody>
+      </p:sp>
+      <p:sp>
+        <p:nvSpPr>
+          <p:cNvPr id="183" name="" descr="{&quot;isTemplate&quot;:true,&quot;type&quot;:&quot;text&quot;}"/>
           <p:cNvSpPr txBox="1"/>
           <p:nvPr/>
         </p:nvSpPr>
@@ -6733,7 +9372,7 @@
       </p:sp>
       <p:sp>
         <p:nvSpPr>
-          <p:cNvPr id="138" name="" descr="{&quot;isTemplate&quot;:true,&quot;type&quot;:&quot;text&quot;}"/>
+          <p:cNvPr id="184" name="" descr="{&quot;isTemplate&quot;:true,&quot;type&quot;:&quot;text&quot;}"/>
           <p:cNvSpPr txBox="1"/>
           <p:nvPr/>
         </p:nvSpPr>
@@ -6830,7 +9469,7 @@
       </p:sp>
       <p:sp>
         <p:nvSpPr>
-          <p:cNvPr id="139" name=""/>
+          <p:cNvPr id="185" name=""/>
           <p:cNvSpPr/>
           <p:nvPr/>
         </p:nvSpPr>
@@ -6853,12 +9492,15 @@
         </p:spPr>
         <p:txBody>
           <a:bodyPr/>
-          <a:p/>
-        </p:txBody>
-      </p:sp>
-      <p:sp>
-        <p:nvSpPr>
-          <p:cNvPr id="140" name="" descr="{&quot;isTemplate&quot;:true,&quot;type&quot;:&quot;text&quot;}"/>
+          <a:p>
+            <a:pPr/>
+            <a:endParaRPr/>
+          </a:p>
+        </p:txBody>
+      </p:sp>
+      <p:sp>
+        <p:nvSpPr>
+          <p:cNvPr id="186" name="" descr="{&quot;isTemplate&quot;:true,&quot;type&quot;:&quot;text&quot;}"/>
           <p:cNvSpPr txBox="1"/>
           <p:nvPr/>
         </p:nvSpPr>
@@ -6913,7 +9555,7 @@
       </p:sp>
       <p:sp>
         <p:nvSpPr>
-          <p:cNvPr id="141" name="" descr="{&quot;isTemplate&quot;:true,&quot;type&quot;:&quot;text&quot;}"/>
+          <p:cNvPr id="187" name="" descr="{&quot;isTemplate&quot;:true,&quot;type&quot;:&quot;text&quot;}"/>
           <p:cNvSpPr txBox="1"/>
           <p:nvPr/>
         </p:nvSpPr>
@@ -6948,7 +9590,7 @@
       </p:sp>
       <p:sp>
         <p:nvSpPr>
-          <p:cNvPr id="142" name="" descr="{&quot;isTemplate&quot;:true,&quot;type&quot;:&quot;text&quot;}"/>
+          <p:cNvPr id="188" name="" descr="{&quot;isTemplate&quot;:true,&quot;type&quot;:&quot;text&quot;}"/>
           <p:cNvSpPr txBox="1"/>
           <p:nvPr/>
         </p:nvSpPr>
@@ -6968,16 +9610,22 @@
               </a:lnSpc>
             </a:pPr>
             <a:r>
-              <a:rPr lang="en-US" sz="1050">
+              <a:rPr lang="zh-CN" sz="1050">
                 <a:solidFill>
                   <a:srgbClr val="718096"/>
                 </a:solidFill>
                 <a:latin typeface="Microsoft YaHei"/>
                 <a:ea typeface="Microsoft YaHei"/>
               </a:rPr>
-              <a:t>05 / 12</a:t>
-            </a:r>
-            <a:endParaRPr/>
+              <a:t>05 / 13</a:t>
+            </a:r>
+            <a:endParaRPr lang="en-US" sz="1050">
+              <a:solidFill>
+                <a:srgbClr val="718096"/>
+              </a:solidFill>
+              <a:latin typeface="Microsoft YaHei"/>
+              <a:ea typeface="Microsoft YaHei"/>
+            </a:endParaRPr>
           </a:p>
         </p:txBody>
       </p:sp>
@@ -6991,7 +9639,7 @@
   <p:cSld>
     <p:spTree>
       <p:nvGrpSpPr>
-        <p:cNvPr id="143" name="" descr="&lt;Slide&gt;&#10;  &lt;Box style={{ width: '1280px', height: '720px', position: 'relative', background: 'linear-gradient(135deg, #2B6CB0 0%, #38B2AC 100%)', flexDirection: 'column', justifyContent: 'center', alignItems: 'center' }}&gt;&#10;    &lt;Box style={{ position: 'absolute', top: 80, right: 100, width: 320, height: 320, borderRadius: '50%', background: 'rgba(255,255,255,0.1)' }} /&gt;&#10;    &lt;Box style={{ position: 'absolute', bottom: 60, left: 80, width: 260, height: 260, borderRadius: '50%', background: 'rgba(255,255,255,0.08)' }} /&gt;&#10;    &lt;Text style={{ fontSize: 24, color: 'rgba(255,255,255,0.85)', letterSpacing: 6, marginBottom: 24 }}&gt;CHAPTER 02&lt;/Text&gt;&#10;    &lt;Text style={{ fontSize: 60, fontWeight: 'bold', color: '#FFFFFF', marginBottom: 20 }}&gt;效果验证&lt;/Text&gt;&#10;    &lt;Text style={{ fontSize: 22, color: 'rgba(255,255,255,0.9)' }}&gt;官方 70 案实测 · 硬指标说话&lt;/Text&gt;&#10;  &lt;/Box&gt;&#10;&lt;/Slide&gt;&#10;"/>
+        <p:cNvPr id="189" name=""/>
         <p:cNvGrpSpPr/>
         <p:nvPr/>
       </p:nvGrpSpPr>
@@ -7005,7 +9653,7 @@
       </p:grpSpPr>
       <p:sp>
         <p:nvSpPr>
-          <p:cNvPr id="144" name=""/>
+          <p:cNvPr id="190" name=""/>
           <p:cNvSpPr/>
           <p:nvPr/>
         </p:nvSpPr>
@@ -7032,12 +9680,15 @@
         </p:spPr>
         <p:txBody>
           <a:bodyPr/>
-          <a:p/>
-        </p:txBody>
-      </p:sp>
-      <p:sp>
-        <p:nvSpPr>
-          <p:cNvPr id="145" name="" descr="{&quot;isTemplate&quot;:true,&quot;type&quot;:&quot;text&quot;}"/>
+          <a:p>
+            <a:pPr/>
+            <a:endParaRPr/>
+          </a:p>
+        </p:txBody>
+      </p:sp>
+      <p:sp>
+        <p:nvSpPr>
+          <p:cNvPr id="191" name="" descr="{&quot;isTemplate&quot;:true,&quot;type&quot;:&quot;text&quot;}"/>
           <p:cNvSpPr txBox="1"/>
           <p:nvPr/>
         </p:nvSpPr>
@@ -7074,7 +9725,7 @@
       </p:sp>
       <p:sp>
         <p:nvSpPr>
-          <p:cNvPr id="146" name="" descr="{&quot;isTemplate&quot;:true,&quot;type&quot;:&quot;text&quot;}"/>
+          <p:cNvPr id="192" name="" descr="{&quot;isTemplate&quot;:true,&quot;type&quot;:&quot;text&quot;}"/>
           <p:cNvSpPr txBox="1"/>
           <p:nvPr/>
         </p:nvSpPr>
@@ -7109,7 +9760,7 @@
       </p:sp>
       <p:sp>
         <p:nvSpPr>
-          <p:cNvPr id="147" name="" descr="{&quot;isTemplate&quot;:true,&quot;type&quot;:&quot;text&quot;}"/>
+          <p:cNvPr id="193" name="" descr="{&quot;isTemplate&quot;:true,&quot;type&quot;:&quot;text&quot;}"/>
           <p:cNvSpPr txBox="1"/>
           <p:nvPr/>
         </p:nvSpPr>
@@ -7194,7 +9845,7 @@
       </p:sp>
       <p:sp>
         <p:nvSpPr>
-          <p:cNvPr id="148" name=""/>
+          <p:cNvPr id="194" name=""/>
           <p:cNvSpPr/>
           <p:nvPr/>
         </p:nvSpPr>
@@ -7254,12 +9905,15 @@
         </p:spPr>
         <p:txBody>
           <a:bodyPr/>
-          <a:p/>
-        </p:txBody>
-      </p:sp>
-      <p:sp>
-        <p:nvSpPr>
-          <p:cNvPr id="149" name=""/>
+          <a:p>
+            <a:pPr/>
+            <a:endParaRPr/>
+          </a:p>
+        </p:txBody>
+      </p:sp>
+      <p:sp>
+        <p:nvSpPr>
+          <p:cNvPr id="195" name=""/>
           <p:cNvSpPr/>
           <p:nvPr/>
         </p:nvSpPr>
@@ -7319,7 +9973,10 @@
         </p:spPr>
         <p:txBody>
           <a:bodyPr/>
-          <a:p/>
+          <a:p>
+            <a:pPr/>
+            <a:endParaRPr/>
+          </a:p>
         </p:txBody>
       </p:sp>
     </p:spTree>
@@ -7332,7 +9989,7 @@
   <p:cSld>
     <p:spTree>
       <p:nvGrpSpPr>
-        <p:cNvPr id="150" name="" descr="&lt;Slide&gt;&#10;  &lt;Box style={{ width: '1280px', height: '720px', background: '#F7FAFC', flexDirection: 'column', padding: '40px 70px' }}&gt;&#10;    &lt;Box style={{ flexDirection: 'row', alignItems: 'baseline', marginBottom: 36 }}&gt;&#10;      &lt;Text style={{ fontSize: 34, fontWeight: 'bold', color: '#1A365D' }}&gt;KR1 结构化硬指标&lt;/Text&gt;&#10;      &lt;Text style={{ fontSize: 18, color: '#718096', marginLeft: 14 }}&gt;官方 70 案 · 两项硬指标达标&lt;/Text&gt;&#10;    &lt;/Box&gt;&#10;&#10;    &lt;Box style={{ flexDirection: 'row', gap: 32, flex: 1 }}&gt;&#10;      {[&#10;        { val: '0.933', label: '标量字段准确率', sub: '目标 ≥ 0.90 · 达标', color: '#2B6CB0', ok: true },&#10;        { val: '1.09%', label: '关键字段缺失率', sub: '目标 &lt; 5% · 达标', color: '#38B2AC', ok: true },&#10;        { val: '0.849', label: '核心字段宏观 F1', sub: '目标 ≥ 0.90 · 差 0.05', color: '#1A365D', ok: false },&#10;      ].map((m, idx) =&gt; (&#10;        &lt;Box key={idx} style={{ flex: 1, borderRadius: 16, background: '#FFFFFF', padding: 36, flexDirection: 'column', justifyContent: 'center', alignItems: 'center', boxShadow: '0 4px 20px rgba(0,0,0,0.06)' }}&gt;&#10;          &lt;Text style={{ fontSize: 72, fontWeight: 'bold', color: m.color, lineHeight: 1 }}&gt;{m.val}&lt;/Text&gt;&#10;          &lt;Text style={{ fontSize: 22, fontWeight: 'bold', color: '#1A365D', marginTop: 20 }}&gt;{m.label}&lt;/Text&gt;&#10;          &lt;Box style={{ marginTop: 14, padding: '8px 16px', borderRadius: 20, background: m.ok ? '#E6FFFA' : '#FFF5F5', border: m.ok ? '1px solid #B2F5EA' : '1px solid #FED7D7' }}&gt;&#10;            &lt;Text style={{ fontSize: 16, color: m.ok ? '#2C7A7B' : '#C53030' }}&gt;{m.sub}&lt;/Text&gt;&#10;          &lt;/Box&gt;&#10;        &lt;/Box&gt;&#10;      ))}&#10;    &lt;/Box&gt;&#10;&#10;    &lt;Box style={{ marginTop: 32, padding: '20px 28px', borderRadius: 12, background: '#EBF8FF', border: '1px solid #BEE3F8' }}&gt;&#10;      &lt;Text style={{ fontSize: 18, color: '#2C5282', lineHeight: 1.6 }}&gt;&#10;        剩余 0.05 差距是真实的命名颗粒度问题（LLM 术式全称 vs 收费简称），已在 prompt 层优化（0.812 → 0.849），继续调参收益递减。&#10;      &lt;/Text&gt;&#10;    &lt;/Box&gt;&#10;&#10;    &lt;Box style={{ flexDirection: 'row', alignItems: 'center', marginTop: 20 }}&gt;&#10;      &lt;Text style={{ fontSize: 14, color: '#718096' }}&gt;医护洞察与温度指引引擎&lt;/Text&gt;&#10;      &lt;Text style={{ fontSize: 14, color: '#718096', marginLeft: 'auto' }}&gt;07 / 12&lt;/Text&gt;&#10;    &lt;/Box&gt;&#10;  &lt;/Box&gt;&#10;&lt;/Slide&gt;&#10;"/>
+        <p:cNvPr id="196" name=""/>
         <p:cNvGrpSpPr/>
         <p:nvPr/>
       </p:nvGrpSpPr>
@@ -7346,7 +10003,7 @@
       </p:grpSpPr>
       <p:sp>
         <p:nvSpPr>
-          <p:cNvPr id="151" name=""/>
+          <p:cNvPr id="197" name=""/>
           <p:cNvSpPr/>
           <p:nvPr/>
         </p:nvSpPr>
@@ -7365,12 +10022,15 @@
         </p:spPr>
         <p:txBody>
           <a:bodyPr/>
-          <a:p/>
-        </p:txBody>
-      </p:sp>
-      <p:sp>
-        <p:nvSpPr>
-          <p:cNvPr id="152" name="" descr="{&quot;isTemplate&quot;:true,&quot;type&quot;:&quot;text&quot;}"/>
+          <a:p>
+            <a:pPr/>
+            <a:endParaRPr/>
+          </a:p>
+        </p:txBody>
+      </p:sp>
+      <p:sp>
+        <p:nvSpPr>
+          <p:cNvPr id="198" name="" descr="{&quot;isTemplate&quot;:true,&quot;type&quot;:&quot;text&quot;}"/>
           <p:cNvSpPr txBox="1"/>
           <p:nvPr/>
         </p:nvSpPr>
@@ -7415,7 +10075,7 @@
       </p:sp>
       <p:sp>
         <p:nvSpPr>
-          <p:cNvPr id="153" name="" descr="{&quot;isTemplate&quot;:true,&quot;type&quot;:&quot;text&quot;}"/>
+          <p:cNvPr id="199" name="" descr="{&quot;isTemplate&quot;:true,&quot;type&quot;:&quot;text&quot;}"/>
           <p:cNvSpPr txBox="1"/>
           <p:nvPr/>
         </p:nvSpPr>
@@ -7490,7 +10150,7 @@
       </p:sp>
       <p:sp>
         <p:nvSpPr>
-          <p:cNvPr id="154" name=""/>
+          <p:cNvPr id="200" name=""/>
           <p:cNvSpPr/>
           <p:nvPr/>
         </p:nvSpPr>
@@ -7518,12 +10178,15 @@
         </p:spPr>
         <p:txBody>
           <a:bodyPr/>
-          <a:p/>
-        </p:txBody>
-      </p:sp>
-      <p:sp>
-        <p:nvSpPr>
-          <p:cNvPr id="155" name="" descr="{&quot;isTemplate&quot;:true,&quot;type&quot;:&quot;text&quot;}"/>
+          <a:p>
+            <a:pPr/>
+            <a:endParaRPr/>
+          </a:p>
+        </p:txBody>
+      </p:sp>
+      <p:sp>
+        <p:nvSpPr>
+          <p:cNvPr id="201" name="" descr="{&quot;isTemplate&quot;:true,&quot;type&quot;:&quot;text&quot;}"/>
           <p:cNvSpPr txBox="1"/>
           <p:nvPr/>
         </p:nvSpPr>
@@ -7558,7 +10221,7 @@
       </p:sp>
       <p:sp>
         <p:nvSpPr>
-          <p:cNvPr id="156" name="" descr="{&quot;isTemplate&quot;:true,&quot;type&quot;:&quot;text&quot;}"/>
+          <p:cNvPr id="202" name="" descr="{&quot;isTemplate&quot;:true,&quot;type&quot;:&quot;text&quot;}"/>
           <p:cNvSpPr txBox="1"/>
           <p:nvPr/>
         </p:nvSpPr>
@@ -7593,7 +10256,7 @@
       </p:sp>
       <p:sp>
         <p:nvSpPr>
-          <p:cNvPr id="157" name=""/>
+          <p:cNvPr id="203" name=""/>
           <p:cNvSpPr/>
           <p:nvPr/>
         </p:nvSpPr>
@@ -7619,12 +10282,15 @@
         </p:spPr>
         <p:txBody>
           <a:bodyPr/>
-          <a:p/>
-        </p:txBody>
-      </p:sp>
-      <p:sp>
-        <p:nvSpPr>
-          <p:cNvPr id="158" name="" descr="{&quot;isTemplate&quot;:true,&quot;type&quot;:&quot;text&quot;}"/>
+          <a:p>
+            <a:pPr/>
+            <a:endParaRPr/>
+          </a:p>
+        </p:txBody>
+      </p:sp>
+      <p:sp>
+        <p:nvSpPr>
+          <p:cNvPr id="204" name="" descr="{&quot;isTemplate&quot;:true,&quot;type&quot;:&quot;text&quot;}"/>
           <p:cNvSpPr txBox="1"/>
           <p:nvPr/>
         </p:nvSpPr>
@@ -7679,7 +10345,7 @@
       </p:sp>
       <p:sp>
         <p:nvSpPr>
-          <p:cNvPr id="159" name=""/>
+          <p:cNvPr id="205" name=""/>
           <p:cNvSpPr/>
           <p:nvPr/>
         </p:nvSpPr>
@@ -7707,12 +10373,15 @@
         </p:spPr>
         <p:txBody>
           <a:bodyPr/>
-          <a:p/>
-        </p:txBody>
-      </p:sp>
-      <p:sp>
-        <p:nvSpPr>
-          <p:cNvPr id="160" name="" descr="{&quot;isTemplate&quot;:true,&quot;type&quot;:&quot;text&quot;}"/>
+          <a:p>
+            <a:pPr/>
+            <a:endParaRPr/>
+          </a:p>
+        </p:txBody>
+      </p:sp>
+      <p:sp>
+        <p:nvSpPr>
+          <p:cNvPr id="206" name="" descr="{&quot;isTemplate&quot;:true,&quot;type&quot;:&quot;text&quot;}"/>
           <p:cNvSpPr txBox="1"/>
           <p:nvPr/>
         </p:nvSpPr>
@@ -7747,7 +10416,7 @@
       </p:sp>
       <p:sp>
         <p:nvSpPr>
-          <p:cNvPr id="161" name="" descr="{&quot;isTemplate&quot;:true,&quot;type&quot;:&quot;text&quot;}"/>
+          <p:cNvPr id="207" name="" descr="{&quot;isTemplate&quot;:true,&quot;type&quot;:&quot;text&quot;}"/>
           <p:cNvSpPr txBox="1"/>
           <p:nvPr/>
         </p:nvSpPr>
@@ -7782,7 +10451,7 @@
       </p:sp>
       <p:sp>
         <p:nvSpPr>
-          <p:cNvPr id="162" name=""/>
+          <p:cNvPr id="208" name=""/>
           <p:cNvSpPr/>
           <p:nvPr/>
         </p:nvSpPr>
@@ -7808,12 +10477,15 @@
         </p:spPr>
         <p:txBody>
           <a:bodyPr/>
-          <a:p/>
-        </p:txBody>
-      </p:sp>
-      <p:sp>
-        <p:nvSpPr>
-          <p:cNvPr id="163" name="" descr="{&quot;isTemplate&quot;:true,&quot;type&quot;:&quot;text&quot;}"/>
+          <a:p>
+            <a:pPr/>
+            <a:endParaRPr/>
+          </a:p>
+        </p:txBody>
+      </p:sp>
+      <p:sp>
+        <p:nvSpPr>
+          <p:cNvPr id="209" name="" descr="{&quot;isTemplate&quot;:true,&quot;type&quot;:&quot;text&quot;}"/>
           <p:cNvSpPr txBox="1"/>
           <p:nvPr/>
         </p:nvSpPr>
@@ -7868,7 +10540,7 @@
       </p:sp>
       <p:sp>
         <p:nvSpPr>
-          <p:cNvPr id="164" name=""/>
+          <p:cNvPr id="210" name=""/>
           <p:cNvSpPr/>
           <p:nvPr/>
         </p:nvSpPr>
@@ -7896,12 +10568,15 @@
         </p:spPr>
         <p:txBody>
           <a:bodyPr/>
-          <a:p/>
-        </p:txBody>
-      </p:sp>
-      <p:sp>
-        <p:nvSpPr>
-          <p:cNvPr id="165" name="" descr="{&quot;isTemplate&quot;:true,&quot;type&quot;:&quot;text&quot;}"/>
+          <a:p>
+            <a:pPr/>
+            <a:endParaRPr/>
+          </a:p>
+        </p:txBody>
+      </p:sp>
+      <p:sp>
+        <p:nvSpPr>
+          <p:cNvPr id="211" name="" descr="{&quot;isTemplate&quot;:true,&quot;type&quot;:&quot;text&quot;}"/>
           <p:cNvSpPr txBox="1"/>
           <p:nvPr/>
         </p:nvSpPr>
@@ -7936,7 +10611,7 @@
       </p:sp>
       <p:sp>
         <p:nvSpPr>
-          <p:cNvPr id="166" name="" descr="{&quot;isTemplate&quot;:true,&quot;type&quot;:&quot;text&quot;}"/>
+          <p:cNvPr id="212" name="" descr="{&quot;isTemplate&quot;:true,&quot;type&quot;:&quot;text&quot;}"/>
           <p:cNvSpPr txBox="1"/>
           <p:nvPr/>
         </p:nvSpPr>
@@ -7981,7 +10656,7 @@
       </p:sp>
       <p:sp>
         <p:nvSpPr>
-          <p:cNvPr id="167" name=""/>
+          <p:cNvPr id="213" name=""/>
           <p:cNvSpPr/>
           <p:nvPr/>
         </p:nvSpPr>
@@ -8007,12 +10682,15 @@
         </p:spPr>
         <p:txBody>
           <a:bodyPr/>
-          <a:p/>
-        </p:txBody>
-      </p:sp>
-      <p:sp>
-        <p:nvSpPr>
-          <p:cNvPr id="168" name="" descr="{&quot;isTemplate&quot;:true,&quot;type&quot;:&quot;text&quot;}"/>
+          <a:p>
+            <a:pPr/>
+            <a:endParaRPr/>
+          </a:p>
+        </p:txBody>
+      </p:sp>
+      <p:sp>
+        <p:nvSpPr>
+          <p:cNvPr id="214" name="" descr="{&quot;isTemplate&quot;:true,&quot;type&quot;:&quot;text&quot;}"/>
           <p:cNvSpPr txBox="1"/>
           <p:nvPr/>
         </p:nvSpPr>
@@ -8077,7 +10755,7 @@
       </p:sp>
       <p:sp>
         <p:nvSpPr>
-          <p:cNvPr id="169" name=""/>
+          <p:cNvPr id="215" name=""/>
           <p:cNvSpPr/>
           <p:nvPr/>
         </p:nvSpPr>
@@ -8103,12 +10781,15 @@
         </p:spPr>
         <p:txBody>
           <a:bodyPr/>
-          <a:p/>
-        </p:txBody>
-      </p:sp>
-      <p:sp>
-        <p:nvSpPr>
-          <p:cNvPr id="170" name="" descr="{&quot;isTemplate&quot;:true,&quot;type&quot;:&quot;text&quot;}"/>
+          <a:p>
+            <a:pPr/>
+            <a:endParaRPr/>
+          </a:p>
+        </p:txBody>
+      </p:sp>
+      <p:sp>
+        <p:nvSpPr>
+          <p:cNvPr id="216" name="" descr="{&quot;isTemplate&quot;:true,&quot;type&quot;:&quot;text&quot;}"/>
           <p:cNvSpPr txBox="1"/>
           <p:nvPr/>
         </p:nvSpPr>
@@ -8245,7 +10926,7 @@
       </p:sp>
       <p:sp>
         <p:nvSpPr>
-          <p:cNvPr id="171" name="" descr="{&quot;isTemplate&quot;:true,&quot;type&quot;:&quot;text&quot;}"/>
+          <p:cNvPr id="217" name="" descr="{&quot;isTemplate&quot;:true,&quot;type&quot;:&quot;text&quot;}"/>
           <p:cNvSpPr txBox="1"/>
           <p:nvPr/>
         </p:nvSpPr>
@@ -8280,7 +10961,7 @@
       </p:sp>
       <p:sp>
         <p:nvSpPr>
-          <p:cNvPr id="172" name="" descr="{&quot;isTemplate&quot;:true,&quot;type&quot;:&quot;text&quot;}"/>
+          <p:cNvPr id="218" name="" descr="{&quot;isTemplate&quot;:true,&quot;type&quot;:&quot;text&quot;}"/>
           <p:cNvSpPr txBox="1"/>
           <p:nvPr/>
         </p:nvSpPr>
@@ -8300,16 +10981,22 @@
               </a:lnSpc>
             </a:pPr>
             <a:r>
-              <a:rPr lang="en-US" sz="1050">
+              <a:rPr lang="zh-CN" sz="1050">
                 <a:solidFill>
                   <a:srgbClr val="718096"/>
                 </a:solidFill>
                 <a:latin typeface="Microsoft YaHei"/>
                 <a:ea typeface="Microsoft YaHei"/>
               </a:rPr>
-              <a:t>07 / 12</a:t>
-            </a:r>
-            <a:endParaRPr/>
+              <a:t>07 / 13</a:t>
+            </a:r>
+            <a:endParaRPr lang="en-US" sz="1050">
+              <a:solidFill>
+                <a:srgbClr val="718096"/>
+              </a:solidFill>
+              <a:latin typeface="Microsoft YaHei"/>
+              <a:ea typeface="Microsoft YaHei"/>
+            </a:endParaRPr>
           </a:p>
         </p:txBody>
       </p:sp>
@@ -8323,7 +11010,7 @@
   <p:cSld>
     <p:spTree>
       <p:nvGrpSpPr>
-        <p:cNvPr id="173" name="" descr="&lt;Slide&gt;&#10;  &lt;Box style={{ width: '1280px', height: '720px', background: '#FFFFFF', flexDirection: 'column', padding: '40px 70px' }}&gt;&#10;    &lt;Box style={{ flexDirection: 'row', alignItems: 'baseline', marginBottom: 32 }}&gt;&#10;      &lt;Text style={{ fontSize: 34, fontWeight: 'bold', color: '#1A365D' }}&gt;温度指引盲评&lt;/Text&gt;&#10;      &lt;Text style={{ fontSize: 18, color: '#718096', marginLeft: 14 }}&gt;3 病种 · 全部 ≥ 4/5&lt;/Text&gt;&#10;    &lt;/Box&gt;&#10;&#10;    &lt;Box style={{ flexDirection: 'row', gap: 28, flex: 1 }}&gt;&#10;      {/* 左：指引示意 */}&#10;      &lt;Box style={{ flex: 1, borderRadius: 16, background: '#EBF8FF', padding: 32, flexDirection: 'column', justifyContent: 'center', border: '1px solid #BEE3F8' }}&gt;&#10;        &lt;Text style={{ fontSize: 18, color: '#2B6CB0', fontWeight: 'bold', marginBottom: 16 }}&gt;一份真实的温度指引（节选）&lt;/Text&gt;&#10;        &lt;Text style={{ fontSize: 18, color: '#2C5282', lineHeight: 1.8, fontStyle: 'italic' }}&gt;&#10;          &quot;贾阿姨您好，这次因为右肩膀的问题住院手术，前后 4 天，您辛苦了……&quot;&#10;        &lt;/Text&gt;&#10;        &lt;Box style={{ marginTop: 20, padding: '14px 18px', borderRadius: 10, background: '#FFFFFF' }}&gt;&#10;          &lt;Text style={{ fontSize: 17, color: '#4A5568', lineHeight: 1.6 }}&gt;&#10;            锚定真实数字：住院 4 天 · 总费用 43603.13 元 · 肩袖破裂修补术 · 术后 2 周复查&#10;          &lt;/Text&gt;&#10;        &lt;/Box&gt;&#10;      &lt;/Box&gt;&#10;&#10;      {/* 右：盲评数据 */}&#10;      &lt;Box style={{ flex: 1, flexDirection: 'column', gap: 20, justifyContent: 'center' }}&gt;&#10;        {[&#10;          { d: '呼吸道感染 + 甲流', s: '4.58' },&#10;          { d: '多囊卵巢综合征', s: '4.92' },&#10;          { d: '乳房恶性肿瘤', s: '4.33' },&#10;        ].map((item, idx) =&gt; (&#10;          &lt;Box key={idx} style={{ flexDirection: 'row', alignItems: 'center', padding: '20px 24px', borderRadius: 12, background: '#F7FAFC', border: '1px solid #E2E8F0' }}&gt;&#10;            &lt;Box style={{ flex: 1 }}&gt;&#10;              &lt;Text style={{ fontSize: 20, fontWeight: 'bold', color: '#1A365D' }}&gt;{item.d}&lt;/Text&gt;&#10;            &lt;/Box&gt;&#10;            &lt;Text style={{ fontSize: 36, fontWeight: 'bold', color: '#2B6CB0' }}&gt;{item.s}&lt;/Text&gt;&#10;            &lt;Text style={{ fontSize: 16, color: '#718096', marginLeft: 8 }}&gt;/ 5&lt;/Text&gt;&#10;          &lt;/Box&gt;&#10;        ))}&#10;        &lt;Box style={{ padding: '16px 20px', borderRadius: 12, background: '#E6FFFA', border: '1px solid #B2F5EA' }}&gt;&#10;          &lt;Text style={{ fontSize: 17, color: '#2C7A7B', lineHeight: 1.6 }}&gt;&#10;            反模板自检：个性化分数 1.0 —— 温度建立在真实数据上，而非通用科普拼接。&#10;          &lt;/Text&gt;&#10;        &lt;/Box&gt;&#10;      &lt;/Box&gt;&#10;    &lt;/Box&gt;&#10;&#10;    &lt;Box style={{ flexDirection: 'row', alignItems: 'center', marginTop: 24 }}&gt;&#10;      &lt;Text style={{ fontSize: 14, color: '#718096' }}&gt;医护洞察与温度指引引擎&lt;/Text&gt;&#10;      &lt;Text style={{ fontSize: 14, color: '#718096', marginLeft: 'auto' }}&gt;08 / 12&lt;/Text&gt;&#10;    &lt;/Box&gt;&#10;  &lt;/Box&gt;&#10;&lt;/Slide&gt;&#10;"/>
+        <p:cNvPr id="219" name=""/>
         <p:cNvGrpSpPr/>
         <p:nvPr/>
       </p:nvGrpSpPr>
@@ -8337,7 +11024,7 @@
       </p:grpSpPr>
       <p:sp>
         <p:nvSpPr>
-          <p:cNvPr id="174" name=""/>
+          <p:cNvPr id="220" name=""/>
           <p:cNvSpPr/>
           <p:nvPr/>
         </p:nvSpPr>
@@ -8356,12 +11043,15 @@
         </p:spPr>
         <p:txBody>
           <a:bodyPr/>
-          <a:p/>
-        </p:txBody>
-      </p:sp>
-      <p:sp>
-        <p:nvSpPr>
-          <p:cNvPr id="175" name="" descr="{&quot;isTemplate&quot;:true,&quot;type&quot;:&quot;text&quot;}"/>
+          <a:p>
+            <a:pPr/>
+            <a:endParaRPr/>
+          </a:p>
+        </p:txBody>
+      </p:sp>
+      <p:sp>
+        <p:nvSpPr>
+          <p:cNvPr id="221" name="" descr="{&quot;isTemplate&quot;:true,&quot;type&quot;:&quot;text&quot;}"/>
           <p:cNvSpPr txBox="1"/>
           <p:nvPr/>
         </p:nvSpPr>
@@ -8396,7 +11086,7 @@
       </p:sp>
       <p:sp>
         <p:nvSpPr>
-          <p:cNvPr id="176" name="" descr="{&quot;isTemplate&quot;:true,&quot;type&quot;:&quot;text&quot;}"/>
+          <p:cNvPr id="222" name="" descr="{&quot;isTemplate&quot;:true,&quot;type&quot;:&quot;text&quot;}"/>
           <p:cNvSpPr txBox="1"/>
           <p:nvPr/>
         </p:nvSpPr>
@@ -8471,7 +11161,7 @@
       </p:sp>
       <p:sp>
         <p:nvSpPr>
-          <p:cNvPr id="177" name=""/>
+          <p:cNvPr id="223" name=""/>
           <p:cNvSpPr/>
           <p:nvPr/>
         </p:nvSpPr>
@@ -8497,12 +11187,15 @@
         </p:spPr>
         <p:txBody>
           <a:bodyPr/>
-          <a:p/>
-        </p:txBody>
-      </p:sp>
-      <p:sp>
-        <p:nvSpPr>
-          <p:cNvPr id="178" name="" descr="{&quot;isTemplate&quot;:true,&quot;type&quot;:&quot;text&quot;}"/>
+          <a:p>
+            <a:pPr/>
+            <a:endParaRPr/>
+          </a:p>
+        </p:txBody>
+      </p:sp>
+      <p:sp>
+        <p:nvSpPr>
+          <p:cNvPr id="224" name="" descr="{&quot;isTemplate&quot;:true,&quot;type&quot;:&quot;text&quot;}"/>
           <p:cNvSpPr txBox="1"/>
           <p:nvPr/>
         </p:nvSpPr>
@@ -8537,7 +11230,7 @@
       </p:sp>
       <p:sp>
         <p:nvSpPr>
-          <p:cNvPr id="179" name="" descr="{&quot;isTemplate&quot;:true,&quot;type&quot;:&quot;text&quot;}"/>
+          <p:cNvPr id="225" name="" descr="{&quot;isTemplate&quot;:true,&quot;type&quot;:&quot;text&quot;}"/>
           <p:cNvSpPr txBox="1"/>
           <p:nvPr/>
         </p:nvSpPr>
@@ -8614,7 +11307,7 @@
       </p:sp>
       <p:sp>
         <p:nvSpPr>
-          <p:cNvPr id="180" name=""/>
+          <p:cNvPr id="226" name=""/>
           <p:cNvSpPr/>
           <p:nvPr/>
         </p:nvSpPr>
@@ -8635,12 +11328,15 @@
         </p:spPr>
         <p:txBody>
           <a:bodyPr/>
-          <a:p/>
-        </p:txBody>
-      </p:sp>
-      <p:sp>
-        <p:nvSpPr>
-          <p:cNvPr id="181" name="" descr="{&quot;isTemplate&quot;:true,&quot;type&quot;:&quot;text&quot;}"/>
+          <a:p>
+            <a:pPr/>
+            <a:endParaRPr/>
+          </a:p>
+        </p:txBody>
+      </p:sp>
+      <p:sp>
+        <p:nvSpPr>
+          <p:cNvPr id="227" name="" descr="{&quot;isTemplate&quot;:true,&quot;type&quot;:&quot;text&quot;}"/>
           <p:cNvSpPr txBox="1"/>
           <p:nvPr/>
         </p:nvSpPr>
@@ -8797,7 +11493,7 @@
       </p:sp>
       <p:sp>
         <p:nvSpPr>
-          <p:cNvPr id="182" name=""/>
+          <p:cNvPr id="228" name=""/>
           <p:cNvSpPr/>
           <p:nvPr/>
         </p:nvSpPr>
@@ -8823,12 +11519,15 @@
         </p:spPr>
         <p:txBody>
           <a:bodyPr/>
-          <a:p/>
-        </p:txBody>
-      </p:sp>
-      <p:sp>
-        <p:nvSpPr>
-          <p:cNvPr id="183" name="" descr="{&quot;isTemplate&quot;:true,&quot;type&quot;:&quot;text&quot;}"/>
+          <a:p>
+            <a:pPr/>
+            <a:endParaRPr/>
+          </a:p>
+        </p:txBody>
+      </p:sp>
+      <p:sp>
+        <p:nvSpPr>
+          <p:cNvPr id="229" name="" descr="{&quot;isTemplate&quot;:true,&quot;type&quot;:&quot;text&quot;}"/>
           <p:cNvSpPr txBox="1"/>
           <p:nvPr/>
         </p:nvSpPr>
@@ -8883,7 +11582,7 @@
       </p:sp>
       <p:sp>
         <p:nvSpPr>
-          <p:cNvPr id="184" name="" descr="{&quot;isTemplate&quot;:true,&quot;type&quot;:&quot;text&quot;}"/>
+          <p:cNvPr id="230" name="" descr="{&quot;isTemplate&quot;:true,&quot;type&quot;:&quot;text&quot;}"/>
           <p:cNvSpPr txBox="1"/>
           <p:nvPr/>
         </p:nvSpPr>
@@ -8918,7 +11617,7 @@
       </p:sp>
       <p:sp>
         <p:nvSpPr>
-          <p:cNvPr id="185" name="" descr="{&quot;isTemplate&quot;:true,&quot;type&quot;:&quot;text&quot;}"/>
+          <p:cNvPr id="231" name="" descr="{&quot;isTemplate&quot;:true,&quot;type&quot;:&quot;text&quot;}"/>
           <p:cNvSpPr txBox="1"/>
           <p:nvPr/>
         </p:nvSpPr>
@@ -8953,7 +11652,7 @@
       </p:sp>
       <p:sp>
         <p:nvSpPr>
-          <p:cNvPr id="186" name=""/>
+          <p:cNvPr id="232" name=""/>
           <p:cNvSpPr/>
           <p:nvPr/>
         </p:nvSpPr>
@@ -8979,12 +11678,15 @@
         </p:spPr>
         <p:txBody>
           <a:bodyPr/>
-          <a:p/>
-        </p:txBody>
-      </p:sp>
-      <p:sp>
-        <p:nvSpPr>
-          <p:cNvPr id="187" name="" descr="{&quot;isTemplate&quot;:true,&quot;type&quot;:&quot;text&quot;}"/>
+          <a:p>
+            <a:pPr/>
+            <a:endParaRPr/>
+          </a:p>
+        </p:txBody>
+      </p:sp>
+      <p:sp>
+        <p:nvSpPr>
+          <p:cNvPr id="233" name="" descr="{&quot;isTemplate&quot;:true,&quot;type&quot;:&quot;text&quot;}"/>
           <p:cNvSpPr txBox="1"/>
           <p:nvPr/>
         </p:nvSpPr>
@@ -9019,7 +11721,7 @@
       </p:sp>
       <p:sp>
         <p:nvSpPr>
-          <p:cNvPr id="188" name="" descr="{&quot;isTemplate&quot;:true,&quot;type&quot;:&quot;text&quot;}"/>
+          <p:cNvPr id="234" name="" descr="{&quot;isTemplate&quot;:true,&quot;type&quot;:&quot;text&quot;}"/>
           <p:cNvSpPr txBox="1"/>
           <p:nvPr/>
         </p:nvSpPr>
@@ -9054,7 +11756,7 @@
       </p:sp>
       <p:sp>
         <p:nvSpPr>
-          <p:cNvPr id="189" name="" descr="{&quot;isTemplate&quot;:true,&quot;type&quot;:&quot;text&quot;}"/>
+          <p:cNvPr id="235" name="" descr="{&quot;isTemplate&quot;:true,&quot;type&quot;:&quot;text&quot;}"/>
           <p:cNvSpPr txBox="1"/>
           <p:nvPr/>
         </p:nvSpPr>
@@ -9089,7 +11791,7 @@
       </p:sp>
       <p:sp>
         <p:nvSpPr>
-          <p:cNvPr id="190" name=""/>
+          <p:cNvPr id="236" name=""/>
           <p:cNvSpPr/>
           <p:nvPr/>
         </p:nvSpPr>
@@ -9115,12 +11817,15 @@
         </p:spPr>
         <p:txBody>
           <a:bodyPr/>
-          <a:p/>
-        </p:txBody>
-      </p:sp>
-      <p:sp>
-        <p:nvSpPr>
-          <p:cNvPr id="191" name="" descr="{&quot;isTemplate&quot;:true,&quot;type&quot;:&quot;text&quot;}"/>
+          <a:p>
+            <a:pPr/>
+            <a:endParaRPr/>
+          </a:p>
+        </p:txBody>
+      </p:sp>
+      <p:sp>
+        <p:nvSpPr>
+          <p:cNvPr id="237" name="" descr="{&quot;isTemplate&quot;:true,&quot;type&quot;:&quot;text&quot;}"/>
           <p:cNvSpPr txBox="1"/>
           <p:nvPr/>
         </p:nvSpPr>
@@ -9155,7 +11860,7 @@
       </p:sp>
       <p:sp>
         <p:nvSpPr>
-          <p:cNvPr id="192" name="" descr="{&quot;isTemplate&quot;:true,&quot;type&quot;:&quot;text&quot;}"/>
+          <p:cNvPr id="238" name="" descr="{&quot;isTemplate&quot;:true,&quot;type&quot;:&quot;text&quot;}"/>
           <p:cNvSpPr txBox="1"/>
           <p:nvPr/>
         </p:nvSpPr>
@@ -9190,7 +11895,7 @@
       </p:sp>
       <p:sp>
         <p:nvSpPr>
-          <p:cNvPr id="193" name="" descr="{&quot;isTemplate&quot;:true,&quot;type&quot;:&quot;text&quot;}"/>
+          <p:cNvPr id="239" name="" descr="{&quot;isTemplate&quot;:true,&quot;type&quot;:&quot;text&quot;}"/>
           <p:cNvSpPr txBox="1"/>
           <p:nvPr/>
         </p:nvSpPr>
@@ -9225,7 +11930,7 @@
       </p:sp>
       <p:sp>
         <p:nvSpPr>
-          <p:cNvPr id="194" name=""/>
+          <p:cNvPr id="240" name=""/>
           <p:cNvSpPr/>
           <p:nvPr/>
         </p:nvSpPr>
@@ -9251,12 +11956,15 @@
         </p:spPr>
         <p:txBody>
           <a:bodyPr/>
-          <a:p/>
-        </p:txBody>
-      </p:sp>
-      <p:sp>
-        <p:nvSpPr>
-          <p:cNvPr id="195" name="" descr="{&quot;isTemplate&quot;:true,&quot;type&quot;:&quot;text&quot;}"/>
+          <a:p>
+            <a:pPr/>
+            <a:endParaRPr/>
+          </a:p>
+        </p:txBody>
+      </p:sp>
+      <p:sp>
+        <p:nvSpPr>
+          <p:cNvPr id="241" name="" descr="{&quot;isTemplate&quot;:true,&quot;type&quot;:&quot;text&quot;}"/>
           <p:cNvSpPr txBox="1"/>
           <p:nvPr/>
         </p:nvSpPr>
@@ -9313,7 +12021,7 @@
       </p:sp>
       <p:sp>
         <p:nvSpPr>
-          <p:cNvPr id="196" name="" descr="{&quot;isTemplate&quot;:true,&quot;type&quot;:&quot;text&quot;}"/>
+          <p:cNvPr id="242" name="" descr="{&quot;isTemplate&quot;:true,&quot;type&quot;:&quot;text&quot;}"/>
           <p:cNvSpPr txBox="1"/>
           <p:nvPr/>
         </p:nvSpPr>
@@ -9348,7 +12056,7 @@
       </p:sp>
       <p:sp>
         <p:nvSpPr>
-          <p:cNvPr id="197" name="" descr="{&quot;isTemplate&quot;:true,&quot;type&quot;:&quot;text&quot;}"/>
+          <p:cNvPr id="243" name="" descr="{&quot;isTemplate&quot;:true,&quot;type&quot;:&quot;text&quot;}"/>
           <p:cNvSpPr txBox="1"/>
           <p:nvPr/>
         </p:nvSpPr>
@@ -9368,16 +12076,22 @@
               </a:lnSpc>
             </a:pPr>
             <a:r>
-              <a:rPr lang="en-US" sz="1050">
+              <a:rPr lang="zh-CN" sz="1050">
                 <a:solidFill>
                   <a:srgbClr val="718096"/>
                 </a:solidFill>
                 <a:latin typeface="Microsoft YaHei"/>
                 <a:ea typeface="Microsoft YaHei"/>
               </a:rPr>
-              <a:t>08 / 12</a:t>
-            </a:r>
-            <a:endParaRPr/>
+              <a:t>08 / 13</a:t>
+            </a:r>
+            <a:endParaRPr lang="en-US" sz="1050">
+              <a:solidFill>
+                <a:srgbClr val="718096"/>
+              </a:solidFill>
+              <a:latin typeface="Microsoft YaHei"/>
+              <a:ea typeface="Microsoft YaHei"/>
+            </a:endParaRPr>
           </a:p>
         </p:txBody>
       </p:sp>
@@ -9391,7 +12105,7 @@
   <p:cSld>
     <p:spTree>
       <p:nvGrpSpPr>
-        <p:cNvPr id="198" name="" descr="&lt;Slide&gt;&#10;  &lt;Box style={{ width: '1280px', height: '720px', background: '#FFFFFF', flexDirection: 'column', padding: '40px 70px' }}&gt;&#10;    &lt;Box style={{ flexDirection: 'row', alignItems: 'baseline', marginBottom: 32 }}&gt;&#10;      &lt;Text style={{ fontSize: 34, fontWeight: 'bold', color: '#1A365D' }}&gt;品质画像&lt;/Text&gt;&#10;      &lt;Text style={{ fontSize: 18, color: '#718096', marginLeft: 14 }}&gt;纯数据驱动 · 可解释可溯源&lt;/Text&gt;&#10;    &lt;/Box&gt;&#10;&#10;    &lt;Box style={{ flexDirection: 'row', gap: 28, flex: 1 }}&gt;&#10;      {/* 左：维度 */}&#10;      &lt;Box style={{ flex: 1.1, flexDirection: 'column', justifyContent: 'center' }}&gt;&#10;        &lt;Text style={{ fontSize: 20, fontWeight: 'bold', color: '#1A365D', marginBottom: 20 }}&gt;7 个画像维度（目标 ≥ 5）&lt;/Text&gt;&#10;        &lt;Box style={{ flexDirection: 'row', flexWrap: 'wrap', gap: 12 }}&gt;&#10;          {['费用效率', '平均住院天数', '自费比例', '用药合理性', '治疗规范性', '再入院率', '患者满意度'].map((d, idx) =&gt; (&#10;            &lt;Box key={idx} style={{ padding: '12px 20px', borderRadius: 24, background: '#EBF8FF', border: '1px solid #BEE3F8' }}&gt;&#10;              &lt;Text style={{ fontSize: 18, color: '#2B6CB0' }}&gt;{d}&lt;/Text&gt;&#10;            &lt;/Box&gt;&#10;          ))}&#10;        &lt;/Box&gt;&#10;        &lt;Text style={{ fontSize: 18, color: '#4A5568', lineHeight: 1.6, marginTop: 24 }}&gt;&#10;          覆盖 &lt;Text style={{ fontWeight: 'bold', color: '#1A365D' }}&gt;62 病种 × 79 机构&lt;/Text&gt;，远超&quot;≥3 病种 × ≥5 机构&quot;要求。&#10;        &lt;/Text&gt;&#10;      &lt;/Box&gt;&#10;&#10;      {/* 右：可解释推荐 */}&#10;      &lt;Box style={{ flex: 1, borderRadius: 16, background: '#F7FAFC', padding: 32, flexDirection: 'column', justifyContent: 'center', border: '1px solid #E2E8F0' }}&gt;&#10;        &lt;Text style={{ fontSize: 20, fontWeight: 'bold', color: '#1A365D', marginBottom: 16 }}&gt;每条推荐 2~6 条量化理由&lt;/Text&gt;&#10;        &lt;Box style={{ padding: '16px 20px', borderRadius: 10, background: '#FFFFFF', marginBottom: 12 }}&gt;&#10;          &lt;Text style={{ fontSize: 17, color: '#4A5568', lineHeight: 1.7 }}&gt;&#10;            · 费用效率 2384.32 元，比该病种均值 2935.32 元 &lt;Text style={{ fontWeight: 'bold', color: '#2C7A7B' }}&gt;低 19%&lt;/Text&gt;&#10;          &lt;/Text&gt;&#10;        &lt;/Box&gt;&#10;        &lt;Box style={{ padding: '16px 20px', borderRadius: 10, background: '#FFFFFF' }}&gt;&#10;          &lt;Text style={{ fontSize: 17, color: '#4A5568', lineHeight: 1.7 }}&gt;&#10;            · 自费比例 5.07%，比该病种均值 10.60% &lt;Text style={{ fontWeight: 'bold', color: '#2C7A7B' }}&gt;低 52%&lt;/Text&gt;&#10;          &lt;/Text&gt;&#10;        &lt;/Box&gt;&#10;        &lt;Text style={{ fontSize: 16, color: '#718096', marginTop: 16, fontStyle: 'italic' }}&gt;每条理由都溯源到数据字段，不靠 LLM 自由发挥。&lt;/Text&gt;&#10;      &lt;/Box&gt;&#10;    &lt;/Box&gt;&#10;&#10;    &lt;Box style={{ flexDirection: 'row', alignItems: 'center', marginTop: 24 }}&gt;&#10;      &lt;Text style={{ fontSize: 14, color: '#718096' }}&gt;医护洞察与温度指引引擎&lt;/Text&gt;&#10;      &lt;Text style={{ fontSize: 14, color: '#718096', marginLeft: 'auto' }}&gt;09 / 12&lt;/Text&gt;&#10;    &lt;/Box&gt;&#10;  &lt;/Box&gt;&#10;&lt;/Slide&gt;&#10;"/>
+        <p:cNvPr id="244" name=""/>
         <p:cNvGrpSpPr/>
         <p:nvPr/>
       </p:nvGrpSpPr>
@@ -9405,7 +12119,7 @@
       </p:grpSpPr>
       <p:sp>
         <p:nvSpPr>
-          <p:cNvPr id="199" name=""/>
+          <p:cNvPr id="245" name=""/>
           <p:cNvSpPr/>
           <p:nvPr/>
         </p:nvSpPr>
@@ -9424,12 +12138,15 @@
         </p:spPr>
         <p:txBody>
           <a:bodyPr/>
-          <a:p/>
-        </p:txBody>
-      </p:sp>
-      <p:sp>
-        <p:nvSpPr>
-          <p:cNvPr id="200" name="" descr="{&quot;isTemplate&quot;:true,&quot;type&quot;:&quot;text&quot;}"/>
+          <a:p>
+            <a:pPr/>
+            <a:endParaRPr/>
+          </a:p>
+        </p:txBody>
+      </p:sp>
+      <p:sp>
+        <p:nvSpPr>
+          <p:cNvPr id="246" name="" descr="{&quot;isTemplate&quot;:true,&quot;type&quot;:&quot;text&quot;}"/>
           <p:cNvSpPr txBox="1"/>
           <p:nvPr/>
         </p:nvSpPr>
@@ -9464,7 +12181,7 @@
       </p:sp>
       <p:sp>
         <p:nvSpPr>
-          <p:cNvPr id="201" name="" descr="{&quot;isTemplate&quot;:true,&quot;type&quot;:&quot;text&quot;}"/>
+          <p:cNvPr id="247" name="" descr="{&quot;isTemplate&quot;:true,&quot;type&quot;:&quot;text&quot;}"/>
           <p:cNvSpPr txBox="1"/>
           <p:nvPr/>
         </p:nvSpPr>
@@ -9519,7 +12236,7 @@
       </p:sp>
       <p:sp>
         <p:nvSpPr>
-          <p:cNvPr id="202" name="" descr="{&quot;isTemplate&quot;:true,&quot;type&quot;:&quot;text&quot;}"/>
+          <p:cNvPr id="248" name="" descr="{&quot;isTemplate&quot;:true,&quot;type&quot;:&quot;text&quot;}"/>
           <p:cNvSpPr txBox="1"/>
           <p:nvPr/>
         </p:nvSpPr>
@@ -9584,7 +12301,7 @@
       </p:sp>
       <p:sp>
         <p:nvSpPr>
-          <p:cNvPr id="203" name=""/>
+          <p:cNvPr id="249" name=""/>
           <p:cNvSpPr/>
           <p:nvPr/>
         </p:nvSpPr>
@@ -9610,12 +12327,15 @@
         </p:spPr>
         <p:txBody>
           <a:bodyPr/>
-          <a:p/>
-        </p:txBody>
-      </p:sp>
-      <p:sp>
-        <p:nvSpPr>
-          <p:cNvPr id="204" name="" descr="{&quot;isTemplate&quot;:true,&quot;type&quot;:&quot;text&quot;}"/>
+          <a:p>
+            <a:pPr/>
+            <a:endParaRPr/>
+          </a:p>
+        </p:txBody>
+      </p:sp>
+      <p:sp>
+        <p:nvSpPr>
+          <p:cNvPr id="250" name="" descr="{&quot;isTemplate&quot;:true,&quot;type&quot;:&quot;text&quot;}"/>
           <p:cNvSpPr txBox="1"/>
           <p:nvPr/>
         </p:nvSpPr>
@@ -9650,7 +12370,7 @@
       </p:sp>
       <p:sp>
         <p:nvSpPr>
-          <p:cNvPr id="205" name=""/>
+          <p:cNvPr id="251" name=""/>
           <p:cNvSpPr/>
           <p:nvPr/>
         </p:nvSpPr>
@@ -9676,12 +12396,15 @@
         </p:spPr>
         <p:txBody>
           <a:bodyPr/>
-          <a:p/>
-        </p:txBody>
-      </p:sp>
-      <p:sp>
-        <p:nvSpPr>
-          <p:cNvPr id="206" name="" descr="{&quot;isTemplate&quot;:true,&quot;type&quot;:&quot;text&quot;}"/>
+          <a:p>
+            <a:pPr/>
+            <a:endParaRPr/>
+          </a:p>
+        </p:txBody>
+      </p:sp>
+      <p:sp>
+        <p:nvSpPr>
+          <p:cNvPr id="252" name="" descr="{&quot;isTemplate&quot;:true,&quot;type&quot;:&quot;text&quot;}"/>
           <p:cNvSpPr txBox="1"/>
           <p:nvPr/>
         </p:nvSpPr>
@@ -9716,7 +12439,7 @@
       </p:sp>
       <p:sp>
         <p:nvSpPr>
-          <p:cNvPr id="207" name=""/>
+          <p:cNvPr id="253" name=""/>
           <p:cNvSpPr/>
           <p:nvPr/>
         </p:nvSpPr>
@@ -9742,12 +12465,15 @@
         </p:spPr>
         <p:txBody>
           <a:bodyPr/>
-          <a:p/>
-        </p:txBody>
-      </p:sp>
-      <p:sp>
-        <p:nvSpPr>
-          <p:cNvPr id="208" name="" descr="{&quot;isTemplate&quot;:true,&quot;type&quot;:&quot;text&quot;}"/>
+          <a:p>
+            <a:pPr/>
+            <a:endParaRPr/>
+          </a:p>
+        </p:txBody>
+      </p:sp>
+      <p:sp>
+        <p:nvSpPr>
+          <p:cNvPr id="254" name="" descr="{&quot;isTemplate&quot;:true,&quot;type&quot;:&quot;text&quot;}"/>
           <p:cNvSpPr txBox="1"/>
           <p:nvPr/>
         </p:nvSpPr>
@@ -9782,7 +12508,7 @@
       </p:sp>
       <p:sp>
         <p:nvSpPr>
-          <p:cNvPr id="209" name=""/>
+          <p:cNvPr id="255" name=""/>
           <p:cNvSpPr/>
           <p:nvPr/>
         </p:nvSpPr>
@@ -9808,12 +12534,15 @@
         </p:spPr>
         <p:txBody>
           <a:bodyPr/>
-          <a:p/>
-        </p:txBody>
-      </p:sp>
-      <p:sp>
-        <p:nvSpPr>
-          <p:cNvPr id="210" name="" descr="{&quot;isTemplate&quot;:true,&quot;type&quot;:&quot;text&quot;}"/>
+          <a:p>
+            <a:pPr/>
+            <a:endParaRPr/>
+          </a:p>
+        </p:txBody>
+      </p:sp>
+      <p:sp>
+        <p:nvSpPr>
+          <p:cNvPr id="256" name="" descr="{&quot;isTemplate&quot;:true,&quot;type&quot;:&quot;text&quot;}"/>
           <p:cNvSpPr txBox="1"/>
           <p:nvPr/>
         </p:nvSpPr>
@@ -9848,7 +12577,7 @@
       </p:sp>
       <p:sp>
         <p:nvSpPr>
-          <p:cNvPr id="211" name=""/>
+          <p:cNvPr id="257" name=""/>
           <p:cNvSpPr/>
           <p:nvPr/>
         </p:nvSpPr>
@@ -9874,12 +12603,15 @@
         </p:spPr>
         <p:txBody>
           <a:bodyPr/>
-          <a:p/>
-        </p:txBody>
-      </p:sp>
-      <p:sp>
-        <p:nvSpPr>
-          <p:cNvPr id="212" name="" descr="{&quot;isTemplate&quot;:true,&quot;type&quot;:&quot;text&quot;}"/>
+          <a:p>
+            <a:pPr/>
+            <a:endParaRPr/>
+          </a:p>
+        </p:txBody>
+      </p:sp>
+      <p:sp>
+        <p:nvSpPr>
+          <p:cNvPr id="258" name="" descr="{&quot;isTemplate&quot;:true,&quot;type&quot;:&quot;text&quot;}"/>
           <p:cNvSpPr txBox="1"/>
           <p:nvPr/>
         </p:nvSpPr>
@@ -9914,7 +12646,7 @@
       </p:sp>
       <p:sp>
         <p:nvSpPr>
-          <p:cNvPr id="213" name=""/>
+          <p:cNvPr id="259" name=""/>
           <p:cNvSpPr/>
           <p:nvPr/>
         </p:nvSpPr>
@@ -9940,12 +12672,15 @@
         </p:spPr>
         <p:txBody>
           <a:bodyPr/>
-          <a:p/>
-        </p:txBody>
-      </p:sp>
-      <p:sp>
-        <p:nvSpPr>
-          <p:cNvPr id="214" name="" descr="{&quot;isTemplate&quot;:true,&quot;type&quot;:&quot;text&quot;}"/>
+          <a:p>
+            <a:pPr/>
+            <a:endParaRPr/>
+          </a:p>
+        </p:txBody>
+      </p:sp>
+      <p:sp>
+        <p:nvSpPr>
+          <p:cNvPr id="260" name="" descr="{&quot;isTemplate&quot;:true,&quot;type&quot;:&quot;text&quot;}"/>
           <p:cNvSpPr txBox="1"/>
           <p:nvPr/>
         </p:nvSpPr>
@@ -9980,7 +12715,7 @@
       </p:sp>
       <p:sp>
         <p:nvSpPr>
-          <p:cNvPr id="215" name=""/>
+          <p:cNvPr id="261" name=""/>
           <p:cNvSpPr/>
           <p:nvPr/>
         </p:nvSpPr>
@@ -10006,12 +12741,15 @@
         </p:spPr>
         <p:txBody>
           <a:bodyPr/>
-          <a:p/>
-        </p:txBody>
-      </p:sp>
-      <p:sp>
-        <p:nvSpPr>
-          <p:cNvPr id="216" name="" descr="{&quot;isTemplate&quot;:true,&quot;type&quot;:&quot;text&quot;}"/>
+          <a:p>
+            <a:pPr/>
+            <a:endParaRPr/>
+          </a:p>
+        </p:txBody>
+      </p:sp>
+      <p:sp>
+        <p:nvSpPr>
+          <p:cNvPr id="262" name="" descr="{&quot;isTemplate&quot;:true,&quot;type&quot;:&quot;text&quot;}"/>
           <p:cNvSpPr txBox="1"/>
           <p:nvPr/>
         </p:nvSpPr>
@@ -10046,7 +12784,7 @@
       </p:sp>
       <p:sp>
         <p:nvSpPr>
-          <p:cNvPr id="217" name="" descr="{&quot;isTemplate&quot;:true,&quot;type&quot;:&quot;text&quot;}"/>
+          <p:cNvPr id="263" name="" descr="{&quot;isTemplate&quot;:true,&quot;type&quot;:&quot;text&quot;}"/>
           <p:cNvSpPr txBox="1"/>
           <p:nvPr/>
         </p:nvSpPr>
@@ -10201,7 +12939,7 @@
       </p:sp>
       <p:sp>
         <p:nvSpPr>
-          <p:cNvPr id="218" name=""/>
+          <p:cNvPr id="264" name=""/>
           <p:cNvSpPr/>
           <p:nvPr/>
         </p:nvSpPr>
@@ -10227,12 +12965,15 @@
         </p:spPr>
         <p:txBody>
           <a:bodyPr/>
-          <a:p/>
-        </p:txBody>
-      </p:sp>
-      <p:sp>
-        <p:nvSpPr>
-          <p:cNvPr id="219" name="" descr="{&quot;isTemplate&quot;:true,&quot;type&quot;:&quot;text&quot;}"/>
+          <a:p>
+            <a:pPr/>
+            <a:endParaRPr/>
+          </a:p>
+        </p:txBody>
+      </p:sp>
+      <p:sp>
+        <p:nvSpPr>
+          <p:cNvPr id="265" name="" descr="{&quot;isTemplate&quot;:true,&quot;type&quot;:&quot;text&quot;}"/>
           <p:cNvSpPr txBox="1"/>
           <p:nvPr/>
         </p:nvSpPr>
@@ -10287,7 +13028,7 @@
       </p:sp>
       <p:sp>
         <p:nvSpPr>
-          <p:cNvPr id="220" name=""/>
+          <p:cNvPr id="266" name=""/>
           <p:cNvSpPr/>
           <p:nvPr/>
         </p:nvSpPr>
@@ -10308,12 +13049,15 @@
         </p:spPr>
         <p:txBody>
           <a:bodyPr/>
-          <a:p/>
-        </p:txBody>
-      </p:sp>
-      <p:sp>
-        <p:nvSpPr>
-          <p:cNvPr id="221" name="" descr="{&quot;isTemplate&quot;:true,&quot;type&quot;:&quot;text&quot;}"/>
+          <a:p>
+            <a:pPr/>
+            <a:endParaRPr/>
+          </a:p>
+        </p:txBody>
+      </p:sp>
+      <p:sp>
+        <p:nvSpPr>
+          <p:cNvPr id="267" name="" descr="{&quot;isTemplate&quot;:true,&quot;type&quot;:&quot;text&quot;}"/>
           <p:cNvSpPr txBox="1"/>
           <p:nvPr/>
         </p:nvSpPr>
@@ -10430,7 +13174,7 @@
       </p:sp>
       <p:sp>
         <p:nvSpPr>
-          <p:cNvPr id="222" name=""/>
+          <p:cNvPr id="268" name=""/>
           <p:cNvSpPr/>
           <p:nvPr/>
         </p:nvSpPr>
@@ -10451,12 +13195,15 @@
         </p:spPr>
         <p:txBody>
           <a:bodyPr/>
-          <a:p/>
-        </p:txBody>
-      </p:sp>
-      <p:sp>
-        <p:nvSpPr>
-          <p:cNvPr id="223" name="" descr="{&quot;isTemplate&quot;:true,&quot;type&quot;:&quot;text&quot;}"/>
+          <a:p>
+            <a:pPr/>
+            <a:endParaRPr/>
+          </a:p>
+        </p:txBody>
+      </p:sp>
+      <p:sp>
+        <p:nvSpPr>
+          <p:cNvPr id="269" name="" descr="{&quot;isTemplate&quot;:true,&quot;type&quot;:&quot;text&quot;}"/>
           <p:cNvSpPr txBox="1"/>
           <p:nvPr/>
         </p:nvSpPr>
@@ -10551,7 +13298,7 @@
       </p:sp>
       <p:sp>
         <p:nvSpPr>
-          <p:cNvPr id="224" name="" descr="{&quot;isTemplate&quot;:true,&quot;type&quot;:&quot;text&quot;}"/>
+          <p:cNvPr id="270" name="" descr="{&quot;isTemplate&quot;:true,&quot;type&quot;:&quot;text&quot;}"/>
           <p:cNvSpPr txBox="1"/>
           <p:nvPr/>
         </p:nvSpPr>
@@ -10606,7 +13353,7 @@
       </p:sp>
       <p:sp>
         <p:nvSpPr>
-          <p:cNvPr id="225" name="" descr="{&quot;isTemplate&quot;:true,&quot;type&quot;:&quot;text&quot;}"/>
+          <p:cNvPr id="271" name="" descr="{&quot;isTemplate&quot;:true,&quot;type&quot;:&quot;text&quot;}"/>
           <p:cNvSpPr txBox="1"/>
           <p:nvPr/>
         </p:nvSpPr>
@@ -10641,7 +13388,7 @@
       </p:sp>
       <p:sp>
         <p:nvSpPr>
-          <p:cNvPr id="226" name="" descr="{&quot;isTemplate&quot;:true,&quot;type&quot;:&quot;text&quot;}"/>
+          <p:cNvPr id="272" name="" descr="{&quot;isTemplate&quot;:true,&quot;type&quot;:&quot;text&quot;}"/>
           <p:cNvSpPr txBox="1"/>
           <p:nvPr/>
         </p:nvSpPr>
@@ -10661,16 +13408,22 @@
               </a:lnSpc>
             </a:pPr>
             <a:r>
-              <a:rPr lang="en-US" sz="1050">
+              <a:rPr lang="zh-CN" sz="1050">
                 <a:solidFill>
                   <a:srgbClr val="718096"/>
                 </a:solidFill>
                 <a:latin typeface="Microsoft YaHei"/>
                 <a:ea typeface="Microsoft YaHei"/>
               </a:rPr>
-              <a:t>09 / 12</a:t>
-            </a:r>
-            <a:endParaRPr/>
+              <a:t>09 / 13</a:t>
+            </a:r>
+            <a:endParaRPr lang="en-US" sz="1050">
+              <a:solidFill>
+                <a:srgbClr val="718096"/>
+              </a:solidFill>
+              <a:latin typeface="Microsoft YaHei"/>
+              <a:ea typeface="Microsoft YaHei"/>
+            </a:endParaRPr>
           </a:p>
         </p:txBody>
       </p:sp>
